--- a/out/5-kurs-tibbiy-profilaktika-03.pptx
+++ b/out/5-kurs-tibbiy-profilaktika-03.pptx
@@ -7225,7 +7225,7 @@
         <p:spPr>
           <a:xfrm>
             <a:off x="640080" y="1417320"/>
-            <a:ext cx="5394960" cy="4480560"/>
+            <a:ext cx="4572000" cy="4480560"/>
           </a:xfrm>
           <a:prstGeom prst="rect">
             <a:avLst/>
@@ -7287,262 +7287,695 @@
           </a:p>
         </p:txBody>
       </p:sp>
-      <p:graphicFrame>
-        <p:nvGraphicFramePr>
-          <p:cNvPr id="9" name="Table 8"/>
-          <p:cNvGraphicFramePr>
-            <a:graphicFrameLocks noGrp="1"/>
-          </p:cNvGraphicFramePr>
-          <p:nvPr/>
-        </p:nvGraphicFramePr>
-        <p:xfrm>
-          <a:off x="6263640" y="1463040"/>
-          <a:ext cx="5287975" cy="3072380"/>
-        </p:xfrm>
-        <a:graphic>
-          <a:graphicData uri="http://schemas.openxmlformats.org/drawingml/2006/table">
-            <a:tbl>
-              <a:tblPr firstRow="1" bandRow="1">
-                <a:tableStyleId>{5C22544A-7EE6-4342-B048-85BDC9FD1C3A}</a:tableStyleId>
-              </a:tblPr>
-              <a:tblGrid>
-                <a:gridCol w="1510850"/>
-                <a:gridCol w="3777125"/>
-              </a:tblGrid>
-              <a:tr h="614476">
-                <a:tc>
-                  <a:txBody>
-                    <a:bodyPr/>
-                    <a:lstStyle/>
-                    <a:p>
-                      <a:r>
-                        <a:rPr sz="1800" b="1">
-                          <a:solidFill>
-                            <a:srgbClr val="FFFFFF"/>
-                          </a:solidFill>
-                        </a:rPr>
-                        <a:t>Turi</a:t>
-                      </a:r>
-                    </a:p>
-                  </a:txBody>
-                  <a:tcPr marL="73152" marR="73152" marT="36576" marB="36576">
-                    <a:solidFill>
-                      <a:srgbClr val="0B1F3A"/>
-                    </a:solidFill>
-                  </a:tcPr>
-                </a:tc>
-                <a:tc>
-                  <a:txBody>
-                    <a:bodyPr/>
-                    <a:lstStyle/>
-                    <a:p>
-                      <a:r>
-                        <a:rPr sz="1800" b="1">
-                          <a:solidFill>
-                            <a:srgbClr val="FFFFFF"/>
-                          </a:solidFill>
-                        </a:rPr>
-                        <a:t>Ko‘rinishlari</a:t>
-                      </a:r>
-                    </a:p>
-                  </a:txBody>
-                  <a:tcPr marL="73152" marR="73152" marT="36576" marB="36576">
-                    <a:solidFill>
-                      <a:srgbClr val="0B1F3A"/>
-                    </a:solidFill>
-                  </a:tcPr>
-                </a:tc>
-              </a:tr>
-              <a:tr h="614476">
-                <a:tc>
-                  <a:txBody>
-                    <a:bodyPr/>
-                    <a:lstStyle/>
-                    <a:p>
-                      <a:r>
-                        <a:rPr sz="1700" b="0">
-                          <a:solidFill>
-                            <a:srgbClr val="1F2937"/>
-                          </a:solidFill>
-                        </a:rPr>
-                        <a:t>Ishlab chiqarish</a:t>
-                      </a:r>
-                    </a:p>
-                  </a:txBody>
-                  <a:tcPr marL="73152" marR="73152" marT="36576" marB="36576">
-                    <a:solidFill>
-                      <a:srgbClr val="E8EEF6"/>
-                    </a:solidFill>
-                  </a:tcPr>
-                </a:tc>
-                <a:tc>
-                  <a:txBody>
-                    <a:bodyPr/>
-                    <a:lstStyle/>
-                    <a:p>
-                      <a:r>
-                        <a:rPr sz="1700" b="0">
-                          <a:solidFill>
-                            <a:srgbClr val="1F2937"/>
-                          </a:solidFill>
-                        </a:rPr>
-                        <a:t>sanoat, qishloq xo‘jaligi, qurilish</a:t>
-                      </a:r>
-                    </a:p>
-                  </a:txBody>
-                  <a:tcPr marL="73152" marR="73152" marT="36576" marB="36576">
-                    <a:solidFill>
-                      <a:srgbClr val="E8EEF6"/>
-                    </a:solidFill>
-                  </a:tcPr>
-                </a:tc>
-              </a:tr>
-              <a:tr h="614476">
-                <a:tc>
-                  <a:txBody>
-                    <a:bodyPr/>
-                    <a:lstStyle/>
-                    <a:p>
-                      <a:r>
-                        <a:rPr sz="1700" b="0">
-                          <a:solidFill>
-                            <a:srgbClr val="1F2937"/>
-                          </a:solidFill>
-                        </a:rPr>
-                        <a:t>Transport</a:t>
-                      </a:r>
-                    </a:p>
-                  </a:txBody>
-                  <a:tcPr marL="73152" marR="73152" marT="36576" marB="36576">
-                    <a:solidFill>
-                      <a:srgbClr val="FFFFFF"/>
-                    </a:solidFill>
-                  </a:tcPr>
-                </a:tc>
-                <a:tc>
-                  <a:txBody>
-                    <a:bodyPr/>
-                    <a:lstStyle/>
-                    <a:p>
-                      <a:r>
-                        <a:rPr sz="1700" b="0">
-                          <a:solidFill>
-                            <a:srgbClr val="1F2937"/>
-                          </a:solidFill>
-                        </a:rPr>
-                        <a:t>avto, moto, velosiped, temir yo‘l, havo, suv</a:t>
-                      </a:r>
-                    </a:p>
-                  </a:txBody>
-                  <a:tcPr marL="73152" marR="73152" marT="36576" marB="36576">
-                    <a:solidFill>
-                      <a:srgbClr val="FFFFFF"/>
-                    </a:solidFill>
-                  </a:tcPr>
-                </a:tc>
-              </a:tr>
-              <a:tr h="614476">
-                <a:tc>
-                  <a:txBody>
-                    <a:bodyPr/>
-                    <a:lstStyle/>
-                    <a:p>
-                      <a:r>
-                        <a:rPr sz="1700" b="0">
-                          <a:solidFill>
-                            <a:srgbClr val="1F2937"/>
-                          </a:solidFill>
-                        </a:rPr>
-                        <a:t>Harbiy</a:t>
-                      </a:r>
-                    </a:p>
-                  </a:txBody>
-                  <a:tcPr marL="73152" marR="73152" marT="36576" marB="36576">
-                    <a:solidFill>
-                      <a:srgbClr val="E8EEF6"/>
-                    </a:solidFill>
-                  </a:tcPr>
-                </a:tc>
-                <a:tc>
-                  <a:txBody>
-                    <a:bodyPr/>
-                    <a:lstStyle/>
-                    <a:p>
-                      <a:r>
-                        <a:rPr sz="1700" b="0">
-                          <a:solidFill>
-                            <a:srgbClr val="1F2937"/>
-                          </a:solidFill>
-                        </a:rPr>
-                        <a:t>urush va tinchlik davri</a:t>
-                      </a:r>
-                    </a:p>
-                  </a:txBody>
-                  <a:tcPr marL="73152" marR="73152" marT="36576" marB="36576">
-                    <a:solidFill>
-                      <a:srgbClr val="E8EEF6"/>
-                    </a:solidFill>
-                  </a:tcPr>
-                </a:tc>
-              </a:tr>
-              <a:tr h="614476">
-                <a:tc>
-                  <a:txBody>
-                    <a:bodyPr/>
-                    <a:lstStyle/>
-                    <a:p>
-                      <a:r>
-                        <a:rPr sz="1700" b="0">
-                          <a:solidFill>
-                            <a:srgbClr val="1F2937"/>
-                          </a:solidFill>
-                        </a:rPr>
-                        <a:t>Boshqalar</a:t>
-                      </a:r>
-                    </a:p>
-                  </a:txBody>
-                  <a:tcPr marL="73152" marR="73152" marT="36576" marB="36576">
-                    <a:solidFill>
-                      <a:srgbClr val="FFFFFF"/>
-                    </a:solidFill>
-                  </a:tcPr>
-                </a:tc>
-                <a:tc>
-                  <a:txBody>
-                    <a:bodyPr/>
-                    <a:lstStyle/>
-                    <a:p>
-                      <a:r>
-                        <a:rPr sz="1700" b="0">
-                          <a:solidFill>
-                            <a:srgbClr val="1F2937"/>
-                          </a:solidFill>
-                        </a:rPr>
-                        <a:t>ko‘cha, sport, maktab, maishiy</a:t>
-                      </a:r>
-                    </a:p>
-                  </a:txBody>
-                  <a:tcPr marL="73152" marR="73152" marT="36576" marB="36576">
-                    <a:solidFill>
-                      <a:srgbClr val="FFFFFF"/>
-                    </a:solidFill>
-                  </a:tcPr>
-                </a:tc>
-              </a:tr>
-            </a:tbl>
-          </a:graphicData>
-        </a:graphic>
-      </p:graphicFrame>
-      <p:sp>
-        <p:nvSpPr>
-          <p:cNvPr id="10" name="TextBox 9"/>
+      <p:sp>
+        <p:nvSpPr>
+          <p:cNvPr id="9" name="Rounded Rectangle 8"/>
+          <p:cNvSpPr/>
+          <p:nvPr/>
+        </p:nvSpPr>
+        <p:spPr>
+          <a:xfrm>
+            <a:off x="5440680" y="2788920"/>
+            <a:ext cx="2011680" cy="1280160"/>
+          </a:xfrm>
+          <a:prstGeom prst="roundRect">
+            <a:avLst/>
+          </a:prstGeom>
+          <a:solidFill>
+            <a:srgbClr val="0B1F3A"/>
+          </a:solidFill>
+          <a:ln>
+            <a:noFill/>
+          </a:ln>
+          <a:effectLst/>
+        </p:spPr>
+        <p:style>
+          <a:lnRef idx="1">
+            <a:schemeClr val="accent1"/>
+          </a:lnRef>
+          <a:fillRef idx="3">
+            <a:schemeClr val="accent1"/>
+          </a:fillRef>
+          <a:effectRef idx="2">
+            <a:schemeClr val="accent1"/>
+          </a:effectRef>
+          <a:fontRef idx="minor">
+            <a:schemeClr val="lt1"/>
+          </a:fontRef>
+        </p:style>
+        <p:txBody>
+          <a:bodyPr rtlCol="0" anchor="ctr" wrap="square" tIns="36576" bIns="36576"/>
+          <a:lstStyle/>
+          <a:p>
+            <a:pPr algn="ctr">
+              <a:spcAft>
+                <a:spcPts val="200"/>
+              </a:spcAft>
+            </a:pPr>
+            <a:r>
+              <a:rPr sz="1800" b="1">
+                <a:solidFill>
+                  <a:srgbClr val="FFFFFF"/>
+                </a:solidFill>
+                <a:latin typeface="Calibri"/>
+              </a:rPr>
+              <a:t>Travmatizm turlari</a:t>
+            </a:r>
+          </a:p>
+        </p:txBody>
+      </p:sp>
+      <p:cxnSp>
+        <p:nvCxnSpPr>
+          <p:cNvPr id="10" name="Connector 9"/>
+          <p:cNvCxnSpPr/>
+          <p:nvPr/>
+        </p:nvCxnSpPr>
+        <p:spPr>
+          <a:xfrm>
+            <a:off x="7452360" y="3429000"/>
+            <a:ext cx="160020" cy="0"/>
+          </a:xfrm>
+          <a:prstGeom prst="line">
+            <a:avLst/>
+          </a:prstGeom>
+          <a:ln w="25400">
+            <a:solidFill>
+              <a:srgbClr val="C9A227"/>
+            </a:solidFill>
+          </a:ln>
+        </p:spPr>
+        <p:style>
+          <a:lnRef idx="2">
+            <a:schemeClr val="accent1"/>
+          </a:lnRef>
+          <a:fillRef idx="0">
+            <a:schemeClr val="accent1"/>
+          </a:fillRef>
+          <a:effectRef idx="1">
+            <a:schemeClr val="accent1"/>
+          </a:effectRef>
+          <a:fontRef idx="minor">
+            <a:schemeClr val="tx1"/>
+          </a:fontRef>
+        </p:style>
+      </p:cxnSp>
+      <p:cxnSp>
+        <p:nvCxnSpPr>
+          <p:cNvPr id="11" name="Connector 10"/>
+          <p:cNvCxnSpPr/>
+          <p:nvPr/>
+        </p:nvCxnSpPr>
+        <p:spPr>
+          <a:xfrm>
+            <a:off x="7612380" y="1892808"/>
+            <a:ext cx="0" cy="3072384"/>
+          </a:xfrm>
+          <a:prstGeom prst="line">
+            <a:avLst/>
+          </a:prstGeom>
+          <a:ln w="25400">
+            <a:solidFill>
+              <a:srgbClr val="C9A227"/>
+            </a:solidFill>
+          </a:ln>
+        </p:spPr>
+        <p:style>
+          <a:lnRef idx="2">
+            <a:schemeClr val="accent1"/>
+          </a:lnRef>
+          <a:fillRef idx="0">
+            <a:schemeClr val="accent1"/>
+          </a:fillRef>
+          <a:effectRef idx="1">
+            <a:schemeClr val="accent1"/>
+          </a:effectRef>
+          <a:fontRef idx="minor">
+            <a:schemeClr val="tx1"/>
+          </a:fontRef>
+        </p:style>
+      </p:cxnSp>
+      <p:cxnSp>
+        <p:nvCxnSpPr>
+          <p:cNvPr id="12" name="Connector 11"/>
+          <p:cNvCxnSpPr/>
+          <p:nvPr/>
+        </p:nvCxnSpPr>
+        <p:spPr>
+          <a:xfrm>
+            <a:off x="7612380" y="1892808"/>
+            <a:ext cx="160020" cy="0"/>
+          </a:xfrm>
+          <a:prstGeom prst="line">
+            <a:avLst/>
+          </a:prstGeom>
+          <a:ln w="25400">
+            <a:solidFill>
+              <a:srgbClr val="C9A227"/>
+            </a:solidFill>
+          </a:ln>
+        </p:spPr>
+        <p:style>
+          <a:lnRef idx="2">
+            <a:schemeClr val="accent1"/>
+          </a:lnRef>
+          <a:fillRef idx="0">
+            <a:schemeClr val="accent1"/>
+          </a:fillRef>
+          <a:effectRef idx="1">
+            <a:schemeClr val="accent1"/>
+          </a:effectRef>
+          <a:fontRef idx="minor">
+            <a:schemeClr val="tx1"/>
+          </a:fontRef>
+        </p:style>
+      </p:cxnSp>
+      <p:sp>
+        <p:nvSpPr>
+          <p:cNvPr id="13" name="Rounded Rectangle 12"/>
+          <p:cNvSpPr/>
+          <p:nvPr/>
+        </p:nvSpPr>
+        <p:spPr>
+          <a:xfrm>
+            <a:off x="7772400" y="1417320"/>
+            <a:ext cx="3779215" cy="950976"/>
+          </a:xfrm>
+          <a:prstGeom prst="roundRect">
+            <a:avLst>
+              <a:gd name="adj" fmla="val 8000"/>
+            </a:avLst>
+          </a:prstGeom>
+          <a:solidFill>
+            <a:srgbClr val="FFFFFF"/>
+          </a:solidFill>
+          <a:ln w="15875">
+            <a:solidFill>
+              <a:srgbClr val="C9A227"/>
+            </a:solidFill>
+          </a:ln>
+          <a:effectLst/>
+        </p:spPr>
+        <p:style>
+          <a:lnRef idx="1">
+            <a:schemeClr val="accent1"/>
+          </a:lnRef>
+          <a:fillRef idx="3">
+            <a:schemeClr val="accent1"/>
+          </a:fillRef>
+          <a:effectRef idx="2">
+            <a:schemeClr val="accent1"/>
+          </a:effectRef>
+          <a:fontRef idx="minor">
+            <a:schemeClr val="lt1"/>
+          </a:fontRef>
+        </p:style>
+        <p:txBody>
+          <a:bodyPr rtlCol="0" anchor="ctr"/>
+          <a:lstStyle/>
+          <a:p>
+            <a:pPr algn="ctr"/>
+          </a:p>
+        </p:txBody>
+      </p:sp>
+      <p:sp>
+        <p:nvSpPr>
+          <p:cNvPr id="14" name="TextBox 13"/>
           <p:cNvSpPr txBox="1"/>
           <p:nvPr/>
         </p:nvSpPr>
         <p:spPr>
           <a:xfrm>
-            <a:off x="6263640" y="5349240"/>
-            <a:ext cx="5287975" cy="365760"/>
+            <a:off x="7772400" y="1417320"/>
+            <a:ext cx="3779215" cy="950976"/>
+          </a:xfrm>
+          <a:prstGeom prst="rect">
+            <a:avLst/>
+          </a:prstGeom>
+          <a:noFill/>
+        </p:spPr>
+        <p:txBody>
+          <a:bodyPr wrap="square" anchor="ctr" tIns="36576" bIns="36576">
+            <a:spAutoFit/>
+          </a:bodyPr>
+          <a:lstStyle/>
+          <a:p>
+            <a:pPr algn="l">
+              <a:spcAft>
+                <a:spcPts val="0"/>
+              </a:spcAft>
+            </a:pPr>
+            <a:r>
+              <a:rPr sz="1400" b="1">
+                <a:solidFill>
+                  <a:srgbClr val="0B1F3A"/>
+                </a:solidFill>
+                <a:latin typeface="Calibri"/>
+              </a:rPr>
+              <a:t>Ishlab chiqarish</a:t>
+            </a:r>
+          </a:p>
+          <a:p>
+            <a:pPr algn="l">
+              <a:spcAft>
+                <a:spcPts val="0"/>
+              </a:spcAft>
+            </a:pPr>
+            <a:r>
+              <a:rPr sz="1200" b="0">
+                <a:solidFill>
+                  <a:srgbClr val="1F2937"/>
+                </a:solidFill>
+                <a:latin typeface="Calibri"/>
+              </a:rPr>
+              <a:t>Sanoat  ·  Qishloq xo‘jaligi, qurilish</a:t>
+            </a:r>
+          </a:p>
+        </p:txBody>
+      </p:sp>
+      <p:cxnSp>
+        <p:nvCxnSpPr>
+          <p:cNvPr id="15" name="Connector 14"/>
+          <p:cNvCxnSpPr/>
+          <p:nvPr/>
+        </p:nvCxnSpPr>
+        <p:spPr>
+          <a:xfrm>
+            <a:off x="7612380" y="2916936"/>
+            <a:ext cx="160020" cy="0"/>
+          </a:xfrm>
+          <a:prstGeom prst="line">
+            <a:avLst/>
+          </a:prstGeom>
+          <a:ln w="25400">
+            <a:solidFill>
+              <a:srgbClr val="C9A227"/>
+            </a:solidFill>
+          </a:ln>
+        </p:spPr>
+        <p:style>
+          <a:lnRef idx="2">
+            <a:schemeClr val="accent1"/>
+          </a:lnRef>
+          <a:fillRef idx="0">
+            <a:schemeClr val="accent1"/>
+          </a:fillRef>
+          <a:effectRef idx="1">
+            <a:schemeClr val="accent1"/>
+          </a:effectRef>
+          <a:fontRef idx="minor">
+            <a:schemeClr val="tx1"/>
+          </a:fontRef>
+        </p:style>
+      </p:cxnSp>
+      <p:sp>
+        <p:nvSpPr>
+          <p:cNvPr id="16" name="Rounded Rectangle 15"/>
+          <p:cNvSpPr/>
+          <p:nvPr/>
+        </p:nvSpPr>
+        <p:spPr>
+          <a:xfrm>
+            <a:off x="7772400" y="2441448"/>
+            <a:ext cx="3779215" cy="950976"/>
+          </a:xfrm>
+          <a:prstGeom prst="roundRect">
+            <a:avLst>
+              <a:gd name="adj" fmla="val 8000"/>
+            </a:avLst>
+          </a:prstGeom>
+          <a:solidFill>
+            <a:srgbClr val="FFFFFF"/>
+          </a:solidFill>
+          <a:ln w="15875">
+            <a:solidFill>
+              <a:srgbClr val="C9A227"/>
+            </a:solidFill>
+          </a:ln>
+          <a:effectLst/>
+        </p:spPr>
+        <p:style>
+          <a:lnRef idx="1">
+            <a:schemeClr val="accent1"/>
+          </a:lnRef>
+          <a:fillRef idx="3">
+            <a:schemeClr val="accent1"/>
+          </a:fillRef>
+          <a:effectRef idx="2">
+            <a:schemeClr val="accent1"/>
+          </a:effectRef>
+          <a:fontRef idx="minor">
+            <a:schemeClr val="lt1"/>
+          </a:fontRef>
+        </p:style>
+        <p:txBody>
+          <a:bodyPr rtlCol="0" anchor="ctr"/>
+          <a:lstStyle/>
+          <a:p>
+            <a:pPr algn="ctr"/>
+          </a:p>
+        </p:txBody>
+      </p:sp>
+      <p:sp>
+        <p:nvSpPr>
+          <p:cNvPr id="17" name="TextBox 16"/>
+          <p:cNvSpPr txBox="1"/>
+          <p:nvPr/>
+        </p:nvSpPr>
+        <p:spPr>
+          <a:xfrm>
+            <a:off x="7772400" y="2441448"/>
+            <a:ext cx="3779215" cy="950976"/>
+          </a:xfrm>
+          <a:prstGeom prst="rect">
+            <a:avLst/>
+          </a:prstGeom>
+          <a:noFill/>
+        </p:spPr>
+        <p:txBody>
+          <a:bodyPr wrap="square" anchor="ctr" tIns="36576" bIns="36576">
+            <a:spAutoFit/>
+          </a:bodyPr>
+          <a:lstStyle/>
+          <a:p>
+            <a:pPr algn="l">
+              <a:spcAft>
+                <a:spcPts val="0"/>
+              </a:spcAft>
+            </a:pPr>
+            <a:r>
+              <a:rPr sz="1400" b="1">
+                <a:solidFill>
+                  <a:srgbClr val="0B1F3A"/>
+                </a:solidFill>
+                <a:latin typeface="Calibri"/>
+              </a:rPr>
+              <a:t>Transport</a:t>
+            </a:r>
+          </a:p>
+          <a:p>
+            <a:pPr algn="l">
+              <a:spcAft>
+                <a:spcPts val="0"/>
+              </a:spcAft>
+            </a:pPr>
+            <a:r>
+              <a:rPr sz="1200" b="0">
+                <a:solidFill>
+                  <a:srgbClr val="1F2937"/>
+                </a:solidFill>
+                <a:latin typeface="Calibri"/>
+              </a:rPr>
+              <a:t>Avto, moto, velosiped  ·  Temir yo‘l, havo, suv</a:t>
+            </a:r>
+          </a:p>
+        </p:txBody>
+      </p:sp>
+      <p:cxnSp>
+        <p:nvCxnSpPr>
+          <p:cNvPr id="18" name="Connector 17"/>
+          <p:cNvCxnSpPr/>
+          <p:nvPr/>
+        </p:nvCxnSpPr>
+        <p:spPr>
+          <a:xfrm>
+            <a:off x="7612380" y="3941064"/>
+            <a:ext cx="160020" cy="0"/>
+          </a:xfrm>
+          <a:prstGeom prst="line">
+            <a:avLst/>
+          </a:prstGeom>
+          <a:ln w="25400">
+            <a:solidFill>
+              <a:srgbClr val="C9A227"/>
+            </a:solidFill>
+          </a:ln>
+        </p:spPr>
+        <p:style>
+          <a:lnRef idx="2">
+            <a:schemeClr val="accent1"/>
+          </a:lnRef>
+          <a:fillRef idx="0">
+            <a:schemeClr val="accent1"/>
+          </a:fillRef>
+          <a:effectRef idx="1">
+            <a:schemeClr val="accent1"/>
+          </a:effectRef>
+          <a:fontRef idx="minor">
+            <a:schemeClr val="tx1"/>
+          </a:fontRef>
+        </p:style>
+      </p:cxnSp>
+      <p:sp>
+        <p:nvSpPr>
+          <p:cNvPr id="19" name="Rounded Rectangle 18"/>
+          <p:cNvSpPr/>
+          <p:nvPr/>
+        </p:nvSpPr>
+        <p:spPr>
+          <a:xfrm>
+            <a:off x="7772400" y="3465576"/>
+            <a:ext cx="3779215" cy="950976"/>
+          </a:xfrm>
+          <a:prstGeom prst="roundRect">
+            <a:avLst>
+              <a:gd name="adj" fmla="val 8000"/>
+            </a:avLst>
+          </a:prstGeom>
+          <a:solidFill>
+            <a:srgbClr val="FFFFFF"/>
+          </a:solidFill>
+          <a:ln w="15875">
+            <a:solidFill>
+              <a:srgbClr val="C9A227"/>
+            </a:solidFill>
+          </a:ln>
+          <a:effectLst/>
+        </p:spPr>
+        <p:style>
+          <a:lnRef idx="1">
+            <a:schemeClr val="accent1"/>
+          </a:lnRef>
+          <a:fillRef idx="3">
+            <a:schemeClr val="accent1"/>
+          </a:fillRef>
+          <a:effectRef idx="2">
+            <a:schemeClr val="accent1"/>
+          </a:effectRef>
+          <a:fontRef idx="minor">
+            <a:schemeClr val="lt1"/>
+          </a:fontRef>
+        </p:style>
+        <p:txBody>
+          <a:bodyPr rtlCol="0" anchor="ctr"/>
+          <a:lstStyle/>
+          <a:p>
+            <a:pPr algn="ctr"/>
+          </a:p>
+        </p:txBody>
+      </p:sp>
+      <p:sp>
+        <p:nvSpPr>
+          <p:cNvPr id="20" name="TextBox 19"/>
+          <p:cNvSpPr txBox="1"/>
+          <p:nvPr/>
+        </p:nvSpPr>
+        <p:spPr>
+          <a:xfrm>
+            <a:off x="7772400" y="3465576"/>
+            <a:ext cx="3779215" cy="950976"/>
+          </a:xfrm>
+          <a:prstGeom prst="rect">
+            <a:avLst/>
+          </a:prstGeom>
+          <a:noFill/>
+        </p:spPr>
+        <p:txBody>
+          <a:bodyPr wrap="square" anchor="ctr" tIns="36576" bIns="36576">
+            <a:spAutoFit/>
+          </a:bodyPr>
+          <a:lstStyle/>
+          <a:p>
+            <a:pPr algn="l">
+              <a:spcAft>
+                <a:spcPts val="0"/>
+              </a:spcAft>
+            </a:pPr>
+            <a:r>
+              <a:rPr sz="1400" b="1">
+                <a:solidFill>
+                  <a:srgbClr val="0B1F3A"/>
+                </a:solidFill>
+                <a:latin typeface="Calibri"/>
+              </a:rPr>
+              <a:t>Harbiy</a:t>
+            </a:r>
+          </a:p>
+          <a:p>
+            <a:pPr algn="l">
+              <a:spcAft>
+                <a:spcPts val="0"/>
+              </a:spcAft>
+            </a:pPr>
+            <a:r>
+              <a:rPr sz="1200" b="0">
+                <a:solidFill>
+                  <a:srgbClr val="1F2937"/>
+                </a:solidFill>
+                <a:latin typeface="Calibri"/>
+              </a:rPr>
+              <a:t>Urush va tinchlik davri</a:t>
+            </a:r>
+          </a:p>
+        </p:txBody>
+      </p:sp>
+      <p:cxnSp>
+        <p:nvCxnSpPr>
+          <p:cNvPr id="21" name="Connector 20"/>
+          <p:cNvCxnSpPr/>
+          <p:nvPr/>
+        </p:nvCxnSpPr>
+        <p:spPr>
+          <a:xfrm>
+            <a:off x="7612380" y="4965192"/>
+            <a:ext cx="160020" cy="0"/>
+          </a:xfrm>
+          <a:prstGeom prst="line">
+            <a:avLst/>
+          </a:prstGeom>
+          <a:ln w="25400">
+            <a:solidFill>
+              <a:srgbClr val="C9A227"/>
+            </a:solidFill>
+          </a:ln>
+        </p:spPr>
+        <p:style>
+          <a:lnRef idx="2">
+            <a:schemeClr val="accent1"/>
+          </a:lnRef>
+          <a:fillRef idx="0">
+            <a:schemeClr val="accent1"/>
+          </a:fillRef>
+          <a:effectRef idx="1">
+            <a:schemeClr val="accent1"/>
+          </a:effectRef>
+          <a:fontRef idx="minor">
+            <a:schemeClr val="tx1"/>
+          </a:fontRef>
+        </p:style>
+      </p:cxnSp>
+      <p:sp>
+        <p:nvSpPr>
+          <p:cNvPr id="22" name="Rounded Rectangle 21"/>
+          <p:cNvSpPr/>
+          <p:nvPr/>
+        </p:nvSpPr>
+        <p:spPr>
+          <a:xfrm>
+            <a:off x="7772400" y="4489704"/>
+            <a:ext cx="3779215" cy="950976"/>
+          </a:xfrm>
+          <a:prstGeom prst="roundRect">
+            <a:avLst>
+              <a:gd name="adj" fmla="val 8000"/>
+            </a:avLst>
+          </a:prstGeom>
+          <a:solidFill>
+            <a:srgbClr val="FFFFFF"/>
+          </a:solidFill>
+          <a:ln w="15875">
+            <a:solidFill>
+              <a:srgbClr val="C9A227"/>
+            </a:solidFill>
+          </a:ln>
+          <a:effectLst/>
+        </p:spPr>
+        <p:style>
+          <a:lnRef idx="1">
+            <a:schemeClr val="accent1"/>
+          </a:lnRef>
+          <a:fillRef idx="3">
+            <a:schemeClr val="accent1"/>
+          </a:fillRef>
+          <a:effectRef idx="2">
+            <a:schemeClr val="accent1"/>
+          </a:effectRef>
+          <a:fontRef idx="minor">
+            <a:schemeClr val="lt1"/>
+          </a:fontRef>
+        </p:style>
+        <p:txBody>
+          <a:bodyPr rtlCol="0" anchor="ctr"/>
+          <a:lstStyle/>
+          <a:p>
+            <a:pPr algn="ctr"/>
+          </a:p>
+        </p:txBody>
+      </p:sp>
+      <p:sp>
+        <p:nvSpPr>
+          <p:cNvPr id="23" name="TextBox 22"/>
+          <p:cNvSpPr txBox="1"/>
+          <p:nvPr/>
+        </p:nvSpPr>
+        <p:spPr>
+          <a:xfrm>
+            <a:off x="7772400" y="4489704"/>
+            <a:ext cx="3779215" cy="950976"/>
+          </a:xfrm>
+          <a:prstGeom prst="rect">
+            <a:avLst/>
+          </a:prstGeom>
+          <a:noFill/>
+        </p:spPr>
+        <p:txBody>
+          <a:bodyPr wrap="square" anchor="ctr" tIns="36576" bIns="36576">
+            <a:spAutoFit/>
+          </a:bodyPr>
+          <a:lstStyle/>
+          <a:p>
+            <a:pPr algn="l">
+              <a:spcAft>
+                <a:spcPts val="0"/>
+              </a:spcAft>
+            </a:pPr>
+            <a:r>
+              <a:rPr sz="1400" b="1">
+                <a:solidFill>
+                  <a:srgbClr val="0B1F3A"/>
+                </a:solidFill>
+                <a:latin typeface="Calibri"/>
+              </a:rPr>
+              <a:t>Boshqalar</a:t>
+            </a:r>
+          </a:p>
+          <a:p>
+            <a:pPr algn="l">
+              <a:spcAft>
+                <a:spcPts val="0"/>
+              </a:spcAft>
+            </a:pPr>
+            <a:r>
+              <a:rPr sz="1200" b="0">
+                <a:solidFill>
+                  <a:srgbClr val="1F2937"/>
+                </a:solidFill>
+                <a:latin typeface="Calibri"/>
+              </a:rPr>
+              <a:t>Ko‘cha, sport, maktab  ·  Maishiy</a:t>
+            </a:r>
+          </a:p>
+        </p:txBody>
+      </p:sp>
+      <p:sp>
+        <p:nvSpPr>
+          <p:cNvPr id="24" name="TextBox 23"/>
+          <p:cNvSpPr txBox="1"/>
+          <p:nvPr/>
+        </p:nvSpPr>
+        <p:spPr>
+          <a:xfrm>
+            <a:off x="5440680" y="5486400"/>
+            <a:ext cx="6110935" cy="365760"/>
           </a:xfrm>
           <a:prstGeom prst="rect">
             <a:avLst/>
@@ -7556,7 +7989,7 @@
           <a:lstStyle/>
           <a:p>
             <a:r>
-              <a:rPr sz="1100" b="0">
+              <a:rPr sz="1200" b="0">
                 <a:solidFill>
                   <a:srgbClr val="6B7280"/>
                 </a:solidFill>
@@ -7569,7 +8002,7 @@
       </p:sp>
       <p:sp>
         <p:nvSpPr>
-          <p:cNvPr id="11" name="TextBox 10"/>
+          <p:cNvPr id="25" name="TextBox 24"/>
           <p:cNvSpPr txBox="1"/>
           <p:nvPr/>
         </p:nvSpPr>
@@ -9359,7 +9792,7 @@
         <p:spPr>
           <a:xfrm>
             <a:off x="640080" y="1417320"/>
-            <a:ext cx="5394960" cy="4480560"/>
+            <a:ext cx="4572000" cy="4480560"/>
           </a:xfrm>
           <a:prstGeom prst="rect">
             <a:avLst/>
@@ -9421,262 +9854,695 @@
           </a:p>
         </p:txBody>
       </p:sp>
-      <p:graphicFrame>
-        <p:nvGraphicFramePr>
-          <p:cNvPr id="9" name="Table 8"/>
-          <p:cNvGraphicFramePr>
-            <a:graphicFrameLocks noGrp="1"/>
-          </p:cNvGraphicFramePr>
-          <p:nvPr/>
-        </p:nvGraphicFramePr>
-        <p:xfrm>
-          <a:off x="6263640" y="1463040"/>
-          <a:ext cx="5287975" cy="3072380"/>
-        </p:xfrm>
-        <a:graphic>
-          <a:graphicData uri="http://schemas.openxmlformats.org/drawingml/2006/table">
-            <a:tbl>
-              <a:tblPr firstRow="1" bandRow="1">
-                <a:tableStyleId>{5C22544A-7EE6-4342-B048-85BDC9FD1C3A}</a:tableStyleId>
-              </a:tblPr>
-              <a:tblGrid>
-                <a:gridCol w="1538320"/>
-                <a:gridCol w="3749655"/>
-              </a:tblGrid>
-              <a:tr h="614476">
-                <a:tc>
-                  <a:txBody>
-                    <a:bodyPr/>
-                    <a:lstStyle/>
-                    <a:p>
-                      <a:r>
-                        <a:rPr sz="1800" b="1">
-                          <a:solidFill>
-                            <a:srgbClr val="FFFFFF"/>
-                          </a:solidFill>
-                        </a:rPr>
-                        <a:t>Guruh</a:t>
-                      </a:r>
-                    </a:p>
-                  </a:txBody>
-                  <a:tcPr marL="73152" marR="73152" marT="36576" marB="36576">
-                    <a:solidFill>
-                      <a:srgbClr val="0B1F3A"/>
-                    </a:solidFill>
-                  </a:tcPr>
-                </a:tc>
-                <a:tc>
-                  <a:txBody>
-                    <a:bodyPr/>
-                    <a:lstStyle/>
-                    <a:p>
-                      <a:r>
-                        <a:rPr sz="1800" b="1">
-                          <a:solidFill>
-                            <a:srgbClr val="FFFFFF"/>
-                          </a:solidFill>
-                        </a:rPr>
-                        <a:t>Belgi</a:t>
-                      </a:r>
-                    </a:p>
-                  </a:txBody>
-                  <a:tcPr marL="73152" marR="73152" marT="36576" marB="36576">
-                    <a:solidFill>
-                      <a:srgbClr val="0B1F3A"/>
-                    </a:solidFill>
-                  </a:tcPr>
-                </a:tc>
-              </a:tr>
-              <a:tr h="614476">
-                <a:tc>
-                  <a:txBody>
-                    <a:bodyPr/>
-                    <a:lstStyle/>
-                    <a:p>
-                      <a:r>
-                        <a:rPr sz="1700" b="0">
-                          <a:solidFill>
-                            <a:srgbClr val="1F2937"/>
-                          </a:solidFill>
-                        </a:rPr>
-                        <a:t>Qon va tomir</a:t>
-                      </a:r>
-                    </a:p>
-                  </a:txBody>
-                  <a:tcPr marL="73152" marR="73152" marT="36576" marB="36576">
-                    <a:solidFill>
-                      <a:srgbClr val="E8EEF6"/>
-                    </a:solidFill>
-                  </a:tcPr>
-                </a:tc>
-                <a:tc>
-                  <a:txBody>
-                    <a:bodyPr/>
-                    <a:lstStyle/>
-                    <a:p>
-                      <a:r>
-                        <a:rPr sz="1700" b="0">
-                          <a:solidFill>
-                            <a:srgbClr val="1F2937"/>
-                          </a:solidFill>
-                        </a:rPr>
-                        <a:t>Qon quyilishi; qon tomirda tromb</a:t>
-                      </a:r>
-                    </a:p>
-                  </a:txBody>
-                  <a:tcPr marL="73152" marR="73152" marT="36576" marB="36576">
-                    <a:solidFill>
-                      <a:srgbClr val="E8EEF6"/>
-                    </a:solidFill>
-                  </a:tcPr>
-                </a:tc>
-              </a:tr>
-              <a:tr h="614476">
-                <a:tc>
-                  <a:txBody>
-                    <a:bodyPr/>
-                    <a:lstStyle/>
-                    <a:p>
-                      <a:r>
-                        <a:rPr sz="1700" b="0">
-                          <a:solidFill>
-                            <a:srgbClr val="1F2937"/>
-                          </a:solidFill>
-                        </a:rPr>
-                        <a:t>Reaksiya</a:t>
-                      </a:r>
-                    </a:p>
-                  </a:txBody>
-                  <a:tcPr marL="73152" marR="73152" marT="36576" marB="36576">
-                    <a:solidFill>
-                      <a:srgbClr val="FFFFFF"/>
-                    </a:solidFill>
-                  </a:tcPr>
-                </a:tc>
-                <a:tc>
-                  <a:txBody>
-                    <a:bodyPr/>
-                    <a:lstStyle/>
-                    <a:p>
-                      <a:r>
-                        <a:rPr sz="1700" b="0">
-                          <a:solidFill>
-                            <a:srgbClr val="1F2937"/>
-                          </a:solidFill>
-                        </a:rPr>
-                        <a:t>Reaktiv shish; yallig‘lanish alomatlari</a:t>
-                      </a:r>
-                    </a:p>
-                  </a:txBody>
-                  <a:tcPr marL="73152" marR="73152" marT="36576" marB="36576">
-                    <a:solidFill>
-                      <a:srgbClr val="FFFFFF"/>
-                    </a:solidFill>
-                  </a:tcPr>
-                </a:tc>
-              </a:tr>
-              <a:tr h="614476">
-                <a:tc>
-                  <a:txBody>
-                    <a:bodyPr/>
-                    <a:lstStyle/>
-                    <a:p>
-                      <a:r>
-                        <a:rPr sz="1700" b="0">
-                          <a:solidFill>
-                            <a:srgbClr val="1F2937"/>
-                          </a:solidFill>
-                        </a:rPr>
-                        <a:t>Mushak, hujayra</a:t>
-                      </a:r>
-                    </a:p>
-                  </a:txBody>
-                  <a:tcPr marL="73152" marR="73152" marT="36576" marB="36576">
-                    <a:solidFill>
-                      <a:srgbClr val="E8EEF6"/>
-                    </a:solidFill>
-                  </a:tcPr>
-                </a:tc>
-                <a:tc>
-                  <a:txBody>
-                    <a:bodyPr/>
-                    <a:lstStyle/>
-                    <a:p>
-                      <a:r>
-                        <a:rPr sz="1700" b="0">
-                          <a:solidFill>
-                            <a:srgbClr val="1F2937"/>
-                          </a:solidFill>
-                        </a:rPr>
-                        <a:t>Mushak qisqarishi; hujayralar nekrozi</a:t>
-                      </a:r>
-                    </a:p>
-                  </a:txBody>
-                  <a:tcPr marL="73152" marR="73152" marT="36576" marB="36576">
-                    <a:solidFill>
-                      <a:srgbClr val="E8EEF6"/>
-                    </a:solidFill>
-                  </a:tcPr>
-                </a:tc>
-              </a:tr>
-              <a:tr h="614476">
-                <a:tc>
-                  <a:txBody>
-                    <a:bodyPr/>
-                    <a:lstStyle/>
-                    <a:p>
-                      <a:r>
-                        <a:rPr sz="1700" b="0">
-                          <a:solidFill>
-                            <a:srgbClr val="1F2937"/>
-                          </a:solidFill>
-                        </a:rPr>
-                        <a:t>Kimyoviy</a:t>
-                      </a:r>
-                    </a:p>
-                  </a:txBody>
-                  <a:tcPr marL="73152" marR="73152" marT="36576" marB="36576">
-                    <a:solidFill>
-                      <a:srgbClr val="FFFFFF"/>
-                    </a:solidFill>
-                  </a:tcPr>
-                </a:tc>
-                <a:tc>
-                  <a:txBody>
-                    <a:bodyPr/>
-                    <a:lstStyle/>
-                    <a:p>
-                      <a:r>
-                        <a:rPr sz="1700" b="0">
-                          <a:solidFill>
-                            <a:srgbClr val="1F2937"/>
-                          </a:solidFill>
-                        </a:rPr>
-                        <a:t>Turli gistokimyoviy o‘zgarishlar</a:t>
-                      </a:r>
-                    </a:p>
-                  </a:txBody>
-                  <a:tcPr marL="73152" marR="73152" marT="36576" marB="36576">
-                    <a:solidFill>
-                      <a:srgbClr val="FFFFFF"/>
-                    </a:solidFill>
-                  </a:tcPr>
-                </a:tc>
-              </a:tr>
-            </a:tbl>
-          </a:graphicData>
-        </a:graphic>
-      </p:graphicFrame>
-      <p:sp>
-        <p:nvSpPr>
-          <p:cNvPr id="10" name="TextBox 9"/>
+      <p:sp>
+        <p:nvSpPr>
+          <p:cNvPr id="9" name="Rounded Rectangle 8"/>
+          <p:cNvSpPr/>
+          <p:nvPr/>
+        </p:nvSpPr>
+        <p:spPr>
+          <a:xfrm>
+            <a:off x="5440680" y="2788920"/>
+            <a:ext cx="2011680" cy="1280160"/>
+          </a:xfrm>
+          <a:prstGeom prst="roundRect">
+            <a:avLst/>
+          </a:prstGeom>
+          <a:solidFill>
+            <a:srgbClr val="0B1F3A"/>
+          </a:solidFill>
+          <a:ln>
+            <a:noFill/>
+          </a:ln>
+          <a:effectLst/>
+        </p:spPr>
+        <p:style>
+          <a:lnRef idx="1">
+            <a:schemeClr val="accent1"/>
+          </a:lnRef>
+          <a:fillRef idx="3">
+            <a:schemeClr val="accent1"/>
+          </a:fillRef>
+          <a:effectRef idx="2">
+            <a:schemeClr val="accent1"/>
+          </a:effectRef>
+          <a:fontRef idx="minor">
+            <a:schemeClr val="lt1"/>
+          </a:fontRef>
+        </p:style>
+        <p:txBody>
+          <a:bodyPr rtlCol="0" anchor="ctr" wrap="square" tIns="36576" bIns="36576"/>
+          <a:lstStyle/>
+          <a:p>
+            <a:pPr algn="ctr">
+              <a:spcAft>
+                <a:spcPts val="200"/>
+              </a:spcAft>
+            </a:pPr>
+            <a:r>
+              <a:rPr sz="1800" b="1">
+                <a:solidFill>
+                  <a:srgbClr val="FFFFFF"/>
+                </a:solidFill>
+                <a:latin typeface="Calibri"/>
+              </a:rPr>
+              <a:t>Mahalliy belgilar</a:t>
+            </a:r>
+          </a:p>
+        </p:txBody>
+      </p:sp>
+      <p:cxnSp>
+        <p:nvCxnSpPr>
+          <p:cNvPr id="10" name="Connector 9"/>
+          <p:cNvCxnSpPr/>
+          <p:nvPr/>
+        </p:nvCxnSpPr>
+        <p:spPr>
+          <a:xfrm>
+            <a:off x="7452360" y="3429000"/>
+            <a:ext cx="160020" cy="0"/>
+          </a:xfrm>
+          <a:prstGeom prst="line">
+            <a:avLst/>
+          </a:prstGeom>
+          <a:ln w="25400">
+            <a:solidFill>
+              <a:srgbClr val="C9A227"/>
+            </a:solidFill>
+          </a:ln>
+        </p:spPr>
+        <p:style>
+          <a:lnRef idx="2">
+            <a:schemeClr val="accent1"/>
+          </a:lnRef>
+          <a:fillRef idx="0">
+            <a:schemeClr val="accent1"/>
+          </a:fillRef>
+          <a:effectRef idx="1">
+            <a:schemeClr val="accent1"/>
+          </a:effectRef>
+          <a:fontRef idx="minor">
+            <a:schemeClr val="tx1"/>
+          </a:fontRef>
+        </p:style>
+      </p:cxnSp>
+      <p:cxnSp>
+        <p:nvCxnSpPr>
+          <p:cNvPr id="11" name="Connector 10"/>
+          <p:cNvCxnSpPr/>
+          <p:nvPr/>
+        </p:nvCxnSpPr>
+        <p:spPr>
+          <a:xfrm>
+            <a:off x="7612380" y="1892808"/>
+            <a:ext cx="0" cy="3072384"/>
+          </a:xfrm>
+          <a:prstGeom prst="line">
+            <a:avLst/>
+          </a:prstGeom>
+          <a:ln w="25400">
+            <a:solidFill>
+              <a:srgbClr val="C9A227"/>
+            </a:solidFill>
+          </a:ln>
+        </p:spPr>
+        <p:style>
+          <a:lnRef idx="2">
+            <a:schemeClr val="accent1"/>
+          </a:lnRef>
+          <a:fillRef idx="0">
+            <a:schemeClr val="accent1"/>
+          </a:fillRef>
+          <a:effectRef idx="1">
+            <a:schemeClr val="accent1"/>
+          </a:effectRef>
+          <a:fontRef idx="minor">
+            <a:schemeClr val="tx1"/>
+          </a:fontRef>
+        </p:style>
+      </p:cxnSp>
+      <p:cxnSp>
+        <p:nvCxnSpPr>
+          <p:cNvPr id="12" name="Connector 11"/>
+          <p:cNvCxnSpPr/>
+          <p:nvPr/>
+        </p:nvCxnSpPr>
+        <p:spPr>
+          <a:xfrm>
+            <a:off x="7612380" y="1892808"/>
+            <a:ext cx="160020" cy="0"/>
+          </a:xfrm>
+          <a:prstGeom prst="line">
+            <a:avLst/>
+          </a:prstGeom>
+          <a:ln w="25400">
+            <a:solidFill>
+              <a:srgbClr val="C9A227"/>
+            </a:solidFill>
+          </a:ln>
+        </p:spPr>
+        <p:style>
+          <a:lnRef idx="2">
+            <a:schemeClr val="accent1"/>
+          </a:lnRef>
+          <a:fillRef idx="0">
+            <a:schemeClr val="accent1"/>
+          </a:fillRef>
+          <a:effectRef idx="1">
+            <a:schemeClr val="accent1"/>
+          </a:effectRef>
+          <a:fontRef idx="minor">
+            <a:schemeClr val="tx1"/>
+          </a:fontRef>
+        </p:style>
+      </p:cxnSp>
+      <p:sp>
+        <p:nvSpPr>
+          <p:cNvPr id="13" name="Rounded Rectangle 12"/>
+          <p:cNvSpPr/>
+          <p:nvPr/>
+        </p:nvSpPr>
+        <p:spPr>
+          <a:xfrm>
+            <a:off x="7772400" y="1417320"/>
+            <a:ext cx="3779215" cy="950976"/>
+          </a:xfrm>
+          <a:prstGeom prst="roundRect">
+            <a:avLst>
+              <a:gd name="adj" fmla="val 8000"/>
+            </a:avLst>
+          </a:prstGeom>
+          <a:solidFill>
+            <a:srgbClr val="FFFFFF"/>
+          </a:solidFill>
+          <a:ln w="15875">
+            <a:solidFill>
+              <a:srgbClr val="C9A227"/>
+            </a:solidFill>
+          </a:ln>
+          <a:effectLst/>
+        </p:spPr>
+        <p:style>
+          <a:lnRef idx="1">
+            <a:schemeClr val="accent1"/>
+          </a:lnRef>
+          <a:fillRef idx="3">
+            <a:schemeClr val="accent1"/>
+          </a:fillRef>
+          <a:effectRef idx="2">
+            <a:schemeClr val="accent1"/>
+          </a:effectRef>
+          <a:fontRef idx="minor">
+            <a:schemeClr val="lt1"/>
+          </a:fontRef>
+        </p:style>
+        <p:txBody>
+          <a:bodyPr rtlCol="0" anchor="ctr"/>
+          <a:lstStyle/>
+          <a:p>
+            <a:pPr algn="ctr"/>
+          </a:p>
+        </p:txBody>
+      </p:sp>
+      <p:sp>
+        <p:nvSpPr>
+          <p:cNvPr id="14" name="TextBox 13"/>
           <p:cNvSpPr txBox="1"/>
           <p:nvPr/>
         </p:nvSpPr>
         <p:spPr>
           <a:xfrm>
-            <a:off x="6263640" y="5349240"/>
-            <a:ext cx="5287975" cy="365760"/>
+            <a:off x="7772400" y="1417320"/>
+            <a:ext cx="3779215" cy="950976"/>
+          </a:xfrm>
+          <a:prstGeom prst="rect">
+            <a:avLst/>
+          </a:prstGeom>
+          <a:noFill/>
+        </p:spPr>
+        <p:txBody>
+          <a:bodyPr wrap="square" anchor="ctr" tIns="36576" bIns="36576">
+            <a:spAutoFit/>
+          </a:bodyPr>
+          <a:lstStyle/>
+          <a:p>
+            <a:pPr algn="l">
+              <a:spcAft>
+                <a:spcPts val="0"/>
+              </a:spcAft>
+            </a:pPr>
+            <a:r>
+              <a:rPr sz="1400" b="1">
+                <a:solidFill>
+                  <a:srgbClr val="0B1F3A"/>
+                </a:solidFill>
+                <a:latin typeface="Calibri"/>
+              </a:rPr>
+              <a:t>Qon va tomir</a:t>
+            </a:r>
+          </a:p>
+          <a:p>
+            <a:pPr algn="l">
+              <a:spcAft>
+                <a:spcPts val="0"/>
+              </a:spcAft>
+            </a:pPr>
+            <a:r>
+              <a:rPr sz="1200" b="0">
+                <a:solidFill>
+                  <a:srgbClr val="1F2937"/>
+                </a:solidFill>
+                <a:latin typeface="Calibri"/>
+              </a:rPr>
+              <a:t>Qon quyilishi  ·  Qon tomirda tromb</a:t>
+            </a:r>
+          </a:p>
+        </p:txBody>
+      </p:sp>
+      <p:cxnSp>
+        <p:nvCxnSpPr>
+          <p:cNvPr id="15" name="Connector 14"/>
+          <p:cNvCxnSpPr/>
+          <p:nvPr/>
+        </p:nvCxnSpPr>
+        <p:spPr>
+          <a:xfrm>
+            <a:off x="7612380" y="2916936"/>
+            <a:ext cx="160020" cy="0"/>
+          </a:xfrm>
+          <a:prstGeom prst="line">
+            <a:avLst/>
+          </a:prstGeom>
+          <a:ln w="25400">
+            <a:solidFill>
+              <a:srgbClr val="C9A227"/>
+            </a:solidFill>
+          </a:ln>
+        </p:spPr>
+        <p:style>
+          <a:lnRef idx="2">
+            <a:schemeClr val="accent1"/>
+          </a:lnRef>
+          <a:fillRef idx="0">
+            <a:schemeClr val="accent1"/>
+          </a:fillRef>
+          <a:effectRef idx="1">
+            <a:schemeClr val="accent1"/>
+          </a:effectRef>
+          <a:fontRef idx="minor">
+            <a:schemeClr val="tx1"/>
+          </a:fontRef>
+        </p:style>
+      </p:cxnSp>
+      <p:sp>
+        <p:nvSpPr>
+          <p:cNvPr id="16" name="Rounded Rectangle 15"/>
+          <p:cNvSpPr/>
+          <p:nvPr/>
+        </p:nvSpPr>
+        <p:spPr>
+          <a:xfrm>
+            <a:off x="7772400" y="2441448"/>
+            <a:ext cx="3779215" cy="950976"/>
+          </a:xfrm>
+          <a:prstGeom prst="roundRect">
+            <a:avLst>
+              <a:gd name="adj" fmla="val 8000"/>
+            </a:avLst>
+          </a:prstGeom>
+          <a:solidFill>
+            <a:srgbClr val="FFFFFF"/>
+          </a:solidFill>
+          <a:ln w="15875">
+            <a:solidFill>
+              <a:srgbClr val="C9A227"/>
+            </a:solidFill>
+          </a:ln>
+          <a:effectLst/>
+        </p:spPr>
+        <p:style>
+          <a:lnRef idx="1">
+            <a:schemeClr val="accent1"/>
+          </a:lnRef>
+          <a:fillRef idx="3">
+            <a:schemeClr val="accent1"/>
+          </a:fillRef>
+          <a:effectRef idx="2">
+            <a:schemeClr val="accent1"/>
+          </a:effectRef>
+          <a:fontRef idx="minor">
+            <a:schemeClr val="lt1"/>
+          </a:fontRef>
+        </p:style>
+        <p:txBody>
+          <a:bodyPr rtlCol="0" anchor="ctr"/>
+          <a:lstStyle/>
+          <a:p>
+            <a:pPr algn="ctr"/>
+          </a:p>
+        </p:txBody>
+      </p:sp>
+      <p:sp>
+        <p:nvSpPr>
+          <p:cNvPr id="17" name="TextBox 16"/>
+          <p:cNvSpPr txBox="1"/>
+          <p:nvPr/>
+        </p:nvSpPr>
+        <p:spPr>
+          <a:xfrm>
+            <a:off x="7772400" y="2441448"/>
+            <a:ext cx="3779215" cy="950976"/>
+          </a:xfrm>
+          <a:prstGeom prst="rect">
+            <a:avLst/>
+          </a:prstGeom>
+          <a:noFill/>
+        </p:spPr>
+        <p:txBody>
+          <a:bodyPr wrap="square" anchor="ctr" tIns="36576" bIns="36576">
+            <a:spAutoFit/>
+          </a:bodyPr>
+          <a:lstStyle/>
+          <a:p>
+            <a:pPr algn="l">
+              <a:spcAft>
+                <a:spcPts val="0"/>
+              </a:spcAft>
+            </a:pPr>
+            <a:r>
+              <a:rPr sz="1400" b="1">
+                <a:solidFill>
+                  <a:srgbClr val="0B1F3A"/>
+                </a:solidFill>
+                <a:latin typeface="Calibri"/>
+              </a:rPr>
+              <a:t>Reaksiya</a:t>
+            </a:r>
+          </a:p>
+          <a:p>
+            <a:pPr algn="l">
+              <a:spcAft>
+                <a:spcPts val="0"/>
+              </a:spcAft>
+            </a:pPr>
+            <a:r>
+              <a:rPr sz="1200" b="0">
+                <a:solidFill>
+                  <a:srgbClr val="1F2937"/>
+                </a:solidFill>
+                <a:latin typeface="Calibri"/>
+              </a:rPr>
+              <a:t>Reaktiv shish  ·  Yallig‘lanish alomatlari</a:t>
+            </a:r>
+          </a:p>
+        </p:txBody>
+      </p:sp>
+      <p:cxnSp>
+        <p:nvCxnSpPr>
+          <p:cNvPr id="18" name="Connector 17"/>
+          <p:cNvCxnSpPr/>
+          <p:nvPr/>
+        </p:nvCxnSpPr>
+        <p:spPr>
+          <a:xfrm>
+            <a:off x="7612380" y="3941064"/>
+            <a:ext cx="160020" cy="0"/>
+          </a:xfrm>
+          <a:prstGeom prst="line">
+            <a:avLst/>
+          </a:prstGeom>
+          <a:ln w="25400">
+            <a:solidFill>
+              <a:srgbClr val="C9A227"/>
+            </a:solidFill>
+          </a:ln>
+        </p:spPr>
+        <p:style>
+          <a:lnRef idx="2">
+            <a:schemeClr val="accent1"/>
+          </a:lnRef>
+          <a:fillRef idx="0">
+            <a:schemeClr val="accent1"/>
+          </a:fillRef>
+          <a:effectRef idx="1">
+            <a:schemeClr val="accent1"/>
+          </a:effectRef>
+          <a:fontRef idx="minor">
+            <a:schemeClr val="tx1"/>
+          </a:fontRef>
+        </p:style>
+      </p:cxnSp>
+      <p:sp>
+        <p:nvSpPr>
+          <p:cNvPr id="19" name="Rounded Rectangle 18"/>
+          <p:cNvSpPr/>
+          <p:nvPr/>
+        </p:nvSpPr>
+        <p:spPr>
+          <a:xfrm>
+            <a:off x="7772400" y="3465576"/>
+            <a:ext cx="3779215" cy="950976"/>
+          </a:xfrm>
+          <a:prstGeom prst="roundRect">
+            <a:avLst>
+              <a:gd name="adj" fmla="val 8000"/>
+            </a:avLst>
+          </a:prstGeom>
+          <a:solidFill>
+            <a:srgbClr val="FFFFFF"/>
+          </a:solidFill>
+          <a:ln w="15875">
+            <a:solidFill>
+              <a:srgbClr val="C9A227"/>
+            </a:solidFill>
+          </a:ln>
+          <a:effectLst/>
+        </p:spPr>
+        <p:style>
+          <a:lnRef idx="1">
+            <a:schemeClr val="accent1"/>
+          </a:lnRef>
+          <a:fillRef idx="3">
+            <a:schemeClr val="accent1"/>
+          </a:fillRef>
+          <a:effectRef idx="2">
+            <a:schemeClr val="accent1"/>
+          </a:effectRef>
+          <a:fontRef idx="minor">
+            <a:schemeClr val="lt1"/>
+          </a:fontRef>
+        </p:style>
+        <p:txBody>
+          <a:bodyPr rtlCol="0" anchor="ctr"/>
+          <a:lstStyle/>
+          <a:p>
+            <a:pPr algn="ctr"/>
+          </a:p>
+        </p:txBody>
+      </p:sp>
+      <p:sp>
+        <p:nvSpPr>
+          <p:cNvPr id="20" name="TextBox 19"/>
+          <p:cNvSpPr txBox="1"/>
+          <p:nvPr/>
+        </p:nvSpPr>
+        <p:spPr>
+          <a:xfrm>
+            <a:off x="7772400" y="3465576"/>
+            <a:ext cx="3779215" cy="950976"/>
+          </a:xfrm>
+          <a:prstGeom prst="rect">
+            <a:avLst/>
+          </a:prstGeom>
+          <a:noFill/>
+        </p:spPr>
+        <p:txBody>
+          <a:bodyPr wrap="square" anchor="ctr" tIns="36576" bIns="36576">
+            <a:spAutoFit/>
+          </a:bodyPr>
+          <a:lstStyle/>
+          <a:p>
+            <a:pPr algn="l">
+              <a:spcAft>
+                <a:spcPts val="0"/>
+              </a:spcAft>
+            </a:pPr>
+            <a:r>
+              <a:rPr sz="1400" b="1">
+                <a:solidFill>
+                  <a:srgbClr val="0B1F3A"/>
+                </a:solidFill>
+                <a:latin typeface="Calibri"/>
+              </a:rPr>
+              <a:t>Mushak, hujayra</a:t>
+            </a:r>
+          </a:p>
+          <a:p>
+            <a:pPr algn="l">
+              <a:spcAft>
+                <a:spcPts val="0"/>
+              </a:spcAft>
+            </a:pPr>
+            <a:r>
+              <a:rPr sz="1200" b="0">
+                <a:solidFill>
+                  <a:srgbClr val="1F2937"/>
+                </a:solidFill>
+                <a:latin typeface="Calibri"/>
+              </a:rPr>
+              <a:t>Mushak qisqarishi  ·  Hujayralar nekrozi</a:t>
+            </a:r>
+          </a:p>
+        </p:txBody>
+      </p:sp>
+      <p:cxnSp>
+        <p:nvCxnSpPr>
+          <p:cNvPr id="21" name="Connector 20"/>
+          <p:cNvCxnSpPr/>
+          <p:nvPr/>
+        </p:nvCxnSpPr>
+        <p:spPr>
+          <a:xfrm>
+            <a:off x="7612380" y="4965192"/>
+            <a:ext cx="160020" cy="0"/>
+          </a:xfrm>
+          <a:prstGeom prst="line">
+            <a:avLst/>
+          </a:prstGeom>
+          <a:ln w="25400">
+            <a:solidFill>
+              <a:srgbClr val="C9A227"/>
+            </a:solidFill>
+          </a:ln>
+        </p:spPr>
+        <p:style>
+          <a:lnRef idx="2">
+            <a:schemeClr val="accent1"/>
+          </a:lnRef>
+          <a:fillRef idx="0">
+            <a:schemeClr val="accent1"/>
+          </a:fillRef>
+          <a:effectRef idx="1">
+            <a:schemeClr val="accent1"/>
+          </a:effectRef>
+          <a:fontRef idx="minor">
+            <a:schemeClr val="tx1"/>
+          </a:fontRef>
+        </p:style>
+      </p:cxnSp>
+      <p:sp>
+        <p:nvSpPr>
+          <p:cNvPr id="22" name="Rounded Rectangle 21"/>
+          <p:cNvSpPr/>
+          <p:nvPr/>
+        </p:nvSpPr>
+        <p:spPr>
+          <a:xfrm>
+            <a:off x="7772400" y="4489704"/>
+            <a:ext cx="3779215" cy="950976"/>
+          </a:xfrm>
+          <a:prstGeom prst="roundRect">
+            <a:avLst>
+              <a:gd name="adj" fmla="val 8000"/>
+            </a:avLst>
+          </a:prstGeom>
+          <a:solidFill>
+            <a:srgbClr val="FFFFFF"/>
+          </a:solidFill>
+          <a:ln w="15875">
+            <a:solidFill>
+              <a:srgbClr val="C9A227"/>
+            </a:solidFill>
+          </a:ln>
+          <a:effectLst/>
+        </p:spPr>
+        <p:style>
+          <a:lnRef idx="1">
+            <a:schemeClr val="accent1"/>
+          </a:lnRef>
+          <a:fillRef idx="3">
+            <a:schemeClr val="accent1"/>
+          </a:fillRef>
+          <a:effectRef idx="2">
+            <a:schemeClr val="accent1"/>
+          </a:effectRef>
+          <a:fontRef idx="minor">
+            <a:schemeClr val="lt1"/>
+          </a:fontRef>
+        </p:style>
+        <p:txBody>
+          <a:bodyPr rtlCol="0" anchor="ctr"/>
+          <a:lstStyle/>
+          <a:p>
+            <a:pPr algn="ctr"/>
+          </a:p>
+        </p:txBody>
+      </p:sp>
+      <p:sp>
+        <p:nvSpPr>
+          <p:cNvPr id="23" name="TextBox 22"/>
+          <p:cNvSpPr txBox="1"/>
+          <p:nvPr/>
+        </p:nvSpPr>
+        <p:spPr>
+          <a:xfrm>
+            <a:off x="7772400" y="4489704"/>
+            <a:ext cx="3779215" cy="950976"/>
+          </a:xfrm>
+          <a:prstGeom prst="rect">
+            <a:avLst/>
+          </a:prstGeom>
+          <a:noFill/>
+        </p:spPr>
+        <p:txBody>
+          <a:bodyPr wrap="square" anchor="ctr" tIns="36576" bIns="36576">
+            <a:spAutoFit/>
+          </a:bodyPr>
+          <a:lstStyle/>
+          <a:p>
+            <a:pPr algn="l">
+              <a:spcAft>
+                <a:spcPts val="0"/>
+              </a:spcAft>
+            </a:pPr>
+            <a:r>
+              <a:rPr sz="1400" b="1">
+                <a:solidFill>
+                  <a:srgbClr val="0B1F3A"/>
+                </a:solidFill>
+                <a:latin typeface="Calibri"/>
+              </a:rPr>
+              <a:t>Kimyoviy</a:t>
+            </a:r>
+          </a:p>
+          <a:p>
+            <a:pPr algn="l">
+              <a:spcAft>
+                <a:spcPts val="0"/>
+              </a:spcAft>
+            </a:pPr>
+            <a:r>
+              <a:rPr sz="1200" b="0">
+                <a:solidFill>
+                  <a:srgbClr val="1F2937"/>
+                </a:solidFill>
+                <a:latin typeface="Calibri"/>
+              </a:rPr>
+              <a:t>Gistokimyoviy o‘zgarishlar</a:t>
+            </a:r>
+          </a:p>
+        </p:txBody>
+      </p:sp>
+      <p:sp>
+        <p:nvSpPr>
+          <p:cNvPr id="24" name="TextBox 23"/>
+          <p:cNvSpPr txBox="1"/>
+          <p:nvPr/>
+        </p:nvSpPr>
+        <p:spPr>
+          <a:xfrm>
+            <a:off x="5440680" y="5486400"/>
+            <a:ext cx="6110935" cy="365760"/>
           </a:xfrm>
           <a:prstGeom prst="rect">
             <a:avLst/>
@@ -9690,7 +10556,7 @@
           <a:lstStyle/>
           <a:p>
             <a:r>
-              <a:rPr sz="1100" b="0">
+              <a:rPr sz="1200" b="0">
                 <a:solidFill>
                   <a:srgbClr val="6B7280"/>
                 </a:solidFill>
@@ -9703,7 +10569,7 @@
       </p:sp>
       <p:sp>
         <p:nvSpPr>
-          <p:cNvPr id="11" name="TextBox 10"/>
+          <p:cNvPr id="25" name="TextBox 24"/>
           <p:cNvSpPr txBox="1"/>
           <p:nvPr/>
         </p:nvSpPr>
@@ -10016,13 +10882,13 @@
               </a:spcAft>
             </a:pPr>
             <a:r>
-              <a:rPr sz="2000">
+              <a:rPr sz="2200">
                 <a:solidFill>
                   <a:srgbClr val="1F2937"/>
                 </a:solidFill>
                 <a:latin typeface="Calibri"/>
               </a:rPr>
-              <a:t>▸  Vaziyat: murdada jarohat topildi. Uni hayotlikda yetkazilganmi yoki o‘limdan keyinmi, aniqlash kerak. O‘limdan keyin jarohat qasddan yoki tasodifan (reanimatsiya, tashish, hayvonlar) yetkazilishi mumkin.</a:t>
+              <a:t>▸  Vaziyat: murdada jarohat topildi; u hayotlikda yetkazilganmi yoki o‘limdan keyinmi? O‘limdan keyin jarohat qasddan yoki tasodifan yetkazilishi mumkin.</a:t>
             </a:r>
           </a:p>
           <a:p>
@@ -10032,7 +10898,7 @@
               </a:spcAft>
             </a:pPr>
             <a:r>
-              <a:rPr sz="2000">
+              <a:rPr sz="2200">
                 <a:solidFill>
                   <a:srgbClr val="1F2937"/>
                 </a:solidFill>
@@ -10048,13 +10914,13 @@
               </a:spcAft>
             </a:pPr>
             <a:r>
-              <a:rPr sz="2000">
+              <a:rPr sz="2200">
                 <a:solidFill>
                   <a:srgbClr val="1F2937"/>
                 </a:solidFill>
                 <a:latin typeface="Calibri"/>
               </a:rPr>
-              <a:t>▸  Biologik o‘limdan so‘ng to‘qimalarda hayotiy jarayonlarning to‘xtashi ularning filogenetik yoshiga bog‘liq. Filogenetik katta to‘qimalarda o‘limdan keyingi jarohat hayotiyga o‘xshashi mumkin.</a:t>
+              <a:t>▸  Filogenetik katta to‘qimalarda hayotiy jarayonlar o‘limdan keyin sekin to‘xtaydi, shuning uchun o‘limdan keyingi jarohat hayotiyga o‘xshashi mumkin.</a:t>
             </a:r>
           </a:p>
           <a:p>
@@ -10064,13 +10930,13 @@
               </a:spcAft>
             </a:pPr>
             <a:r>
-              <a:rPr sz="2000">
+              <a:rPr sz="2200">
                 <a:solidFill>
                   <a:srgbClr val="1F2937"/>
                 </a:solidFill>
                 <a:latin typeface="Calibri"/>
               </a:rPr>
-              <a:t>▸  Diqqat: o‘limdan keyingi jarohat ≠ hayotiy jarohat. Savol: nega faqat tashqi ko‘rinishga qarab, o‘limdan keyingi jarohatni hayotiy deb baholash xato bo‘lishi mumkin?</a:t>
+              <a:t>▸  Diqqat: o‘limdan keyingi jarohat ≠ hayotiy jarohat. Savol: nega faqat tashqi ko‘rinishga qarab hayotiy deb baholash xato bo‘lishi mumkin?</a:t>
             </a:r>
           </a:p>
         </p:txBody>
@@ -11741,7 +12607,7 @@
         <p:spPr>
           <a:xfrm>
             <a:off x="640080" y="1417320"/>
-            <a:ext cx="5394960" cy="4480560"/>
+            <a:ext cx="4572000" cy="4480560"/>
           </a:xfrm>
           <a:prstGeom prst="rect">
             <a:avLst/>
@@ -11803,303 +12669,466 @@
           </a:p>
         </p:txBody>
       </p:sp>
-      <p:graphicFrame>
-        <p:nvGraphicFramePr>
-          <p:cNvPr id="9" name="Table 8"/>
-          <p:cNvGraphicFramePr>
-            <a:graphicFrameLocks noGrp="1"/>
-          </p:cNvGraphicFramePr>
-          <p:nvPr/>
-        </p:nvGraphicFramePr>
-        <p:xfrm>
-          <a:off x="6263640" y="1463040"/>
-          <a:ext cx="5287974" cy="3072384"/>
-        </p:xfrm>
-        <a:graphic>
-          <a:graphicData uri="http://schemas.openxmlformats.org/drawingml/2006/table">
-            <a:tbl>
-              <a:tblPr firstRow="1" bandRow="1">
-                <a:tableStyleId>{5C22544A-7EE6-4342-B048-85BDC9FD1C3A}</a:tableStyleId>
-              </a:tblPr>
-              <a:tblGrid>
-                <a:gridCol w="1057595"/>
-                <a:gridCol w="2643987"/>
-                <a:gridCol w="1586392"/>
-              </a:tblGrid>
-              <a:tr h="768096">
-                <a:tc>
-                  <a:txBody>
-                    <a:bodyPr/>
-                    <a:lstStyle/>
-                    <a:p>
-                      <a:r>
-                        <a:rPr sz="1600" b="1">
-                          <a:solidFill>
-                            <a:srgbClr val="FFFFFF"/>
-                          </a:solidFill>
-                        </a:rPr>
-                        <a:t>Vosita</a:t>
-                      </a:r>
-                    </a:p>
-                  </a:txBody>
-                  <a:tcPr marL="73152" marR="73152" marT="36576" marB="36576">
-                    <a:solidFill>
-                      <a:srgbClr val="0B1F3A"/>
-                    </a:solidFill>
-                  </a:tcPr>
-                </a:tc>
-                <a:tc>
-                  <a:txBody>
-                    <a:bodyPr/>
-                    <a:lstStyle/>
-                    <a:p>
-                      <a:r>
-                        <a:rPr sz="1600" b="1">
-                          <a:solidFill>
-                            <a:srgbClr val="FFFFFF"/>
-                          </a:solidFill>
-                        </a:rPr>
-                        <a:t>Ta’rifi</a:t>
-                      </a:r>
-                    </a:p>
-                  </a:txBody>
-                  <a:tcPr marL="73152" marR="73152" marT="36576" marB="36576">
-                    <a:solidFill>
-                      <a:srgbClr val="0B1F3A"/>
-                    </a:solidFill>
-                  </a:tcPr>
-                </a:tc>
-                <a:tc>
-                  <a:txBody>
-                    <a:bodyPr/>
-                    <a:lstStyle/>
-                    <a:p>
-                      <a:r>
-                        <a:rPr sz="1600" b="1">
-                          <a:solidFill>
-                            <a:srgbClr val="FFFFFF"/>
-                          </a:solidFill>
-                        </a:rPr>
-                        <a:t>Misol</a:t>
-                      </a:r>
-                    </a:p>
-                  </a:txBody>
-                  <a:tcPr marL="73152" marR="73152" marT="36576" marB="36576">
-                    <a:solidFill>
-                      <a:srgbClr val="0B1F3A"/>
-                    </a:solidFill>
-                  </a:tcPr>
-                </a:tc>
-              </a:tr>
-              <a:tr h="768096">
-                <a:tc>
-                  <a:txBody>
-                    <a:bodyPr/>
-                    <a:lstStyle/>
-                    <a:p>
-                      <a:r>
-                        <a:rPr sz="1500" b="0">
-                          <a:solidFill>
-                            <a:srgbClr val="1F2937"/>
-                          </a:solidFill>
-                        </a:rPr>
-                        <a:t>Qurol</a:t>
-                      </a:r>
-                    </a:p>
-                  </a:txBody>
-                  <a:tcPr marL="73152" marR="73152" marT="36576" marB="36576">
-                    <a:solidFill>
-                      <a:srgbClr val="E8EEF6"/>
-                    </a:solidFill>
-                  </a:tcPr>
-                </a:tc>
-                <a:tc>
-                  <a:txBody>
-                    <a:bodyPr/>
-                    <a:lstStyle/>
-                    <a:p>
-                      <a:r>
-                        <a:rPr sz="1500" b="0">
-                          <a:solidFill>
-                            <a:srgbClr val="1F2937"/>
-                          </a:solidFill>
-                        </a:rPr>
-                        <a:t>Hujum/mudofaa uchun maxsus tayyorlangan</a:t>
-                      </a:r>
-                    </a:p>
-                  </a:txBody>
-                  <a:tcPr marL="73152" marR="73152" marT="36576" marB="36576">
-                    <a:solidFill>
-                      <a:srgbClr val="E8EEF6"/>
-                    </a:solidFill>
-                  </a:tcPr>
-                </a:tc>
-                <a:tc>
-                  <a:txBody>
-                    <a:bodyPr/>
-                    <a:lstStyle/>
-                    <a:p>
-                      <a:r>
-                        <a:rPr sz="1500" b="0">
-                          <a:solidFill>
-                            <a:srgbClr val="1F2937"/>
-                          </a:solidFill>
-                        </a:rPr>
-                        <a:t>Pistolet, miltiq, hanjar</a:t>
-                      </a:r>
-                    </a:p>
-                  </a:txBody>
-                  <a:tcPr marL="73152" marR="73152" marT="36576" marB="36576">
-                    <a:solidFill>
-                      <a:srgbClr val="E8EEF6"/>
-                    </a:solidFill>
-                  </a:tcPr>
-                </a:tc>
-              </a:tr>
-              <a:tr h="768096">
-                <a:tc>
-                  <a:txBody>
-                    <a:bodyPr/>
-                    <a:lstStyle/>
-                    <a:p>
-                      <a:r>
-                        <a:rPr sz="1500" b="0">
-                          <a:solidFill>
-                            <a:srgbClr val="1F2937"/>
-                          </a:solidFill>
-                        </a:rPr>
-                        <a:t>Anjom</a:t>
-                      </a:r>
-                    </a:p>
-                  </a:txBody>
-                  <a:tcPr marL="73152" marR="73152" marT="36576" marB="36576">
-                    <a:solidFill>
-                      <a:srgbClr val="FFFFFF"/>
-                    </a:solidFill>
-                  </a:tcPr>
-                </a:tc>
-                <a:tc>
-                  <a:txBody>
-                    <a:bodyPr/>
-                    <a:lstStyle/>
-                    <a:p>
-                      <a:r>
-                        <a:rPr sz="1500" b="0">
-                          <a:solidFill>
-                            <a:srgbClr val="1F2937"/>
-                          </a:solidFill>
-                        </a:rPr>
-                        <a:t>Ishlab chiqarish, uy-ro‘zg‘orda ishlatiladi</a:t>
-                      </a:r>
-                    </a:p>
-                  </a:txBody>
-                  <a:tcPr marL="73152" marR="73152" marT="36576" marB="36576">
-                    <a:solidFill>
-                      <a:srgbClr val="FFFFFF"/>
-                    </a:solidFill>
-                  </a:tcPr>
-                </a:tc>
-                <a:tc>
-                  <a:txBody>
-                    <a:bodyPr/>
-                    <a:lstStyle/>
-                    <a:p>
-                      <a:r>
-                        <a:rPr sz="1500" b="0">
-                          <a:solidFill>
-                            <a:srgbClr val="1F2937"/>
-                          </a:solidFill>
-                        </a:rPr>
-                        <a:t>Bolta, arra, qaychi</a:t>
-                      </a:r>
-                    </a:p>
-                  </a:txBody>
-                  <a:tcPr marL="73152" marR="73152" marT="36576" marB="36576">
-                    <a:solidFill>
-                      <a:srgbClr val="FFFFFF"/>
-                    </a:solidFill>
-                  </a:tcPr>
-                </a:tc>
-              </a:tr>
-              <a:tr h="768096">
-                <a:tc>
-                  <a:txBody>
-                    <a:bodyPr/>
-                    <a:lstStyle/>
-                    <a:p>
-                      <a:r>
-                        <a:rPr sz="1500" b="0">
-                          <a:solidFill>
-                            <a:srgbClr val="1F2937"/>
-                          </a:solidFill>
-                        </a:rPr>
-                        <a:t>Jism</a:t>
-                      </a:r>
-                    </a:p>
-                  </a:txBody>
-                  <a:tcPr marL="73152" marR="73152" marT="36576" marB="36576">
-                    <a:solidFill>
-                      <a:srgbClr val="E8EEF6"/>
-                    </a:solidFill>
-                  </a:tcPr>
-                </a:tc>
-                <a:tc>
-                  <a:txBody>
-                    <a:bodyPr/>
-                    <a:lstStyle/>
-                    <a:p>
-                      <a:r>
-                        <a:rPr sz="1500" b="0">
-                          <a:solidFill>
-                            <a:srgbClr val="1F2937"/>
-                          </a:solidFill>
-                        </a:rPr>
-                        <a:t>Aniq qo‘llanish maqsadi yo‘q narsa</a:t>
-                      </a:r>
-                    </a:p>
-                  </a:txBody>
-                  <a:tcPr marL="73152" marR="73152" marT="36576" marB="36576">
-                    <a:solidFill>
-                      <a:srgbClr val="E8EEF6"/>
-                    </a:solidFill>
-                  </a:tcPr>
-                </a:tc>
-                <a:tc>
-                  <a:txBody>
-                    <a:bodyPr/>
-                    <a:lstStyle/>
-                    <a:p>
-                      <a:r>
-                        <a:rPr sz="1500" b="0">
-                          <a:solidFill>
-                            <a:srgbClr val="1F2937"/>
-                          </a:solidFill>
-                        </a:rPr>
-                        <a:t>Tosh, tayoq</a:t>
-                      </a:r>
-                    </a:p>
-                  </a:txBody>
-                  <a:tcPr marL="73152" marR="73152" marT="36576" marB="36576">
-                    <a:solidFill>
-                      <a:srgbClr val="E8EEF6"/>
-                    </a:solidFill>
-                  </a:tcPr>
-                </a:tc>
-              </a:tr>
-            </a:tbl>
-          </a:graphicData>
-        </a:graphic>
-      </p:graphicFrame>
-      <p:sp>
-        <p:nvSpPr>
-          <p:cNvPr id="10" name="TextBox 9"/>
+      <p:sp>
+        <p:nvSpPr>
+          <p:cNvPr id="9" name="Rounded Rectangle 8"/>
+          <p:cNvSpPr/>
+          <p:nvPr/>
+        </p:nvSpPr>
+        <p:spPr>
+          <a:xfrm>
+            <a:off x="5440680" y="1417320"/>
+            <a:ext cx="1945538" cy="548640"/>
+          </a:xfrm>
+          <a:prstGeom prst="roundRect">
+            <a:avLst/>
+          </a:prstGeom>
+          <a:solidFill>
+            <a:srgbClr val="0B1F3A"/>
+          </a:solidFill>
+          <a:ln>
+            <a:noFill/>
+          </a:ln>
+          <a:effectLst/>
+        </p:spPr>
+        <p:style>
+          <a:lnRef idx="1">
+            <a:schemeClr val="accent1"/>
+          </a:lnRef>
+          <a:fillRef idx="3">
+            <a:schemeClr val="accent1"/>
+          </a:fillRef>
+          <a:effectRef idx="2">
+            <a:schemeClr val="accent1"/>
+          </a:effectRef>
+          <a:fontRef idx="minor">
+            <a:schemeClr val="lt1"/>
+          </a:fontRef>
+        </p:style>
+        <p:txBody>
+          <a:bodyPr rtlCol="0" anchor="ctr" wrap="square" tIns="36576" bIns="36576"/>
+          <a:lstStyle/>
+          <a:p>
+            <a:pPr algn="ctr">
+              <a:spcAft>
+                <a:spcPts val="200"/>
+              </a:spcAft>
+            </a:pPr>
+            <a:r>
+              <a:rPr sz="1600" b="1">
+                <a:solidFill>
+                  <a:srgbClr val="FFFFFF"/>
+                </a:solidFill>
+                <a:latin typeface="Calibri"/>
+              </a:rPr>
+              <a:t>Qurol</a:t>
+            </a:r>
+          </a:p>
+        </p:txBody>
+      </p:sp>
+      <p:sp>
+        <p:nvSpPr>
+          <p:cNvPr id="10" name="Rectangle 9"/>
+          <p:cNvSpPr/>
+          <p:nvPr/>
+        </p:nvSpPr>
+        <p:spPr>
+          <a:xfrm>
+            <a:off x="5440680" y="2020824"/>
+            <a:ext cx="1945538" cy="3419856"/>
+          </a:xfrm>
+          <a:prstGeom prst="rect">
+            <a:avLst/>
+          </a:prstGeom>
+          <a:solidFill>
+            <a:srgbClr val="E8EEF6"/>
+          </a:solidFill>
+          <a:ln w="15875">
+            <a:solidFill>
+              <a:srgbClr val="E8EEF6"/>
+            </a:solidFill>
+          </a:ln>
+          <a:effectLst/>
+        </p:spPr>
+        <p:style>
+          <a:lnRef idx="1">
+            <a:schemeClr val="accent1"/>
+          </a:lnRef>
+          <a:fillRef idx="3">
+            <a:schemeClr val="accent1"/>
+          </a:fillRef>
+          <a:effectRef idx="2">
+            <a:schemeClr val="accent1"/>
+          </a:effectRef>
+          <a:fontRef idx="minor">
+            <a:schemeClr val="lt1"/>
+          </a:fontRef>
+        </p:style>
+        <p:txBody>
+          <a:bodyPr rtlCol="0" anchor="t" wrap="square" tIns="36576" bIns="36576"/>
+          <a:lstStyle/>
+          <a:p>
+            <a:pPr algn="l">
+              <a:spcAft>
+                <a:spcPts val="700"/>
+              </a:spcAft>
+            </a:pPr>
+            <a:r>
+              <a:rPr sz="1500" b="1">
+                <a:solidFill>
+                  <a:srgbClr val="C9A227"/>
+                </a:solidFill>
+                <a:latin typeface="Calibri"/>
+              </a:rPr>
+              <a:t>●  </a:t>
+            </a:r>
+            <a:r>
+              <a:rPr sz="1500" b="0">
+                <a:solidFill>
+                  <a:srgbClr val="1F2937"/>
+                </a:solidFill>
+                <a:latin typeface="Calibri"/>
+              </a:rPr>
+              <a:t>Hujum/mudofaa uchun tayyorlangan</a:t>
+            </a:r>
+          </a:p>
+          <a:p>
+            <a:pPr algn="l">
+              <a:spcAft>
+                <a:spcPts val="700"/>
+              </a:spcAft>
+            </a:pPr>
+            <a:r>
+              <a:rPr sz="1500" b="1">
+                <a:solidFill>
+                  <a:srgbClr val="C9A227"/>
+                </a:solidFill>
+                <a:latin typeface="Calibri"/>
+              </a:rPr>
+              <a:t>●  </a:t>
+            </a:r>
+            <a:r>
+              <a:rPr sz="1500" b="0">
+                <a:solidFill>
+                  <a:srgbClr val="1F2937"/>
+                </a:solidFill>
+                <a:latin typeface="Calibri"/>
+              </a:rPr>
+              <a:t>Pistolet, miltiq, hanjar</a:t>
+            </a:r>
+          </a:p>
+        </p:txBody>
+      </p:sp>
+      <p:sp>
+        <p:nvSpPr>
+          <p:cNvPr id="11" name="Rounded Rectangle 10"/>
+          <p:cNvSpPr/>
+          <p:nvPr/>
+        </p:nvSpPr>
+        <p:spPr>
+          <a:xfrm>
+            <a:off x="7523378" y="1417320"/>
+            <a:ext cx="1945538" cy="548640"/>
+          </a:xfrm>
+          <a:prstGeom prst="roundRect">
+            <a:avLst/>
+          </a:prstGeom>
+          <a:solidFill>
+            <a:srgbClr val="1F4E79"/>
+          </a:solidFill>
+          <a:ln>
+            <a:noFill/>
+          </a:ln>
+          <a:effectLst/>
+        </p:spPr>
+        <p:style>
+          <a:lnRef idx="1">
+            <a:schemeClr val="accent1"/>
+          </a:lnRef>
+          <a:fillRef idx="3">
+            <a:schemeClr val="accent1"/>
+          </a:fillRef>
+          <a:effectRef idx="2">
+            <a:schemeClr val="accent1"/>
+          </a:effectRef>
+          <a:fontRef idx="minor">
+            <a:schemeClr val="lt1"/>
+          </a:fontRef>
+        </p:style>
+        <p:txBody>
+          <a:bodyPr rtlCol="0" anchor="ctr" wrap="square" tIns="36576" bIns="36576"/>
+          <a:lstStyle/>
+          <a:p>
+            <a:pPr algn="ctr">
+              <a:spcAft>
+                <a:spcPts val="200"/>
+              </a:spcAft>
+            </a:pPr>
+            <a:r>
+              <a:rPr sz="1600" b="1">
+                <a:solidFill>
+                  <a:srgbClr val="FFFFFF"/>
+                </a:solidFill>
+                <a:latin typeface="Calibri"/>
+              </a:rPr>
+              <a:t>Anjom</a:t>
+            </a:r>
+          </a:p>
+        </p:txBody>
+      </p:sp>
+      <p:sp>
+        <p:nvSpPr>
+          <p:cNvPr id="12" name="Rectangle 11"/>
+          <p:cNvSpPr/>
+          <p:nvPr/>
+        </p:nvSpPr>
+        <p:spPr>
+          <a:xfrm>
+            <a:off x="7523378" y="2020824"/>
+            <a:ext cx="1945538" cy="3419856"/>
+          </a:xfrm>
+          <a:prstGeom prst="rect">
+            <a:avLst/>
+          </a:prstGeom>
+          <a:solidFill>
+            <a:srgbClr val="E8EEF6"/>
+          </a:solidFill>
+          <a:ln w="15875">
+            <a:solidFill>
+              <a:srgbClr val="E8EEF6"/>
+            </a:solidFill>
+          </a:ln>
+          <a:effectLst/>
+        </p:spPr>
+        <p:style>
+          <a:lnRef idx="1">
+            <a:schemeClr val="accent1"/>
+          </a:lnRef>
+          <a:fillRef idx="3">
+            <a:schemeClr val="accent1"/>
+          </a:fillRef>
+          <a:effectRef idx="2">
+            <a:schemeClr val="accent1"/>
+          </a:effectRef>
+          <a:fontRef idx="minor">
+            <a:schemeClr val="lt1"/>
+          </a:fontRef>
+        </p:style>
+        <p:txBody>
+          <a:bodyPr rtlCol="0" anchor="t" wrap="square" tIns="36576" bIns="36576"/>
+          <a:lstStyle/>
+          <a:p>
+            <a:pPr algn="l">
+              <a:spcAft>
+                <a:spcPts val="700"/>
+              </a:spcAft>
+            </a:pPr>
+            <a:r>
+              <a:rPr sz="1500" b="1">
+                <a:solidFill>
+                  <a:srgbClr val="C9A227"/>
+                </a:solidFill>
+                <a:latin typeface="Calibri"/>
+              </a:rPr>
+              <a:t>●  </a:t>
+            </a:r>
+            <a:r>
+              <a:rPr sz="1500" b="0">
+                <a:solidFill>
+                  <a:srgbClr val="1F2937"/>
+                </a:solidFill>
+                <a:latin typeface="Calibri"/>
+              </a:rPr>
+              <a:t>Ishlab chiqarish, uy-ro‘zg‘orda</a:t>
+            </a:r>
+          </a:p>
+          <a:p>
+            <a:pPr algn="l">
+              <a:spcAft>
+                <a:spcPts val="700"/>
+              </a:spcAft>
+            </a:pPr>
+            <a:r>
+              <a:rPr sz="1500" b="1">
+                <a:solidFill>
+                  <a:srgbClr val="C9A227"/>
+                </a:solidFill>
+                <a:latin typeface="Calibri"/>
+              </a:rPr>
+              <a:t>●  </a:t>
+            </a:r>
+            <a:r>
+              <a:rPr sz="1500" b="0">
+                <a:solidFill>
+                  <a:srgbClr val="1F2937"/>
+                </a:solidFill>
+                <a:latin typeface="Calibri"/>
+              </a:rPr>
+              <a:t>Bolta, arra, qaychi</a:t>
+            </a:r>
+          </a:p>
+        </p:txBody>
+      </p:sp>
+      <p:sp>
+        <p:nvSpPr>
+          <p:cNvPr id="13" name="Rounded Rectangle 12"/>
+          <p:cNvSpPr/>
+          <p:nvPr/>
+        </p:nvSpPr>
+        <p:spPr>
+          <a:xfrm>
+            <a:off x="9606076" y="1417320"/>
+            <a:ext cx="1945538" cy="548640"/>
+          </a:xfrm>
+          <a:prstGeom prst="roundRect">
+            <a:avLst/>
+          </a:prstGeom>
+          <a:solidFill>
+            <a:srgbClr val="0B1F3A"/>
+          </a:solidFill>
+          <a:ln>
+            <a:noFill/>
+          </a:ln>
+          <a:effectLst/>
+        </p:spPr>
+        <p:style>
+          <a:lnRef idx="1">
+            <a:schemeClr val="accent1"/>
+          </a:lnRef>
+          <a:fillRef idx="3">
+            <a:schemeClr val="accent1"/>
+          </a:fillRef>
+          <a:effectRef idx="2">
+            <a:schemeClr val="accent1"/>
+          </a:effectRef>
+          <a:fontRef idx="minor">
+            <a:schemeClr val="lt1"/>
+          </a:fontRef>
+        </p:style>
+        <p:txBody>
+          <a:bodyPr rtlCol="0" anchor="ctr" wrap="square" tIns="36576" bIns="36576"/>
+          <a:lstStyle/>
+          <a:p>
+            <a:pPr algn="ctr">
+              <a:spcAft>
+                <a:spcPts val="200"/>
+              </a:spcAft>
+            </a:pPr>
+            <a:r>
+              <a:rPr sz="1600" b="1">
+                <a:solidFill>
+                  <a:srgbClr val="FFFFFF"/>
+                </a:solidFill>
+                <a:latin typeface="Calibri"/>
+              </a:rPr>
+              <a:t>Jism</a:t>
+            </a:r>
+          </a:p>
+        </p:txBody>
+      </p:sp>
+      <p:sp>
+        <p:nvSpPr>
+          <p:cNvPr id="14" name="Rectangle 13"/>
+          <p:cNvSpPr/>
+          <p:nvPr/>
+        </p:nvSpPr>
+        <p:spPr>
+          <a:xfrm>
+            <a:off x="9606076" y="2020824"/>
+            <a:ext cx="1945538" cy="3419856"/>
+          </a:xfrm>
+          <a:prstGeom prst="rect">
+            <a:avLst/>
+          </a:prstGeom>
+          <a:solidFill>
+            <a:srgbClr val="E8EEF6"/>
+          </a:solidFill>
+          <a:ln w="15875">
+            <a:solidFill>
+              <a:srgbClr val="E8EEF6"/>
+            </a:solidFill>
+          </a:ln>
+          <a:effectLst/>
+        </p:spPr>
+        <p:style>
+          <a:lnRef idx="1">
+            <a:schemeClr val="accent1"/>
+          </a:lnRef>
+          <a:fillRef idx="3">
+            <a:schemeClr val="accent1"/>
+          </a:fillRef>
+          <a:effectRef idx="2">
+            <a:schemeClr val="accent1"/>
+          </a:effectRef>
+          <a:fontRef idx="minor">
+            <a:schemeClr val="lt1"/>
+          </a:fontRef>
+        </p:style>
+        <p:txBody>
+          <a:bodyPr rtlCol="0" anchor="t" wrap="square" tIns="36576" bIns="36576"/>
+          <a:lstStyle/>
+          <a:p>
+            <a:pPr algn="l">
+              <a:spcAft>
+                <a:spcPts val="700"/>
+              </a:spcAft>
+            </a:pPr>
+            <a:r>
+              <a:rPr sz="1500" b="1">
+                <a:solidFill>
+                  <a:srgbClr val="C9A227"/>
+                </a:solidFill>
+                <a:latin typeface="Calibri"/>
+              </a:rPr>
+              <a:t>●  </a:t>
+            </a:r>
+            <a:r>
+              <a:rPr sz="1500" b="0">
+                <a:solidFill>
+                  <a:srgbClr val="1F2937"/>
+                </a:solidFill>
+                <a:latin typeface="Calibri"/>
+              </a:rPr>
+              <a:t>Aniq qo‘llanish maqsadi yo‘q</a:t>
+            </a:r>
+          </a:p>
+          <a:p>
+            <a:pPr algn="l">
+              <a:spcAft>
+                <a:spcPts val="700"/>
+              </a:spcAft>
+            </a:pPr>
+            <a:r>
+              <a:rPr sz="1500" b="1">
+                <a:solidFill>
+                  <a:srgbClr val="C9A227"/>
+                </a:solidFill>
+                <a:latin typeface="Calibri"/>
+              </a:rPr>
+              <a:t>●  </a:t>
+            </a:r>
+            <a:r>
+              <a:rPr sz="1500" b="0">
+                <a:solidFill>
+                  <a:srgbClr val="1F2937"/>
+                </a:solidFill>
+                <a:latin typeface="Calibri"/>
+              </a:rPr>
+              <a:t>Tosh, tayoq</a:t>
+            </a:r>
+          </a:p>
+        </p:txBody>
+      </p:sp>
+      <p:sp>
+        <p:nvSpPr>
+          <p:cNvPr id="15" name="TextBox 14"/>
           <p:cNvSpPr txBox="1"/>
           <p:nvPr/>
         </p:nvSpPr>
         <p:spPr>
           <a:xfrm>
-            <a:off x="6263640" y="5349240"/>
-            <a:ext cx="5287975" cy="365760"/>
+            <a:off x="5440680" y="5486400"/>
+            <a:ext cx="6110935" cy="365760"/>
           </a:xfrm>
           <a:prstGeom prst="rect">
             <a:avLst/>
@@ -12113,7 +13142,7 @@
           <a:lstStyle/>
           <a:p>
             <a:r>
-              <a:rPr sz="1100" b="0">
+              <a:rPr sz="1200" b="0">
                 <a:solidFill>
                   <a:srgbClr val="6B7280"/>
                 </a:solidFill>
@@ -12126,7 +13155,7 @@
       </p:sp>
       <p:sp>
         <p:nvSpPr>
-          <p:cNvPr id="11" name="TextBox 10"/>
+          <p:cNvPr id="16" name="TextBox 15"/>
           <p:cNvSpPr txBox="1"/>
           <p:nvPr/>
         </p:nvSpPr>
@@ -12794,7 +13823,7 @@
         <p:spPr>
           <a:xfrm>
             <a:off x="640080" y="1417320"/>
-            <a:ext cx="5394960" cy="4480560"/>
+            <a:ext cx="4572000" cy="4480560"/>
           </a:xfrm>
           <a:prstGeom prst="rect">
             <a:avLst/>
@@ -12856,238 +13885,316 @@
           </a:p>
         </p:txBody>
       </p:sp>
-      <p:graphicFrame>
-        <p:nvGraphicFramePr>
-          <p:cNvPr id="9" name="Table 8"/>
-          <p:cNvGraphicFramePr>
-            <a:graphicFrameLocks noGrp="1"/>
-          </p:cNvGraphicFramePr>
-          <p:nvPr/>
-        </p:nvGraphicFramePr>
-        <p:xfrm>
-          <a:off x="6263640" y="1463040"/>
-          <a:ext cx="5287974" cy="2606040"/>
-        </p:xfrm>
-        <a:graphic>
-          <a:graphicData uri="http://schemas.openxmlformats.org/drawingml/2006/table">
-            <a:tbl>
-              <a:tblPr firstRow="1" bandRow="1">
-                <a:tableStyleId>{5C22544A-7EE6-4342-B048-85BDC9FD1C3A}</a:tableStyleId>
-              </a:tblPr>
-              <a:tblGrid>
-                <a:gridCol w="1455420"/>
-                <a:gridCol w="2038256"/>
-                <a:gridCol w="1794298"/>
-              </a:tblGrid>
-              <a:tr h="868680">
-                <a:tc>
-                  <a:txBody>
-                    <a:bodyPr/>
-                    <a:lstStyle/>
-                    <a:p>
-                      <a:r>
-                        <a:rPr sz="1600" b="1">
-                          <a:solidFill>
-                            <a:srgbClr val="FFFFFF"/>
-                          </a:solidFill>
-                        </a:rPr>
-                        <a:t>Sabab</a:t>
-                      </a:r>
-                    </a:p>
-                  </a:txBody>
-                  <a:tcPr marL="73152" marR="73152" marT="36576" marB="36576">
-                    <a:solidFill>
-                      <a:srgbClr val="0B1F3A"/>
-                    </a:solidFill>
-                  </a:tcPr>
-                </a:tc>
-                <a:tc>
-                  <a:txBody>
-                    <a:bodyPr/>
-                    <a:lstStyle/>
-                    <a:p>
-                      <a:r>
-                        <a:rPr sz="1600" b="1">
-                          <a:solidFill>
-                            <a:srgbClr val="FFFFFF"/>
-                          </a:solidFill>
-                        </a:rPr>
-                        <a:t>O‘lim vaqti</a:t>
-                      </a:r>
-                    </a:p>
-                  </a:txBody>
-                  <a:tcPr marL="73152" marR="73152" marT="36576" marB="36576">
-                    <a:solidFill>
-                      <a:srgbClr val="0B1F3A"/>
-                    </a:solidFill>
-                  </a:tcPr>
-                </a:tc>
-                <a:tc>
-                  <a:txBody>
-                    <a:bodyPr/>
-                    <a:lstStyle/>
-                    <a:p>
-                      <a:r>
-                        <a:rPr sz="1600" b="1">
-                          <a:solidFill>
-                            <a:srgbClr val="FFFFFF"/>
-                          </a:solidFill>
-                        </a:rPr>
-                        <a:t>Misol</a:t>
-                      </a:r>
-                    </a:p>
-                  </a:txBody>
-                  <a:tcPr marL="73152" marR="73152" marT="36576" marB="36576">
-                    <a:solidFill>
-                      <a:srgbClr val="0B1F3A"/>
-                    </a:solidFill>
-                  </a:tcPr>
-                </a:tc>
-              </a:tr>
-              <a:tr h="868680">
-                <a:tc>
-                  <a:txBody>
-                    <a:bodyPr/>
-                    <a:lstStyle/>
-                    <a:p>
-                      <a:r>
-                        <a:rPr sz="1500" b="0">
-                          <a:solidFill>
-                            <a:srgbClr val="1F2937"/>
-                          </a:solidFill>
-                        </a:rPr>
-                        <a:t>Birlamchi</a:t>
-                      </a:r>
-                    </a:p>
-                  </a:txBody>
-                  <a:tcPr marL="73152" marR="73152" marT="36576" marB="36576">
-                    <a:solidFill>
-                      <a:srgbClr val="E8EEF6"/>
-                    </a:solidFill>
-                  </a:tcPr>
-                </a:tc>
-                <a:tc>
-                  <a:txBody>
-                    <a:bodyPr/>
-                    <a:lstStyle/>
-                    <a:p>
-                      <a:r>
-                        <a:rPr sz="1500" b="0">
-                          <a:solidFill>
-                            <a:srgbClr val="1F2937"/>
-                          </a:solidFill>
-                        </a:rPr>
-                        <a:t>Shikastda yoki undan keyin qisqa vaqt ichida</a:t>
-                      </a:r>
-                    </a:p>
-                  </a:txBody>
-                  <a:tcPr marL="73152" marR="73152" marT="36576" marB="36576">
-                    <a:solidFill>
-                      <a:srgbClr val="E8EEF6"/>
-                    </a:solidFill>
-                  </a:tcPr>
-                </a:tc>
-                <a:tc>
-                  <a:txBody>
-                    <a:bodyPr/>
-                    <a:lstStyle/>
-                    <a:p>
-                      <a:r>
-                        <a:rPr sz="1500" b="0">
-                          <a:solidFill>
-                            <a:srgbClr val="1F2937"/>
-                          </a:solidFill>
-                        </a:rPr>
-                        <a:t>Boshning ajrashi, yurak lat eyishi</a:t>
-                      </a:r>
-                    </a:p>
-                  </a:txBody>
-                  <a:tcPr marL="73152" marR="73152" marT="36576" marB="36576">
-                    <a:solidFill>
-                      <a:srgbClr val="E8EEF6"/>
-                    </a:solidFill>
-                  </a:tcPr>
-                </a:tc>
-              </a:tr>
-              <a:tr h="868680">
-                <a:tc>
-                  <a:txBody>
-                    <a:bodyPr/>
-                    <a:lstStyle/>
-                    <a:p>
-                      <a:r>
-                        <a:rPr sz="1500" b="0">
-                          <a:solidFill>
-                            <a:srgbClr val="1F2937"/>
-                          </a:solidFill>
-                        </a:rPr>
-                        <a:t>Ikkilamchi</a:t>
-                      </a:r>
-                    </a:p>
-                  </a:txBody>
-                  <a:tcPr marL="73152" marR="73152" marT="36576" marB="36576">
-                    <a:solidFill>
-                      <a:srgbClr val="FFFFFF"/>
-                    </a:solidFill>
-                  </a:tcPr>
-                </a:tc>
-                <a:tc>
-                  <a:txBody>
-                    <a:bodyPr/>
-                    <a:lstStyle/>
-                    <a:p>
-                      <a:r>
-                        <a:rPr sz="1500" b="0">
-                          <a:solidFill>
-                            <a:srgbClr val="1F2937"/>
-                          </a:solidFill>
-                        </a:rPr>
-                        <a:t>Birmuncha muddatdan so‘ng</a:t>
-                      </a:r>
-                    </a:p>
-                  </a:txBody>
-                  <a:tcPr marL="73152" marR="73152" marT="36576" marB="36576">
-                    <a:solidFill>
-                      <a:srgbClr val="FFFFFF"/>
-                    </a:solidFill>
-                  </a:tcPr>
-                </a:tc>
-                <a:tc>
-                  <a:txBody>
-                    <a:bodyPr/>
-                    <a:lstStyle/>
-                    <a:p>
-                      <a:r>
-                        <a:rPr sz="1500" b="0">
-                          <a:solidFill>
-                            <a:srgbClr val="1F2937"/>
-                          </a:solidFill>
-                        </a:rPr>
-                        <a:t>Infeksion asorat: sepsis, qoqshol</a:t>
-                      </a:r>
-                    </a:p>
-                  </a:txBody>
-                  <a:tcPr marL="73152" marR="73152" marT="36576" marB="36576">
-                    <a:solidFill>
-                      <a:srgbClr val="FFFFFF"/>
-                    </a:solidFill>
-                  </a:tcPr>
-                </a:tc>
-              </a:tr>
-            </a:tbl>
-          </a:graphicData>
-        </a:graphic>
-      </p:graphicFrame>
-      <p:sp>
-        <p:nvSpPr>
-          <p:cNvPr id="10" name="TextBox 9"/>
+      <p:sp>
+        <p:nvSpPr>
+          <p:cNvPr id="9" name="Rounded Rectangle 8"/>
+          <p:cNvSpPr/>
+          <p:nvPr/>
+        </p:nvSpPr>
+        <p:spPr>
+          <a:xfrm>
+            <a:off x="5440680" y="1417320"/>
+            <a:ext cx="2986887" cy="548640"/>
+          </a:xfrm>
+          <a:prstGeom prst="roundRect">
+            <a:avLst/>
+          </a:prstGeom>
+          <a:solidFill>
+            <a:srgbClr val="0B1F3A"/>
+          </a:solidFill>
+          <a:ln>
+            <a:noFill/>
+          </a:ln>
+          <a:effectLst/>
+        </p:spPr>
+        <p:style>
+          <a:lnRef idx="1">
+            <a:schemeClr val="accent1"/>
+          </a:lnRef>
+          <a:fillRef idx="3">
+            <a:schemeClr val="accent1"/>
+          </a:fillRef>
+          <a:effectRef idx="2">
+            <a:schemeClr val="accent1"/>
+          </a:effectRef>
+          <a:fontRef idx="minor">
+            <a:schemeClr val="lt1"/>
+          </a:fontRef>
+        </p:style>
+        <p:txBody>
+          <a:bodyPr rtlCol="0" anchor="ctr" wrap="square" tIns="36576" bIns="36576"/>
+          <a:lstStyle/>
+          <a:p>
+            <a:pPr algn="ctr">
+              <a:spcAft>
+                <a:spcPts val="200"/>
+              </a:spcAft>
+            </a:pPr>
+            <a:r>
+              <a:rPr sz="1600" b="1">
+                <a:solidFill>
+                  <a:srgbClr val="FFFFFF"/>
+                </a:solidFill>
+                <a:latin typeface="Calibri"/>
+              </a:rPr>
+              <a:t>Birlamchi sabab</a:t>
+            </a:r>
+          </a:p>
+        </p:txBody>
+      </p:sp>
+      <p:sp>
+        <p:nvSpPr>
+          <p:cNvPr id="10" name="Rectangle 9"/>
+          <p:cNvSpPr/>
+          <p:nvPr/>
+        </p:nvSpPr>
+        <p:spPr>
+          <a:xfrm>
+            <a:off x="5440680" y="2020824"/>
+            <a:ext cx="2986887" cy="3419856"/>
+          </a:xfrm>
+          <a:prstGeom prst="rect">
+            <a:avLst/>
+          </a:prstGeom>
+          <a:solidFill>
+            <a:srgbClr val="E8EEF6"/>
+          </a:solidFill>
+          <a:ln w="15875">
+            <a:solidFill>
+              <a:srgbClr val="E8EEF6"/>
+            </a:solidFill>
+          </a:ln>
+          <a:effectLst/>
+        </p:spPr>
+        <p:style>
+          <a:lnRef idx="1">
+            <a:schemeClr val="accent1"/>
+          </a:lnRef>
+          <a:fillRef idx="3">
+            <a:schemeClr val="accent1"/>
+          </a:fillRef>
+          <a:effectRef idx="2">
+            <a:schemeClr val="accent1"/>
+          </a:effectRef>
+          <a:fontRef idx="minor">
+            <a:schemeClr val="lt1"/>
+          </a:fontRef>
+        </p:style>
+        <p:txBody>
+          <a:bodyPr rtlCol="0" anchor="t" wrap="square" tIns="36576" bIns="36576"/>
+          <a:lstStyle/>
+          <a:p>
+            <a:pPr algn="l">
+              <a:spcAft>
+                <a:spcPts val="700"/>
+              </a:spcAft>
+            </a:pPr>
+            <a:r>
+              <a:rPr sz="1500" b="1">
+                <a:solidFill>
+                  <a:srgbClr val="C9A227"/>
+                </a:solidFill>
+                <a:latin typeface="Calibri"/>
+              </a:rPr>
+              <a:t>●  </a:t>
+            </a:r>
+            <a:r>
+              <a:rPr sz="1500" b="0">
+                <a:solidFill>
+                  <a:srgbClr val="1F2937"/>
+                </a:solidFill>
+                <a:latin typeface="Calibri"/>
+              </a:rPr>
+              <a:t>Shikastda yoki qisqa vaqt ichida</a:t>
+            </a:r>
+          </a:p>
+          <a:p>
+            <a:pPr algn="l">
+              <a:spcAft>
+                <a:spcPts val="700"/>
+              </a:spcAft>
+            </a:pPr>
+            <a:r>
+              <a:rPr sz="1500" b="1">
+                <a:solidFill>
+                  <a:srgbClr val="C9A227"/>
+                </a:solidFill>
+                <a:latin typeface="Calibri"/>
+              </a:rPr>
+              <a:t>●  </a:t>
+            </a:r>
+            <a:r>
+              <a:rPr sz="1500" b="0">
+                <a:solidFill>
+                  <a:srgbClr val="1F2937"/>
+                </a:solidFill>
+                <a:latin typeface="Calibri"/>
+              </a:rPr>
+              <a:t>Boshning ajrashi, yurak lat eyishi</a:t>
+            </a:r>
+          </a:p>
+        </p:txBody>
+      </p:sp>
+      <p:sp>
+        <p:nvSpPr>
+          <p:cNvPr id="11" name="Rounded Rectangle 10"/>
+          <p:cNvSpPr/>
+          <p:nvPr/>
+        </p:nvSpPr>
+        <p:spPr>
+          <a:xfrm>
+            <a:off x="8564727" y="1417320"/>
+            <a:ext cx="2986887" cy="548640"/>
+          </a:xfrm>
+          <a:prstGeom prst="roundRect">
+            <a:avLst/>
+          </a:prstGeom>
+          <a:solidFill>
+            <a:srgbClr val="1F4E79"/>
+          </a:solidFill>
+          <a:ln>
+            <a:noFill/>
+          </a:ln>
+          <a:effectLst/>
+        </p:spPr>
+        <p:style>
+          <a:lnRef idx="1">
+            <a:schemeClr val="accent1"/>
+          </a:lnRef>
+          <a:fillRef idx="3">
+            <a:schemeClr val="accent1"/>
+          </a:fillRef>
+          <a:effectRef idx="2">
+            <a:schemeClr val="accent1"/>
+          </a:effectRef>
+          <a:fontRef idx="minor">
+            <a:schemeClr val="lt1"/>
+          </a:fontRef>
+        </p:style>
+        <p:txBody>
+          <a:bodyPr rtlCol="0" anchor="ctr" wrap="square" tIns="36576" bIns="36576"/>
+          <a:lstStyle/>
+          <a:p>
+            <a:pPr algn="ctr">
+              <a:spcAft>
+                <a:spcPts val="200"/>
+              </a:spcAft>
+            </a:pPr>
+            <a:r>
+              <a:rPr sz="1600" b="1">
+                <a:solidFill>
+                  <a:srgbClr val="FFFFFF"/>
+                </a:solidFill>
+                <a:latin typeface="Calibri"/>
+              </a:rPr>
+              <a:t>Ikkilamchi sabab</a:t>
+            </a:r>
+          </a:p>
+        </p:txBody>
+      </p:sp>
+      <p:sp>
+        <p:nvSpPr>
+          <p:cNvPr id="12" name="Rectangle 11"/>
+          <p:cNvSpPr/>
+          <p:nvPr/>
+        </p:nvSpPr>
+        <p:spPr>
+          <a:xfrm>
+            <a:off x="8564727" y="2020824"/>
+            <a:ext cx="2986887" cy="3419856"/>
+          </a:xfrm>
+          <a:prstGeom prst="rect">
+            <a:avLst/>
+          </a:prstGeom>
+          <a:solidFill>
+            <a:srgbClr val="E8EEF6"/>
+          </a:solidFill>
+          <a:ln w="15875">
+            <a:solidFill>
+              <a:srgbClr val="E8EEF6"/>
+            </a:solidFill>
+          </a:ln>
+          <a:effectLst/>
+        </p:spPr>
+        <p:style>
+          <a:lnRef idx="1">
+            <a:schemeClr val="accent1"/>
+          </a:lnRef>
+          <a:fillRef idx="3">
+            <a:schemeClr val="accent1"/>
+          </a:fillRef>
+          <a:effectRef idx="2">
+            <a:schemeClr val="accent1"/>
+          </a:effectRef>
+          <a:fontRef idx="minor">
+            <a:schemeClr val="lt1"/>
+          </a:fontRef>
+        </p:style>
+        <p:txBody>
+          <a:bodyPr rtlCol="0" anchor="t" wrap="square" tIns="36576" bIns="36576"/>
+          <a:lstStyle/>
+          <a:p>
+            <a:pPr algn="l">
+              <a:spcAft>
+                <a:spcPts val="700"/>
+              </a:spcAft>
+            </a:pPr>
+            <a:r>
+              <a:rPr sz="1500" b="1">
+                <a:solidFill>
+                  <a:srgbClr val="C9A227"/>
+                </a:solidFill>
+                <a:latin typeface="Calibri"/>
+              </a:rPr>
+              <a:t>●  </a:t>
+            </a:r>
+            <a:r>
+              <a:rPr sz="1500" b="0">
+                <a:solidFill>
+                  <a:srgbClr val="1F2937"/>
+                </a:solidFill>
+                <a:latin typeface="Calibri"/>
+              </a:rPr>
+              <a:t>Birmuncha muddatdan so‘ng</a:t>
+            </a:r>
+          </a:p>
+          <a:p>
+            <a:pPr algn="l">
+              <a:spcAft>
+                <a:spcPts val="700"/>
+              </a:spcAft>
+            </a:pPr>
+            <a:r>
+              <a:rPr sz="1500" b="1">
+                <a:solidFill>
+                  <a:srgbClr val="C9A227"/>
+                </a:solidFill>
+                <a:latin typeface="Calibri"/>
+              </a:rPr>
+              <a:t>●  </a:t>
+            </a:r>
+            <a:r>
+              <a:rPr sz="1500" b="0">
+                <a:solidFill>
+                  <a:srgbClr val="1F2937"/>
+                </a:solidFill>
+                <a:latin typeface="Calibri"/>
+              </a:rPr>
+              <a:t>Infeksion asorat: sepsis, qoqshol</a:t>
+            </a:r>
+          </a:p>
+        </p:txBody>
+      </p:sp>
+      <p:sp>
+        <p:nvSpPr>
+          <p:cNvPr id="13" name="TextBox 12"/>
           <p:cNvSpPr txBox="1"/>
           <p:nvPr/>
         </p:nvSpPr>
         <p:spPr>
           <a:xfrm>
-            <a:off x="6263640" y="5349240"/>
-            <a:ext cx="5287975" cy="365760"/>
+            <a:off x="5440680" y="5486400"/>
+            <a:ext cx="6110935" cy="365760"/>
           </a:xfrm>
           <a:prstGeom prst="rect">
             <a:avLst/>
@@ -13101,7 +14208,7 @@
           <a:lstStyle/>
           <a:p>
             <a:r>
-              <a:rPr sz="1100" b="0">
+              <a:rPr sz="1200" b="0">
                 <a:solidFill>
                   <a:srgbClr val="6B7280"/>
                 </a:solidFill>
@@ -13114,7 +14221,7 @@
       </p:sp>
       <p:sp>
         <p:nvSpPr>
-          <p:cNvPr id="11" name="TextBox 10"/>
+          <p:cNvPr id="14" name="TextBox 13"/>
           <p:cNvSpPr txBox="1"/>
           <p:nvPr/>
         </p:nvSpPr>
@@ -13408,7 +14515,7 @@
         <p:spPr>
           <a:xfrm>
             <a:off x="640080" y="1417320"/>
-            <a:ext cx="5394960" cy="4480560"/>
+            <a:ext cx="4572000" cy="4480560"/>
           </a:xfrm>
           <a:prstGeom prst="rect">
             <a:avLst/>
@@ -13470,368 +14577,416 @@
           </a:p>
         </p:txBody>
       </p:sp>
-      <p:graphicFrame>
-        <p:nvGraphicFramePr>
-          <p:cNvPr id="9" name="Table 8"/>
-          <p:cNvGraphicFramePr>
-            <a:graphicFrameLocks noGrp="1"/>
-          </p:cNvGraphicFramePr>
-          <p:nvPr/>
-        </p:nvGraphicFramePr>
-        <p:xfrm>
-          <a:off x="6263640" y="1463040"/>
-          <a:ext cx="5287974" cy="3072380"/>
-        </p:xfrm>
-        <a:graphic>
-          <a:graphicData uri="http://schemas.openxmlformats.org/drawingml/2006/table">
-            <a:tbl>
-              <a:tblPr firstRow="1" bandRow="1">
-                <a:tableStyleId>{5C22544A-7EE6-4342-B048-85BDC9FD1C3A}</a:tableStyleId>
-              </a:tblPr>
-              <a:tblGrid>
-                <a:gridCol w="1573530"/>
-                <a:gridCol w="2184683"/>
-                <a:gridCol w="1529761"/>
-              </a:tblGrid>
-              <a:tr h="614476">
-                <a:tc>
-                  <a:txBody>
-                    <a:bodyPr/>
-                    <a:lstStyle/>
-                    <a:p>
-                      <a:r>
-                        <a:rPr sz="1600" b="1">
-                          <a:solidFill>
-                            <a:srgbClr val="FFFFFF"/>
-                          </a:solidFill>
-                        </a:rPr>
-                        <a:t>Belgi</a:t>
-                      </a:r>
-                    </a:p>
-                  </a:txBody>
-                  <a:tcPr marL="73152" marR="73152" marT="36576" marB="36576">
-                    <a:solidFill>
-                      <a:srgbClr val="0B1F3A"/>
-                    </a:solidFill>
-                  </a:tcPr>
-                </a:tc>
-                <a:tc>
-                  <a:txBody>
-                    <a:bodyPr/>
-                    <a:lstStyle/>
-                    <a:p>
-                      <a:r>
-                        <a:rPr sz="1600" b="1">
-                          <a:solidFill>
-                            <a:srgbClr val="FFFFFF"/>
-                          </a:solidFill>
-                        </a:rPr>
-                        <a:t>O‘tkir</a:t>
-                      </a:r>
-                    </a:p>
-                  </a:txBody>
-                  <a:tcPr marL="73152" marR="73152" marT="36576" marB="36576">
-                    <a:solidFill>
-                      <a:srgbClr val="0B1F3A"/>
-                    </a:solidFill>
-                  </a:tcPr>
-                </a:tc>
-                <a:tc>
-                  <a:txBody>
-                    <a:bodyPr/>
-                    <a:lstStyle/>
-                    <a:p>
-                      <a:r>
-                        <a:rPr sz="1600" b="1">
-                          <a:solidFill>
-                            <a:srgbClr val="FFFFFF"/>
-                          </a:solidFill>
-                        </a:rPr>
-                        <a:t>Ko‘p yo‘qotish</a:t>
-                      </a:r>
-                    </a:p>
-                  </a:txBody>
-                  <a:tcPr marL="73152" marR="73152" marT="36576" marB="36576">
-                    <a:solidFill>
-                      <a:srgbClr val="0B1F3A"/>
-                    </a:solidFill>
-                  </a:tcPr>
-                </a:tc>
-              </a:tr>
-              <a:tr h="614476">
-                <a:tc>
-                  <a:txBody>
-                    <a:bodyPr/>
-                    <a:lstStyle/>
-                    <a:p>
-                      <a:r>
-                        <a:rPr sz="1500" b="0">
-                          <a:solidFill>
-                            <a:srgbClr val="1F2937"/>
-                          </a:solidFill>
-                        </a:rPr>
-                        <a:t>Miqdor</a:t>
-                      </a:r>
-                    </a:p>
-                  </a:txBody>
-                  <a:tcPr marL="73152" marR="73152" marT="36576" marB="36576">
-                    <a:solidFill>
-                      <a:srgbClr val="E8EEF6"/>
-                    </a:solidFill>
-                  </a:tcPr>
-                </a:tc>
-                <a:tc>
-                  <a:txBody>
-                    <a:bodyPr/>
-                    <a:lstStyle/>
-                    <a:p>
-                      <a:r>
-                        <a:rPr sz="1500" b="0">
-                          <a:solidFill>
-                            <a:srgbClr val="1F2937"/>
-                          </a:solidFill>
-                        </a:rPr>
-                        <a:t>Yirik arteriya; 500 ml gacha ham</a:t>
-                      </a:r>
-                    </a:p>
-                  </a:txBody>
-                  <a:tcPr marL="73152" marR="73152" marT="36576" marB="36576">
-                    <a:solidFill>
-                      <a:srgbClr val="E8EEF6"/>
-                    </a:solidFill>
-                  </a:tcPr>
-                </a:tc>
-                <a:tc>
-                  <a:txBody>
-                    <a:bodyPr/>
-                    <a:lstStyle/>
-                    <a:p>
-                      <a:r>
-                        <a:rPr sz="1500" b="0">
-                          <a:solidFill>
-                            <a:srgbClr val="1F2937"/>
-                          </a:solidFill>
-                        </a:rPr>
-                        <a:t>50% dan ortiq (2,5 l va undan ko‘p)</a:t>
-                      </a:r>
-                    </a:p>
-                  </a:txBody>
-                  <a:tcPr marL="73152" marR="73152" marT="36576" marB="36576">
-                    <a:solidFill>
-                      <a:srgbClr val="E8EEF6"/>
-                    </a:solidFill>
-                  </a:tcPr>
-                </a:tc>
-              </a:tr>
-              <a:tr h="614476">
-                <a:tc>
-                  <a:txBody>
-                    <a:bodyPr/>
-                    <a:lstStyle/>
-                    <a:p>
-                      <a:r>
-                        <a:rPr sz="1500" b="0">
-                          <a:solidFill>
-                            <a:srgbClr val="1F2937"/>
-                          </a:solidFill>
-                        </a:rPr>
-                        <a:t>Davomiyligi</a:t>
-                      </a:r>
-                    </a:p>
-                  </a:txBody>
-                  <a:tcPr marL="73152" marR="73152" marT="36576" marB="36576">
-                    <a:solidFill>
-                      <a:srgbClr val="FFFFFF"/>
-                    </a:solidFill>
-                  </a:tcPr>
-                </a:tc>
-                <a:tc>
-                  <a:txBody>
-                    <a:bodyPr/>
-                    <a:lstStyle/>
-                    <a:p>
-                      <a:r>
-                        <a:rPr sz="1500" b="0">
-                          <a:solidFill>
-                            <a:srgbClr val="1F2937"/>
-                          </a:solidFill>
-                        </a:rPr>
-                        <a:t>Dastlabki minutlarda o‘lim (fibrillyatsiya)</a:t>
-                      </a:r>
-                    </a:p>
-                  </a:txBody>
-                  <a:tcPr marL="73152" marR="73152" marT="36576" marB="36576">
-                    <a:solidFill>
-                      <a:srgbClr val="FFFFFF"/>
-                    </a:solidFill>
-                  </a:tcPr>
-                </a:tc>
-                <a:tc>
-                  <a:txBody>
-                    <a:bodyPr/>
-                    <a:lstStyle/>
-                    <a:p>
-                      <a:r>
-                        <a:rPr sz="1500" b="0">
-                          <a:solidFill>
-                            <a:srgbClr val="1F2937"/>
-                          </a:solidFill>
-                        </a:rPr>
-                        <a:t>Bir necha soat</a:t>
-                      </a:r>
-                    </a:p>
-                  </a:txBody>
-                  <a:tcPr marL="73152" marR="73152" marT="36576" marB="36576">
-                    <a:solidFill>
-                      <a:srgbClr val="FFFFFF"/>
-                    </a:solidFill>
-                  </a:tcPr>
-                </a:tc>
-              </a:tr>
-              <a:tr h="614476">
-                <a:tc>
-                  <a:txBody>
-                    <a:bodyPr/>
-                    <a:lstStyle/>
-                    <a:p>
-                      <a:r>
-                        <a:rPr sz="1500" b="0">
-                          <a:solidFill>
-                            <a:srgbClr val="1F2937"/>
-                          </a:solidFill>
-                        </a:rPr>
-                        <a:t>Ichki a’zolar</a:t>
-                      </a:r>
-                    </a:p>
-                  </a:txBody>
-                  <a:tcPr marL="73152" marR="73152" marT="36576" marB="36576">
-                    <a:solidFill>
-                      <a:srgbClr val="E8EEF6"/>
-                    </a:solidFill>
-                  </a:tcPr>
-                </a:tc>
-                <a:tc>
-                  <a:txBody>
-                    <a:bodyPr/>
-                    <a:lstStyle/>
-                    <a:p>
-                      <a:r>
-                        <a:rPr sz="1500" b="0">
-                          <a:solidFill>
-                            <a:srgbClr val="1F2937"/>
-                          </a:solidFill>
-                        </a:rPr>
-                        <a:t>Faqat miya, yurak kamqon; taloq to‘q</a:t>
-                      </a:r>
-                    </a:p>
-                  </a:txBody>
-                  <a:tcPr marL="73152" marR="73152" marT="36576" marB="36576">
-                    <a:solidFill>
-                      <a:srgbClr val="E8EEF6"/>
-                    </a:solidFill>
-                  </a:tcPr>
-                </a:tc>
-                <a:tc>
-                  <a:txBody>
-                    <a:bodyPr/>
-                    <a:lstStyle/>
-                    <a:p>
-                      <a:r>
-                        <a:rPr sz="1500" b="0">
-                          <a:solidFill>
-                            <a:srgbClr val="1F2937"/>
-                          </a:solidFill>
-                        </a:rPr>
-                        <a:t>Umumiy kamqonlik, taloq qisqargan</a:t>
-                      </a:r>
-                    </a:p>
-                  </a:txBody>
-                  <a:tcPr marL="73152" marR="73152" marT="36576" marB="36576">
-                    <a:solidFill>
-                      <a:srgbClr val="E8EEF6"/>
-                    </a:solidFill>
-                  </a:tcPr>
-                </a:tc>
-              </a:tr>
-              <a:tr h="614476">
-                <a:tc>
-                  <a:txBody>
-                    <a:bodyPr/>
-                    <a:lstStyle/>
-                    <a:p>
-                      <a:r>
-                        <a:rPr sz="1500" b="0">
-                          <a:solidFill>
-                            <a:srgbClr val="1F2937"/>
-                          </a:solidFill>
-                        </a:rPr>
-                        <a:t>Murda dog‘lari</a:t>
-                      </a:r>
-                    </a:p>
-                  </a:txBody>
-                  <a:tcPr marL="73152" marR="73152" marT="36576" marB="36576">
-                    <a:solidFill>
-                      <a:srgbClr val="FFFFFF"/>
-                    </a:solidFill>
-                  </a:tcPr>
-                </a:tc>
-                <a:tc>
-                  <a:txBody>
-                    <a:bodyPr/>
-                    <a:lstStyle/>
-                    <a:p>
-                      <a:r>
-                        <a:rPr sz="1500" b="0">
-                          <a:solidFill>
-                            <a:srgbClr val="1F2937"/>
-                          </a:solidFill>
-                        </a:rPr>
-                        <a:t>Odatdagidek</a:t>
-                      </a:r>
-                    </a:p>
-                  </a:txBody>
-                  <a:tcPr marL="73152" marR="73152" marT="36576" marB="36576">
-                    <a:solidFill>
-                      <a:srgbClr val="FFFFFF"/>
-                    </a:solidFill>
-                  </a:tcPr>
-                </a:tc>
-                <a:tc>
-                  <a:txBody>
-                    <a:bodyPr/>
-                    <a:lstStyle/>
-                    <a:p>
-                      <a:r>
-                        <a:rPr sz="1500" b="0">
-                          <a:solidFill>
-                            <a:srgbClr val="1F2937"/>
-                          </a:solidFill>
-                        </a:rPr>
-                        <a:t>Kech, kamroq; mushak qotishi kuchli</a:t>
-                      </a:r>
-                    </a:p>
-                  </a:txBody>
-                  <a:tcPr marL="73152" marR="73152" marT="36576" marB="36576">
-                    <a:solidFill>
-                      <a:srgbClr val="FFFFFF"/>
-                    </a:solidFill>
-                  </a:tcPr>
-                </a:tc>
-              </a:tr>
-            </a:tbl>
-          </a:graphicData>
-        </a:graphic>
-      </p:graphicFrame>
-      <p:sp>
-        <p:nvSpPr>
-          <p:cNvPr id="10" name="TextBox 9"/>
+      <p:sp>
+        <p:nvSpPr>
+          <p:cNvPr id="9" name="Rounded Rectangle 8"/>
+          <p:cNvSpPr/>
+          <p:nvPr/>
+        </p:nvSpPr>
+        <p:spPr>
+          <a:xfrm>
+            <a:off x="5440680" y="1417320"/>
+            <a:ext cx="2986887" cy="548640"/>
+          </a:xfrm>
+          <a:prstGeom prst="roundRect">
+            <a:avLst/>
+          </a:prstGeom>
+          <a:solidFill>
+            <a:srgbClr val="0B1F3A"/>
+          </a:solidFill>
+          <a:ln>
+            <a:noFill/>
+          </a:ln>
+          <a:effectLst/>
+        </p:spPr>
+        <p:style>
+          <a:lnRef idx="1">
+            <a:schemeClr val="accent1"/>
+          </a:lnRef>
+          <a:fillRef idx="3">
+            <a:schemeClr val="accent1"/>
+          </a:fillRef>
+          <a:effectRef idx="2">
+            <a:schemeClr val="accent1"/>
+          </a:effectRef>
+          <a:fontRef idx="minor">
+            <a:schemeClr val="lt1"/>
+          </a:fontRef>
+        </p:style>
+        <p:txBody>
+          <a:bodyPr rtlCol="0" anchor="ctr" wrap="square" tIns="36576" bIns="36576"/>
+          <a:lstStyle/>
+          <a:p>
+            <a:pPr algn="ctr">
+              <a:spcAft>
+                <a:spcPts val="200"/>
+              </a:spcAft>
+            </a:pPr>
+            <a:r>
+              <a:rPr sz="1600" b="1">
+                <a:solidFill>
+                  <a:srgbClr val="FFFFFF"/>
+                </a:solidFill>
+                <a:latin typeface="Calibri"/>
+              </a:rPr>
+              <a:t>O‘tkir qon yo‘qotish</a:t>
+            </a:r>
+          </a:p>
+        </p:txBody>
+      </p:sp>
+      <p:sp>
+        <p:nvSpPr>
+          <p:cNvPr id="10" name="Rectangle 9"/>
+          <p:cNvSpPr/>
+          <p:nvPr/>
+        </p:nvSpPr>
+        <p:spPr>
+          <a:xfrm>
+            <a:off x="5440680" y="2020824"/>
+            <a:ext cx="2986887" cy="3419856"/>
+          </a:xfrm>
+          <a:prstGeom prst="rect">
+            <a:avLst/>
+          </a:prstGeom>
+          <a:solidFill>
+            <a:srgbClr val="E8EEF6"/>
+          </a:solidFill>
+          <a:ln w="15875">
+            <a:solidFill>
+              <a:srgbClr val="E8EEF6"/>
+            </a:solidFill>
+          </a:ln>
+          <a:effectLst/>
+        </p:spPr>
+        <p:style>
+          <a:lnRef idx="1">
+            <a:schemeClr val="accent1"/>
+          </a:lnRef>
+          <a:fillRef idx="3">
+            <a:schemeClr val="accent1"/>
+          </a:fillRef>
+          <a:effectRef idx="2">
+            <a:schemeClr val="accent1"/>
+          </a:effectRef>
+          <a:fontRef idx="minor">
+            <a:schemeClr val="lt1"/>
+          </a:fontRef>
+        </p:style>
+        <p:txBody>
+          <a:bodyPr rtlCol="0" anchor="t" wrap="square" tIns="36576" bIns="36576"/>
+          <a:lstStyle/>
+          <a:p>
+            <a:pPr algn="l">
+              <a:spcAft>
+                <a:spcPts val="700"/>
+              </a:spcAft>
+            </a:pPr>
+            <a:r>
+              <a:rPr sz="1500" b="1">
+                <a:solidFill>
+                  <a:srgbClr val="C9A227"/>
+                </a:solidFill>
+                <a:latin typeface="Calibri"/>
+              </a:rPr>
+              <a:t>●  </a:t>
+            </a:r>
+            <a:r>
+              <a:rPr sz="1500" b="0">
+                <a:solidFill>
+                  <a:srgbClr val="1F2937"/>
+                </a:solidFill>
+                <a:latin typeface="Calibri"/>
+              </a:rPr>
+              <a:t>Yirik arteriya; 500 ml gacha ham</a:t>
+            </a:r>
+          </a:p>
+          <a:p>
+            <a:pPr algn="l">
+              <a:spcAft>
+                <a:spcPts val="700"/>
+              </a:spcAft>
+            </a:pPr>
+            <a:r>
+              <a:rPr sz="1500" b="1">
+                <a:solidFill>
+                  <a:srgbClr val="C9A227"/>
+                </a:solidFill>
+                <a:latin typeface="Calibri"/>
+              </a:rPr>
+              <a:t>●  </a:t>
+            </a:r>
+            <a:r>
+              <a:rPr sz="1500" b="0">
+                <a:solidFill>
+                  <a:srgbClr val="1F2937"/>
+                </a:solidFill>
+                <a:latin typeface="Calibri"/>
+              </a:rPr>
+              <a:t>Dastlabki minutlarda o‘lim</a:t>
+            </a:r>
+          </a:p>
+          <a:p>
+            <a:pPr algn="l">
+              <a:spcAft>
+                <a:spcPts val="700"/>
+              </a:spcAft>
+            </a:pPr>
+            <a:r>
+              <a:rPr sz="1500" b="1">
+                <a:solidFill>
+                  <a:srgbClr val="C9A227"/>
+                </a:solidFill>
+                <a:latin typeface="Calibri"/>
+              </a:rPr>
+              <a:t>●  </a:t>
+            </a:r>
+            <a:r>
+              <a:rPr sz="1500" b="0">
+                <a:solidFill>
+                  <a:srgbClr val="1F2937"/>
+                </a:solidFill>
+                <a:latin typeface="Calibri"/>
+              </a:rPr>
+              <a:t>Miya, yurak kamqon; taloq to‘q</a:t>
+            </a:r>
+          </a:p>
+          <a:p>
+            <a:pPr algn="l">
+              <a:spcAft>
+                <a:spcPts val="700"/>
+              </a:spcAft>
+            </a:pPr>
+            <a:r>
+              <a:rPr sz="1500" b="1">
+                <a:solidFill>
+                  <a:srgbClr val="C9A227"/>
+                </a:solidFill>
+                <a:latin typeface="Calibri"/>
+              </a:rPr>
+              <a:t>●  </a:t>
+            </a:r>
+            <a:r>
+              <a:rPr sz="1500" b="0">
+                <a:solidFill>
+                  <a:srgbClr val="1F2937"/>
+                </a:solidFill>
+                <a:latin typeface="Calibri"/>
+              </a:rPr>
+              <a:t>Murda dog‘lari odatdagidek</a:t>
+            </a:r>
+          </a:p>
+        </p:txBody>
+      </p:sp>
+      <p:sp>
+        <p:nvSpPr>
+          <p:cNvPr id="11" name="Rounded Rectangle 10"/>
+          <p:cNvSpPr/>
+          <p:nvPr/>
+        </p:nvSpPr>
+        <p:spPr>
+          <a:xfrm>
+            <a:off x="8564727" y="1417320"/>
+            <a:ext cx="2986887" cy="548640"/>
+          </a:xfrm>
+          <a:prstGeom prst="roundRect">
+            <a:avLst/>
+          </a:prstGeom>
+          <a:solidFill>
+            <a:srgbClr val="1F4E79"/>
+          </a:solidFill>
+          <a:ln>
+            <a:noFill/>
+          </a:ln>
+          <a:effectLst/>
+        </p:spPr>
+        <p:style>
+          <a:lnRef idx="1">
+            <a:schemeClr val="accent1"/>
+          </a:lnRef>
+          <a:fillRef idx="3">
+            <a:schemeClr val="accent1"/>
+          </a:fillRef>
+          <a:effectRef idx="2">
+            <a:schemeClr val="accent1"/>
+          </a:effectRef>
+          <a:fontRef idx="minor">
+            <a:schemeClr val="lt1"/>
+          </a:fontRef>
+        </p:style>
+        <p:txBody>
+          <a:bodyPr rtlCol="0" anchor="ctr" wrap="square" tIns="36576" bIns="36576"/>
+          <a:lstStyle/>
+          <a:p>
+            <a:pPr algn="ctr">
+              <a:spcAft>
+                <a:spcPts val="200"/>
+              </a:spcAft>
+            </a:pPr>
+            <a:r>
+              <a:rPr sz="1600" b="1">
+                <a:solidFill>
+                  <a:srgbClr val="FFFFFF"/>
+                </a:solidFill>
+                <a:latin typeface="Calibri"/>
+              </a:rPr>
+              <a:t>Ko‘p qon yo‘qotish</a:t>
+            </a:r>
+          </a:p>
+        </p:txBody>
+      </p:sp>
+      <p:sp>
+        <p:nvSpPr>
+          <p:cNvPr id="12" name="Rectangle 11"/>
+          <p:cNvSpPr/>
+          <p:nvPr/>
+        </p:nvSpPr>
+        <p:spPr>
+          <a:xfrm>
+            <a:off x="8564727" y="2020824"/>
+            <a:ext cx="2986887" cy="3419856"/>
+          </a:xfrm>
+          <a:prstGeom prst="rect">
+            <a:avLst/>
+          </a:prstGeom>
+          <a:solidFill>
+            <a:srgbClr val="E8EEF6"/>
+          </a:solidFill>
+          <a:ln w="15875">
+            <a:solidFill>
+              <a:srgbClr val="E8EEF6"/>
+            </a:solidFill>
+          </a:ln>
+          <a:effectLst/>
+        </p:spPr>
+        <p:style>
+          <a:lnRef idx="1">
+            <a:schemeClr val="accent1"/>
+          </a:lnRef>
+          <a:fillRef idx="3">
+            <a:schemeClr val="accent1"/>
+          </a:fillRef>
+          <a:effectRef idx="2">
+            <a:schemeClr val="accent1"/>
+          </a:effectRef>
+          <a:fontRef idx="minor">
+            <a:schemeClr val="lt1"/>
+          </a:fontRef>
+        </p:style>
+        <p:txBody>
+          <a:bodyPr rtlCol="0" anchor="t" wrap="square" tIns="36576" bIns="36576"/>
+          <a:lstStyle/>
+          <a:p>
+            <a:pPr algn="l">
+              <a:spcAft>
+                <a:spcPts val="700"/>
+              </a:spcAft>
+            </a:pPr>
+            <a:r>
+              <a:rPr sz="1500" b="1">
+                <a:solidFill>
+                  <a:srgbClr val="C9A227"/>
+                </a:solidFill>
+                <a:latin typeface="Calibri"/>
+              </a:rPr>
+              <a:t>●  </a:t>
+            </a:r>
+            <a:r>
+              <a:rPr sz="1500" b="0">
+                <a:solidFill>
+                  <a:srgbClr val="1F2937"/>
+                </a:solidFill>
+                <a:latin typeface="Calibri"/>
+              </a:rPr>
+              <a:t>50% dan ortiq (2,5 l va ko‘p)</a:t>
+            </a:r>
+          </a:p>
+          <a:p>
+            <a:pPr algn="l">
+              <a:spcAft>
+                <a:spcPts val="700"/>
+              </a:spcAft>
+            </a:pPr>
+            <a:r>
+              <a:rPr sz="1500" b="1">
+                <a:solidFill>
+                  <a:srgbClr val="C9A227"/>
+                </a:solidFill>
+                <a:latin typeface="Calibri"/>
+              </a:rPr>
+              <a:t>●  </a:t>
+            </a:r>
+            <a:r>
+              <a:rPr sz="1500" b="0">
+                <a:solidFill>
+                  <a:srgbClr val="1F2937"/>
+                </a:solidFill>
+                <a:latin typeface="Calibri"/>
+              </a:rPr>
+              <a:t>Bir necha soat davom etadi</a:t>
+            </a:r>
+          </a:p>
+          <a:p>
+            <a:pPr algn="l">
+              <a:spcAft>
+                <a:spcPts val="700"/>
+              </a:spcAft>
+            </a:pPr>
+            <a:r>
+              <a:rPr sz="1500" b="1">
+                <a:solidFill>
+                  <a:srgbClr val="C9A227"/>
+                </a:solidFill>
+                <a:latin typeface="Calibri"/>
+              </a:rPr>
+              <a:t>●  </a:t>
+            </a:r>
+            <a:r>
+              <a:rPr sz="1500" b="0">
+                <a:solidFill>
+                  <a:srgbClr val="1F2937"/>
+                </a:solidFill>
+                <a:latin typeface="Calibri"/>
+              </a:rPr>
+              <a:t>Umumiy kamqonlik, taloq qisqargan</a:t>
+            </a:r>
+          </a:p>
+          <a:p>
+            <a:pPr algn="l">
+              <a:spcAft>
+                <a:spcPts val="700"/>
+              </a:spcAft>
+            </a:pPr>
+            <a:r>
+              <a:rPr sz="1500" b="1">
+                <a:solidFill>
+                  <a:srgbClr val="C9A227"/>
+                </a:solidFill>
+                <a:latin typeface="Calibri"/>
+              </a:rPr>
+              <a:t>●  </a:t>
+            </a:r>
+            <a:r>
+              <a:rPr sz="1500" b="0">
+                <a:solidFill>
+                  <a:srgbClr val="1F2937"/>
+                </a:solidFill>
+                <a:latin typeface="Calibri"/>
+              </a:rPr>
+              <a:t>Murda dog‘lari kech, kamroq</a:t>
+            </a:r>
+          </a:p>
+        </p:txBody>
+      </p:sp>
+      <p:sp>
+        <p:nvSpPr>
+          <p:cNvPr id="13" name="TextBox 12"/>
           <p:cNvSpPr txBox="1"/>
           <p:nvPr/>
         </p:nvSpPr>
         <p:spPr>
           <a:xfrm>
-            <a:off x="6263640" y="5349240"/>
-            <a:ext cx="5287975" cy="365760"/>
+            <a:off x="5440680" y="5486400"/>
+            <a:ext cx="6110935" cy="365760"/>
           </a:xfrm>
           <a:prstGeom prst="rect">
             <a:avLst/>
@@ -13845,7 +15000,7 @@
           <a:lstStyle/>
           <a:p>
             <a:r>
-              <a:rPr sz="1100" b="0">
+              <a:rPr sz="1200" b="0">
                 <a:solidFill>
                   <a:srgbClr val="6B7280"/>
                 </a:solidFill>
@@ -13858,7 +15013,7 @@
       </p:sp>
       <p:sp>
         <p:nvSpPr>
-          <p:cNvPr id="11" name="TextBox 10"/>
+          <p:cNvPr id="14" name="TextBox 13"/>
           <p:cNvSpPr txBox="1"/>
           <p:nvPr/>
         </p:nvSpPr>
@@ -14171,13 +15326,13 @@
               </a:spcAft>
             </a:pPr>
             <a:r>
-              <a:rPr sz="2000">
+              <a:rPr sz="2200">
                 <a:solidFill>
                   <a:srgbClr val="1F2937"/>
                 </a:solidFill>
                 <a:latin typeface="Calibri"/>
               </a:rPr>
-              <a:t>▸  Travmatik shok — markaziy nerv, yurak-qon tomir va endokrin tizimlar faoliyatining jiddiy buzilishi ko‘rinishidagi javob reaksiyasi. Periferik qon aylanishi yetishmaydi.</a:t>
+              <a:t>▸  Travmatik shok — markaziy nerv, yurak-qon tomir va endokrin tizimlar faoliyatining jiddiy buzilishi; periferik qon aylanishi yetishmaydi.</a:t>
             </a:r>
           </a:p>
           <a:p>
@@ -14187,7 +15342,7 @@
               </a:spcAft>
             </a:pPr>
             <a:r>
-              <a:rPr sz="2000">
+              <a:rPr sz="2200">
                 <a:solidFill>
                   <a:srgbClr val="1F2937"/>
                 </a:solidFill>
@@ -14203,13 +15358,13 @@
               </a:spcAft>
             </a:pPr>
             <a:r>
-              <a:rPr sz="2000">
+              <a:rPr sz="2200">
                 <a:solidFill>
                   <a:srgbClr val="1F2937"/>
                 </a:solidFill>
                 <a:latin typeface="Calibri"/>
               </a:rPr>
-              <a:t>▸  Kalla-miya jarohatida epidural, subdural, subaraxnoidal, qorinchalar ichi va miya to‘qimasi gematomalari miyani qisadi. Bo‘yin va ko‘krak umurtqalari jarohatida orqa miya qisiladi.</a:t>
+              <a:t>▸  Kalla-miya jarohatida epidural, subdural, subaraxnoidal gematomalar miyani, bo‘yin-ko‘krak umurtqasi jarohatida orqa miyani qisadi.</a:t>
             </a:r>
           </a:p>
           <a:p>
@@ -14219,7 +15374,7 @@
               </a:spcAft>
             </a:pPr>
             <a:r>
-              <a:rPr sz="2000">
+              <a:rPr sz="2200">
                 <a:solidFill>
                   <a:srgbClr val="1F2937"/>
                 </a:solidFill>
@@ -14526,7 +15681,7 @@
         <p:spPr>
           <a:xfrm>
             <a:off x="640080" y="1417320"/>
-            <a:ext cx="5394960" cy="4480560"/>
+            <a:ext cx="4572000" cy="4480560"/>
           </a:xfrm>
           <a:prstGeom prst="rect">
             <a:avLst/>
@@ -14596,10 +15751,58 @@
         </p:nvSpPr>
         <p:spPr>
           <a:xfrm>
-            <a:off x="6263640" y="1463040"/>
-            <a:ext cx="5287975" cy="534009"/>
+            <a:off x="5440680" y="1417320"/>
+            <a:ext cx="2973171" cy="1255776"/>
           </a:xfrm>
           <a:prstGeom prst="roundRect">
+            <a:avLst>
+              <a:gd name="adj" fmla="val 8000"/>
+            </a:avLst>
+          </a:prstGeom>
+          <a:solidFill>
+            <a:srgbClr val="FFFFFF"/>
+          </a:solidFill>
+          <a:ln w="15875">
+            <a:solidFill>
+              <a:srgbClr val="E8EEF6"/>
+            </a:solidFill>
+          </a:ln>
+          <a:effectLst/>
+        </p:spPr>
+        <p:style>
+          <a:lnRef idx="1">
+            <a:schemeClr val="accent1"/>
+          </a:lnRef>
+          <a:fillRef idx="3">
+            <a:schemeClr val="accent1"/>
+          </a:fillRef>
+          <a:effectRef idx="2">
+            <a:schemeClr val="accent1"/>
+          </a:effectRef>
+          <a:fontRef idx="minor">
+            <a:schemeClr val="lt1"/>
+          </a:fontRef>
+        </p:style>
+        <p:txBody>
+          <a:bodyPr rtlCol="0" anchor="ctr"/>
+          <a:lstStyle/>
+          <a:p>
+            <a:pPr algn="ctr"/>
+          </a:p>
+        </p:txBody>
+      </p:sp>
+      <p:sp>
+        <p:nvSpPr>
+          <p:cNvPr id="10" name="Oval 9"/>
+          <p:cNvSpPr/>
+          <p:nvPr/>
+        </p:nvSpPr>
+        <p:spPr>
+          <a:xfrm>
+            <a:off x="5550408" y="1816608"/>
+            <a:ext cx="457200" cy="457200"/>
+          </a:xfrm>
+          <a:prstGeom prst="ellipse">
             <a:avLst/>
           </a:prstGeom>
           <a:solidFill>
@@ -14625,40 +15828,104 @@
           </a:fontRef>
         </p:style>
         <p:txBody>
-          <a:bodyPr rtlCol="0" anchor="ctr" wrap="square"/>
-          <a:lstStyle/>
-          <a:p>
-            <a:pPr algn="ctr"/>
+          <a:bodyPr rtlCol="0" anchor="ctr" wrap="square" lIns="0" rIns="0" tIns="36576" bIns="36576"/>
+          <a:lstStyle/>
+          <a:p>
+            <a:pPr algn="ctr">
+              <a:spcAft>
+                <a:spcPts val="200"/>
+              </a:spcAft>
+            </a:pPr>
             <a:r>
               <a:rPr sz="1600" b="1">
                 <a:solidFill>
                   <a:srgbClr val="FFFFFF"/>
                 </a:solidFill>
-              </a:rPr>
-              <a:t>Ko‘krak qafasidan boshlash</a:t>
-            </a:r>
-          </a:p>
-        </p:txBody>
-      </p:sp>
-      <p:sp>
-        <p:nvSpPr>
-          <p:cNvPr id="10" name="Down Arrow 9"/>
+                <a:latin typeface="Calibri"/>
+              </a:rPr>
+              <a:t>1</a:t>
+            </a:r>
+          </a:p>
+        </p:txBody>
+      </p:sp>
+      <p:sp>
+        <p:nvSpPr>
+          <p:cNvPr id="11" name="TextBox 10"/>
+          <p:cNvSpPr txBox="1"/>
+          <p:nvPr/>
+        </p:nvSpPr>
+        <p:spPr>
+          <a:xfrm>
+            <a:off x="6080760" y="1417320"/>
+            <a:ext cx="2259939" cy="1255776"/>
+          </a:xfrm>
+          <a:prstGeom prst="rect">
+            <a:avLst/>
+          </a:prstGeom>
+          <a:noFill/>
+        </p:spPr>
+        <p:txBody>
+          <a:bodyPr wrap="square" anchor="ctr" lIns="18288" rIns="18288" tIns="36576" bIns="36576">
+            <a:spAutoFit/>
+          </a:bodyPr>
+          <a:lstStyle/>
+          <a:p>
+            <a:pPr algn="l">
+              <a:spcAft>
+                <a:spcPts val="200"/>
+              </a:spcAft>
+            </a:pPr>
+            <a:r>
+              <a:rPr sz="1600" b="1">
+                <a:solidFill>
+                  <a:srgbClr val="0B1F3A"/>
+                </a:solidFill>
+                <a:latin typeface="Calibri"/>
+              </a:rPr>
+              <a:t>Ko‘krak qafasi</a:t>
+            </a:r>
+          </a:p>
+          <a:p>
+            <a:pPr algn="l">
+              <a:spcAft>
+                <a:spcPts val="200"/>
+              </a:spcAft>
+            </a:pPr>
+            <a:r>
+              <a:rPr sz="1400" b="0">
+                <a:solidFill>
+                  <a:srgbClr val="1F2937"/>
+                </a:solidFill>
+                <a:latin typeface="Calibri"/>
+              </a:rPr>
+              <a:t>Ko‘krak qafasidan boshlanadi</a:t>
+            </a:r>
+          </a:p>
+        </p:txBody>
+      </p:sp>
+      <p:sp>
+        <p:nvSpPr>
+          <p:cNvPr id="12" name="Rounded Rectangle 11"/>
           <p:cNvSpPr/>
           <p:nvPr/>
         </p:nvSpPr>
         <p:spPr>
           <a:xfrm>
-            <a:off x="8770467" y="2015337"/>
-            <a:ext cx="274320" cy="256032"/>
-          </a:xfrm>
-          <a:prstGeom prst="downArrow">
-            <a:avLst/>
+            <a:off x="8578443" y="1417320"/>
+            <a:ext cx="2973171" cy="1255776"/>
+          </a:xfrm>
+          <a:prstGeom prst="roundRect">
+            <a:avLst>
+              <a:gd name="adj" fmla="val 8000"/>
+            </a:avLst>
           </a:prstGeom>
           <a:solidFill>
-            <a:srgbClr val="C9A227"/>
+            <a:srgbClr val="FFFFFF"/>
           </a:solidFill>
-          <a:ln>
-            <a:noFill/>
+          <a:ln w="15875">
+            <a:solidFill>
+              <a:srgbClr val="E8EEF6"/>
+            </a:solidFill>
           </a:ln>
           <a:effectLst/>
         </p:spPr>
@@ -14686,112 +15953,16 @@
       </p:sp>
       <p:sp>
         <p:nvSpPr>
-          <p:cNvPr id="11" name="Rounded Rectangle 10"/>
+          <p:cNvPr id="13" name="Oval 12"/>
           <p:cNvSpPr/>
           <p:nvPr/>
         </p:nvSpPr>
         <p:spPr>
           <a:xfrm>
-            <a:off x="6263640" y="2289657"/>
-            <a:ext cx="5287975" cy="534009"/>
-          </a:xfrm>
-          <a:prstGeom prst="roundRect">
-            <a:avLst/>
-          </a:prstGeom>
-          <a:solidFill>
-            <a:srgbClr val="1F4E79"/>
-          </a:solidFill>
-          <a:ln>
-            <a:noFill/>
-          </a:ln>
-          <a:effectLst/>
-        </p:spPr>
-        <p:style>
-          <a:lnRef idx="1">
-            <a:schemeClr val="accent1"/>
-          </a:lnRef>
-          <a:fillRef idx="3">
-            <a:schemeClr val="accent1"/>
-          </a:fillRef>
-          <a:effectRef idx="2">
-            <a:schemeClr val="accent1"/>
-          </a:effectRef>
-          <a:fontRef idx="minor">
-            <a:schemeClr val="lt1"/>
-          </a:fontRef>
-        </p:style>
-        <p:txBody>
-          <a:bodyPr rtlCol="0" anchor="ctr" wrap="square"/>
-          <a:lstStyle/>
-          <a:p>
-            <a:pPr algn="ctr"/>
-            <a:r>
-              <a:rPr sz="1600" b="1">
-                <a:solidFill>
-                  <a:srgbClr val="FFFFFF"/>
-                </a:solidFill>
-              </a:rPr>
-              <a:t>To‘sh suyagi ajratiladi</a:t>
-            </a:r>
-          </a:p>
-        </p:txBody>
-      </p:sp>
-      <p:sp>
-        <p:nvSpPr>
-          <p:cNvPr id="12" name="Down Arrow 11"/>
-          <p:cNvSpPr/>
-          <p:nvPr/>
-        </p:nvSpPr>
-        <p:spPr>
-          <a:xfrm>
-            <a:off x="8770467" y="2841955"/>
-            <a:ext cx="274320" cy="256032"/>
-          </a:xfrm>
-          <a:prstGeom prst="downArrow">
-            <a:avLst/>
-          </a:prstGeom>
-          <a:solidFill>
-            <a:srgbClr val="C9A227"/>
-          </a:solidFill>
-          <a:ln>
-            <a:noFill/>
-          </a:ln>
-          <a:effectLst/>
-        </p:spPr>
-        <p:style>
-          <a:lnRef idx="1">
-            <a:schemeClr val="accent1"/>
-          </a:lnRef>
-          <a:fillRef idx="3">
-            <a:schemeClr val="accent1"/>
-          </a:fillRef>
-          <a:effectRef idx="2">
-            <a:schemeClr val="accent1"/>
-          </a:effectRef>
-          <a:fontRef idx="minor">
-            <a:schemeClr val="lt1"/>
-          </a:fontRef>
-        </p:style>
-        <p:txBody>
-          <a:bodyPr rtlCol="0" anchor="ctr"/>
-          <a:lstStyle/>
-          <a:p>
-            <a:pPr algn="ctr"/>
-          </a:p>
-        </p:txBody>
-      </p:sp>
-      <p:sp>
-        <p:nvSpPr>
-          <p:cNvPr id="13" name="Rounded Rectangle 12"/>
-          <p:cNvSpPr/>
-          <p:nvPr/>
-        </p:nvSpPr>
-        <p:spPr>
-          <a:xfrm>
-            <a:off x="6263640" y="3116275"/>
-            <a:ext cx="5287975" cy="534009"/>
-          </a:xfrm>
-          <a:prstGeom prst="roundRect">
+            <a:off x="8688171" y="1816608"/>
+            <a:ext cx="457200" cy="457200"/>
+          </a:xfrm>
+          <a:prstGeom prst="ellipse">
             <a:avLst/>
           </a:prstGeom>
           <a:solidFill>
@@ -14817,40 +15988,104 @@
           </a:fontRef>
         </p:style>
         <p:txBody>
-          <a:bodyPr rtlCol="0" anchor="ctr" wrap="square"/>
-          <a:lstStyle/>
-          <a:p>
-            <a:pPr algn="ctr"/>
+          <a:bodyPr rtlCol="0" anchor="ctr" wrap="square" lIns="0" rIns="0" tIns="36576" bIns="36576"/>
+          <a:lstStyle/>
+          <a:p>
+            <a:pPr algn="ctr">
+              <a:spcAft>
+                <a:spcPts val="200"/>
+              </a:spcAft>
+            </a:pPr>
             <a:r>
               <a:rPr sz="1600" b="1">
                 <a:solidFill>
                   <a:srgbClr val="FFFFFF"/>
                 </a:solidFill>
-              </a:rPr>
-              <a:t>Perikardga suv quyiladi</a:t>
-            </a:r>
-          </a:p>
-        </p:txBody>
-      </p:sp>
-      <p:sp>
-        <p:nvSpPr>
-          <p:cNvPr id="14" name="Down Arrow 13"/>
+                <a:latin typeface="Calibri"/>
+              </a:rPr>
+              <a:t>2</a:t>
+            </a:r>
+          </a:p>
+        </p:txBody>
+      </p:sp>
+      <p:sp>
+        <p:nvSpPr>
+          <p:cNvPr id="14" name="TextBox 13"/>
+          <p:cNvSpPr txBox="1"/>
+          <p:nvPr/>
+        </p:nvSpPr>
+        <p:spPr>
+          <a:xfrm>
+            <a:off x="9218523" y="1417320"/>
+            <a:ext cx="2259939" cy="1255776"/>
+          </a:xfrm>
+          <a:prstGeom prst="rect">
+            <a:avLst/>
+          </a:prstGeom>
+          <a:noFill/>
+        </p:spPr>
+        <p:txBody>
+          <a:bodyPr wrap="square" anchor="ctr" lIns="18288" rIns="18288" tIns="36576" bIns="36576">
+            <a:spAutoFit/>
+          </a:bodyPr>
+          <a:lstStyle/>
+          <a:p>
+            <a:pPr algn="l">
+              <a:spcAft>
+                <a:spcPts val="200"/>
+              </a:spcAft>
+            </a:pPr>
+            <a:r>
+              <a:rPr sz="1600" b="1">
+                <a:solidFill>
+                  <a:srgbClr val="0B1F3A"/>
+                </a:solidFill>
+                <a:latin typeface="Calibri"/>
+              </a:rPr>
+              <a:t>To‘sh suyagi</a:t>
+            </a:r>
+          </a:p>
+          <a:p>
+            <a:pPr algn="l">
+              <a:spcAft>
+                <a:spcPts val="200"/>
+              </a:spcAft>
+            </a:pPr>
+            <a:r>
+              <a:rPr sz="1400" b="0">
+                <a:solidFill>
+                  <a:srgbClr val="1F2937"/>
+                </a:solidFill>
+                <a:latin typeface="Calibri"/>
+              </a:rPr>
+              <a:t>To‘sh suyagi ajratiladi</a:t>
+            </a:r>
+          </a:p>
+        </p:txBody>
+      </p:sp>
+      <p:sp>
+        <p:nvSpPr>
+          <p:cNvPr id="15" name="Rounded Rectangle 14"/>
           <p:cNvSpPr/>
           <p:nvPr/>
         </p:nvSpPr>
         <p:spPr>
           <a:xfrm>
-            <a:off x="8770467" y="3668572"/>
-            <a:ext cx="274320" cy="256032"/>
-          </a:xfrm>
-          <a:prstGeom prst="downArrow">
-            <a:avLst/>
+            <a:off x="5440680" y="2801112"/>
+            <a:ext cx="2973171" cy="1255776"/>
+          </a:xfrm>
+          <a:prstGeom prst="roundRect">
+            <a:avLst>
+              <a:gd name="adj" fmla="val 8000"/>
+            </a:avLst>
           </a:prstGeom>
           <a:solidFill>
-            <a:srgbClr val="C9A227"/>
+            <a:srgbClr val="FFFFFF"/>
           </a:solidFill>
-          <a:ln>
-            <a:noFill/>
+          <a:ln w="15875">
+            <a:solidFill>
+              <a:srgbClr val="E8EEF6"/>
+            </a:solidFill>
           </a:ln>
           <a:effectLst/>
         </p:spPr>
@@ -14878,112 +16113,16 @@
       </p:sp>
       <p:sp>
         <p:nvSpPr>
-          <p:cNvPr id="15" name="Rounded Rectangle 14"/>
+          <p:cNvPr id="16" name="Oval 15"/>
           <p:cNvSpPr/>
           <p:nvPr/>
         </p:nvSpPr>
         <p:spPr>
           <a:xfrm>
-            <a:off x="6263640" y="3942892"/>
-            <a:ext cx="5287975" cy="534009"/>
-          </a:xfrm>
-          <a:prstGeom prst="roundRect">
-            <a:avLst/>
-          </a:prstGeom>
-          <a:solidFill>
-            <a:srgbClr val="1F4E79"/>
-          </a:solidFill>
-          <a:ln>
-            <a:noFill/>
-          </a:ln>
-          <a:effectLst/>
-        </p:spPr>
-        <p:style>
-          <a:lnRef idx="1">
-            <a:schemeClr val="accent1"/>
-          </a:lnRef>
-          <a:fillRef idx="3">
-            <a:schemeClr val="accent1"/>
-          </a:fillRef>
-          <a:effectRef idx="2">
-            <a:schemeClr val="accent1"/>
-          </a:effectRef>
-          <a:fontRef idx="minor">
-            <a:schemeClr val="lt1"/>
-          </a:fontRef>
-        </p:style>
-        <p:txBody>
-          <a:bodyPr rtlCol="0" anchor="ctr" wrap="square"/>
-          <a:lstStyle/>
-          <a:p>
-            <a:pPr algn="ctr"/>
-            <a:r>
-              <a:rPr sz="1600" b="1">
-                <a:solidFill>
-                  <a:srgbClr val="FFFFFF"/>
-                </a:solidFill>
-              </a:rPr>
-              <a:t>O‘ng qorincha devori teshiladi</a:t>
-            </a:r>
-          </a:p>
-        </p:txBody>
-      </p:sp>
-      <p:sp>
-        <p:nvSpPr>
-          <p:cNvPr id="16" name="Down Arrow 15"/>
-          <p:cNvSpPr/>
-          <p:nvPr/>
-        </p:nvSpPr>
-        <p:spPr>
-          <a:xfrm>
-            <a:off x="8770467" y="4495190"/>
-            <a:ext cx="274320" cy="256032"/>
-          </a:xfrm>
-          <a:prstGeom prst="downArrow">
-            <a:avLst/>
-          </a:prstGeom>
-          <a:solidFill>
-            <a:srgbClr val="C9A227"/>
-          </a:solidFill>
-          <a:ln>
-            <a:noFill/>
-          </a:ln>
-          <a:effectLst/>
-        </p:spPr>
-        <p:style>
-          <a:lnRef idx="1">
-            <a:schemeClr val="accent1"/>
-          </a:lnRef>
-          <a:fillRef idx="3">
-            <a:schemeClr val="accent1"/>
-          </a:fillRef>
-          <a:effectRef idx="2">
-            <a:schemeClr val="accent1"/>
-          </a:effectRef>
-          <a:fontRef idx="minor">
-            <a:schemeClr val="lt1"/>
-          </a:fontRef>
-        </p:style>
-        <p:txBody>
-          <a:bodyPr rtlCol="0" anchor="ctr"/>
-          <a:lstStyle/>
-          <a:p>
-            <a:pPr algn="ctr"/>
-          </a:p>
-        </p:txBody>
-      </p:sp>
-      <p:sp>
-        <p:nvSpPr>
-          <p:cNvPr id="17" name="Rounded Rectangle 16"/>
-          <p:cNvSpPr/>
-          <p:nvPr/>
-        </p:nvSpPr>
-        <p:spPr>
-          <a:xfrm>
-            <a:off x="6263640" y="4769510"/>
-            <a:ext cx="5287975" cy="534009"/>
-          </a:xfrm>
-          <a:prstGeom prst="roundRect">
+            <a:off x="5550408" y="3200400"/>
+            <a:ext cx="457200" cy="457200"/>
+          </a:xfrm>
+          <a:prstGeom prst="ellipse">
             <a:avLst/>
           </a:prstGeom>
           <a:solidFill>
@@ -15009,31 +16148,411 @@
           </a:fontRef>
         </p:style>
         <p:txBody>
-          <a:bodyPr rtlCol="0" anchor="ctr" wrap="square"/>
+          <a:bodyPr rtlCol="0" anchor="ctr" wrap="square" lIns="0" rIns="0" tIns="36576" bIns="36576"/>
+          <a:lstStyle/>
+          <a:p>
+            <a:pPr algn="ctr">
+              <a:spcAft>
+                <a:spcPts val="200"/>
+              </a:spcAft>
+            </a:pPr>
+            <a:r>
+              <a:rPr sz="1600" b="1">
+                <a:solidFill>
+                  <a:srgbClr val="FFFFFF"/>
+                </a:solidFill>
+                <a:latin typeface="Calibri"/>
+              </a:rPr>
+              <a:t>3</a:t>
+            </a:r>
+          </a:p>
+        </p:txBody>
+      </p:sp>
+      <p:sp>
+        <p:nvSpPr>
+          <p:cNvPr id="17" name="TextBox 16"/>
+          <p:cNvSpPr txBox="1"/>
+          <p:nvPr/>
+        </p:nvSpPr>
+        <p:spPr>
+          <a:xfrm>
+            <a:off x="6080760" y="2801112"/>
+            <a:ext cx="2259939" cy="1255776"/>
+          </a:xfrm>
+          <a:prstGeom prst="rect">
+            <a:avLst/>
+          </a:prstGeom>
+          <a:noFill/>
+        </p:spPr>
+        <p:txBody>
+          <a:bodyPr wrap="square" anchor="ctr" lIns="18288" rIns="18288" tIns="36576" bIns="36576">
+            <a:spAutoFit/>
+          </a:bodyPr>
+          <a:lstStyle/>
+          <a:p>
+            <a:pPr algn="l">
+              <a:spcAft>
+                <a:spcPts val="200"/>
+              </a:spcAft>
+            </a:pPr>
+            <a:r>
+              <a:rPr sz="1600" b="1">
+                <a:solidFill>
+                  <a:srgbClr val="0B1F3A"/>
+                </a:solidFill>
+                <a:latin typeface="Calibri"/>
+              </a:rPr>
+              <a:t>Perikard</a:t>
+            </a:r>
+          </a:p>
+          <a:p>
+            <a:pPr algn="l">
+              <a:spcAft>
+                <a:spcPts val="200"/>
+              </a:spcAft>
+            </a:pPr>
+            <a:r>
+              <a:rPr sz="1400" b="0">
+                <a:solidFill>
+                  <a:srgbClr val="1F2937"/>
+                </a:solidFill>
+                <a:latin typeface="Calibri"/>
+              </a:rPr>
+              <a:t>Perikardga suv quyiladi</a:t>
+            </a:r>
+          </a:p>
+        </p:txBody>
+      </p:sp>
+      <p:sp>
+        <p:nvSpPr>
+          <p:cNvPr id="18" name="Rounded Rectangle 17"/>
+          <p:cNvSpPr/>
+          <p:nvPr/>
+        </p:nvSpPr>
+        <p:spPr>
+          <a:xfrm>
+            <a:off x="8578443" y="2801112"/>
+            <a:ext cx="2973171" cy="1255776"/>
+          </a:xfrm>
+          <a:prstGeom prst="roundRect">
+            <a:avLst>
+              <a:gd name="adj" fmla="val 8000"/>
+            </a:avLst>
+          </a:prstGeom>
+          <a:solidFill>
+            <a:srgbClr val="FFFFFF"/>
+          </a:solidFill>
+          <a:ln w="15875">
+            <a:solidFill>
+              <a:srgbClr val="E8EEF6"/>
+            </a:solidFill>
+          </a:ln>
+          <a:effectLst/>
+        </p:spPr>
+        <p:style>
+          <a:lnRef idx="1">
+            <a:schemeClr val="accent1"/>
+          </a:lnRef>
+          <a:fillRef idx="3">
+            <a:schemeClr val="accent1"/>
+          </a:fillRef>
+          <a:effectRef idx="2">
+            <a:schemeClr val="accent1"/>
+          </a:effectRef>
+          <a:fontRef idx="minor">
+            <a:schemeClr val="lt1"/>
+          </a:fontRef>
+        </p:style>
+        <p:txBody>
+          <a:bodyPr rtlCol="0" anchor="ctr"/>
           <a:lstStyle/>
           <a:p>
             <a:pPr algn="ctr"/>
+          </a:p>
+        </p:txBody>
+      </p:sp>
+      <p:sp>
+        <p:nvSpPr>
+          <p:cNvPr id="19" name="Oval 18"/>
+          <p:cNvSpPr/>
+          <p:nvPr/>
+        </p:nvSpPr>
+        <p:spPr>
+          <a:xfrm>
+            <a:off x="8688171" y="3200400"/>
+            <a:ext cx="457200" cy="457200"/>
+          </a:xfrm>
+          <a:prstGeom prst="ellipse">
+            <a:avLst/>
+          </a:prstGeom>
+          <a:solidFill>
+            <a:srgbClr val="0B1F3A"/>
+          </a:solidFill>
+          <a:ln>
+            <a:noFill/>
+          </a:ln>
+          <a:effectLst/>
+        </p:spPr>
+        <p:style>
+          <a:lnRef idx="1">
+            <a:schemeClr val="accent1"/>
+          </a:lnRef>
+          <a:fillRef idx="3">
+            <a:schemeClr val="accent1"/>
+          </a:fillRef>
+          <a:effectRef idx="2">
+            <a:schemeClr val="accent1"/>
+          </a:effectRef>
+          <a:fontRef idx="minor">
+            <a:schemeClr val="lt1"/>
+          </a:fontRef>
+        </p:style>
+        <p:txBody>
+          <a:bodyPr rtlCol="0" anchor="ctr" wrap="square" lIns="0" rIns="0" tIns="36576" bIns="36576"/>
+          <a:lstStyle/>
+          <a:p>
+            <a:pPr algn="ctr">
+              <a:spcAft>
+                <a:spcPts val="200"/>
+              </a:spcAft>
+            </a:pPr>
             <a:r>
               <a:rPr sz="1600" b="1">
                 <a:solidFill>
                   <a:srgbClr val="FFFFFF"/>
                 </a:solidFill>
-              </a:rPr>
-              <a:t>Suvdan pufakchalar = musbat</a:t>
-            </a:r>
-          </a:p>
-        </p:txBody>
-      </p:sp>
-      <p:sp>
-        <p:nvSpPr>
-          <p:cNvPr id="18" name="TextBox 17"/>
+                <a:latin typeface="Calibri"/>
+              </a:rPr>
+              <a:t>4</a:t>
+            </a:r>
+          </a:p>
+        </p:txBody>
+      </p:sp>
+      <p:sp>
+        <p:nvSpPr>
+          <p:cNvPr id="20" name="TextBox 19"/>
           <p:cNvSpPr txBox="1"/>
           <p:nvPr/>
         </p:nvSpPr>
         <p:spPr>
           <a:xfrm>
-            <a:off x="6263640" y="5349240"/>
-            <a:ext cx="5287975" cy="365760"/>
+            <a:off x="9218523" y="2801112"/>
+            <a:ext cx="2259939" cy="1255776"/>
+          </a:xfrm>
+          <a:prstGeom prst="rect">
+            <a:avLst/>
+          </a:prstGeom>
+          <a:noFill/>
+        </p:spPr>
+        <p:txBody>
+          <a:bodyPr wrap="square" anchor="ctr" lIns="18288" rIns="18288" tIns="36576" bIns="36576">
+            <a:spAutoFit/>
+          </a:bodyPr>
+          <a:lstStyle/>
+          <a:p>
+            <a:pPr algn="l">
+              <a:spcAft>
+                <a:spcPts val="200"/>
+              </a:spcAft>
+            </a:pPr>
+            <a:r>
+              <a:rPr sz="1600" b="1">
+                <a:solidFill>
+                  <a:srgbClr val="0B1F3A"/>
+                </a:solidFill>
+                <a:latin typeface="Calibri"/>
+              </a:rPr>
+              <a:t>O‘ng qorincha</a:t>
+            </a:r>
+          </a:p>
+          <a:p>
+            <a:pPr algn="l">
+              <a:spcAft>
+                <a:spcPts val="200"/>
+              </a:spcAft>
+            </a:pPr>
+            <a:r>
+              <a:rPr sz="1400" b="0">
+                <a:solidFill>
+                  <a:srgbClr val="1F2937"/>
+                </a:solidFill>
+                <a:latin typeface="Calibri"/>
+              </a:rPr>
+              <a:t>Devori teshiladi</a:t>
+            </a:r>
+          </a:p>
+        </p:txBody>
+      </p:sp>
+      <p:sp>
+        <p:nvSpPr>
+          <p:cNvPr id="21" name="Rounded Rectangle 20"/>
+          <p:cNvSpPr/>
+          <p:nvPr/>
+        </p:nvSpPr>
+        <p:spPr>
+          <a:xfrm>
+            <a:off x="5440680" y="4184904"/>
+            <a:ext cx="2973171" cy="1255776"/>
+          </a:xfrm>
+          <a:prstGeom prst="roundRect">
+            <a:avLst>
+              <a:gd name="adj" fmla="val 8000"/>
+            </a:avLst>
+          </a:prstGeom>
+          <a:solidFill>
+            <a:srgbClr val="FFFFFF"/>
+          </a:solidFill>
+          <a:ln w="15875">
+            <a:solidFill>
+              <a:srgbClr val="E8EEF6"/>
+            </a:solidFill>
+          </a:ln>
+          <a:effectLst/>
+        </p:spPr>
+        <p:style>
+          <a:lnRef idx="1">
+            <a:schemeClr val="accent1"/>
+          </a:lnRef>
+          <a:fillRef idx="3">
+            <a:schemeClr val="accent1"/>
+          </a:fillRef>
+          <a:effectRef idx="2">
+            <a:schemeClr val="accent1"/>
+          </a:effectRef>
+          <a:fontRef idx="minor">
+            <a:schemeClr val="lt1"/>
+          </a:fontRef>
+        </p:style>
+        <p:txBody>
+          <a:bodyPr rtlCol="0" anchor="ctr"/>
+          <a:lstStyle/>
+          <a:p>
+            <a:pPr algn="ctr"/>
+          </a:p>
+        </p:txBody>
+      </p:sp>
+      <p:sp>
+        <p:nvSpPr>
+          <p:cNvPr id="22" name="Oval 21"/>
+          <p:cNvSpPr/>
+          <p:nvPr/>
+        </p:nvSpPr>
+        <p:spPr>
+          <a:xfrm>
+            <a:off x="5550408" y="4584192"/>
+            <a:ext cx="457200" cy="457200"/>
+          </a:xfrm>
+          <a:prstGeom prst="ellipse">
+            <a:avLst/>
+          </a:prstGeom>
+          <a:solidFill>
+            <a:srgbClr val="0B1F3A"/>
+          </a:solidFill>
+          <a:ln>
+            <a:noFill/>
+          </a:ln>
+          <a:effectLst/>
+        </p:spPr>
+        <p:style>
+          <a:lnRef idx="1">
+            <a:schemeClr val="accent1"/>
+          </a:lnRef>
+          <a:fillRef idx="3">
+            <a:schemeClr val="accent1"/>
+          </a:fillRef>
+          <a:effectRef idx="2">
+            <a:schemeClr val="accent1"/>
+          </a:effectRef>
+          <a:fontRef idx="minor">
+            <a:schemeClr val="lt1"/>
+          </a:fontRef>
+        </p:style>
+        <p:txBody>
+          <a:bodyPr rtlCol="0" anchor="ctr" wrap="square" lIns="0" rIns="0" tIns="36576" bIns="36576"/>
+          <a:lstStyle/>
+          <a:p>
+            <a:pPr algn="ctr">
+              <a:spcAft>
+                <a:spcPts val="200"/>
+              </a:spcAft>
+            </a:pPr>
+            <a:r>
+              <a:rPr sz="1600" b="1">
+                <a:solidFill>
+                  <a:srgbClr val="FFFFFF"/>
+                </a:solidFill>
+                <a:latin typeface="Calibri"/>
+              </a:rPr>
+              <a:t>5</a:t>
+            </a:r>
+          </a:p>
+        </p:txBody>
+      </p:sp>
+      <p:sp>
+        <p:nvSpPr>
+          <p:cNvPr id="23" name="TextBox 22"/>
+          <p:cNvSpPr txBox="1"/>
+          <p:nvPr/>
+        </p:nvSpPr>
+        <p:spPr>
+          <a:xfrm>
+            <a:off x="6080760" y="4184904"/>
+            <a:ext cx="2259939" cy="1255776"/>
+          </a:xfrm>
+          <a:prstGeom prst="rect">
+            <a:avLst/>
+          </a:prstGeom>
+          <a:noFill/>
+        </p:spPr>
+        <p:txBody>
+          <a:bodyPr wrap="square" anchor="ctr" lIns="18288" rIns="18288" tIns="36576" bIns="36576">
+            <a:spAutoFit/>
+          </a:bodyPr>
+          <a:lstStyle/>
+          <a:p>
+            <a:pPr algn="l">
+              <a:spcAft>
+                <a:spcPts val="200"/>
+              </a:spcAft>
+            </a:pPr>
+            <a:r>
+              <a:rPr sz="1600" b="1">
+                <a:solidFill>
+                  <a:srgbClr val="0B1F3A"/>
+                </a:solidFill>
+                <a:latin typeface="Calibri"/>
+              </a:rPr>
+              <a:t>Natija</a:t>
+            </a:r>
+          </a:p>
+          <a:p>
+            <a:pPr algn="l">
+              <a:spcAft>
+                <a:spcPts val="200"/>
+              </a:spcAft>
+            </a:pPr>
+            <a:r>
+              <a:rPr sz="1400" b="0">
+                <a:solidFill>
+                  <a:srgbClr val="1F2937"/>
+                </a:solidFill>
+                <a:latin typeface="Calibri"/>
+              </a:rPr>
+              <a:t>Suvdan pufakchalar — musbat</a:t>
+            </a:r>
+          </a:p>
+        </p:txBody>
+      </p:sp>
+      <p:sp>
+        <p:nvSpPr>
+          <p:cNvPr id="24" name="TextBox 23"/>
+          <p:cNvSpPr txBox="1"/>
+          <p:nvPr/>
+        </p:nvSpPr>
+        <p:spPr>
+          <a:xfrm>
+            <a:off x="5440680" y="5486400"/>
+            <a:ext cx="6110935" cy="365760"/>
           </a:xfrm>
           <a:prstGeom prst="rect">
             <a:avLst/>
@@ -15047,7 +16566,7 @@
           <a:lstStyle/>
           <a:p>
             <a:r>
-              <a:rPr sz="1100" b="0">
+              <a:rPr sz="1200" b="0">
                 <a:solidFill>
                   <a:srgbClr val="6B7280"/>
                 </a:solidFill>
@@ -15060,7 +16579,7 @@
       </p:sp>
       <p:sp>
         <p:nvSpPr>
-          <p:cNvPr id="19" name="TextBox 18"/>
+          <p:cNvPr id="25" name="TextBox 24"/>
           <p:cNvSpPr txBox="1"/>
           <p:nvPr/>
         </p:nvSpPr>
@@ -15427,7 +16946,23 @@
                 </a:solidFill>
                 <a:latin typeface="Calibri"/>
               </a:rPr>
-              <a:t>▸  Aspiratsion asfiksiya: halqum, nafas yo‘llari shikastlanganda yoki kalla asosi, burun suyaklari singanda qon nafas yo‘llariga tushadi. Murdada nafas yo‘llarida qon topiladi.</a:t>
+              <a:t>▸  Aspiratsion asfiksiya: halqum, nafas yo‘llari shikastlanganda yoki kalla asosi, burun suyaklari singanda qon nafas yo‘llariga tushadi.</a:t>
+            </a:r>
+          </a:p>
+          <a:p>
+            <a:pPr>
+              <a:spcAft>
+                <a:spcPts val="1200"/>
+              </a:spcAft>
+            </a:pPr>
+            <a:r>
+              <a:rPr sz="2200">
+                <a:solidFill>
+                  <a:srgbClr val="1F2937"/>
+                </a:solidFill>
+                <a:latin typeface="Calibri"/>
+              </a:rPr>
+              <a:t>▸  Murdada nafas yo‘llarida qon topiladi.</a:t>
             </a:r>
           </a:p>
         </p:txBody>
@@ -15801,7 +17336,23 @@
                 </a:solidFill>
                 <a:latin typeface="Calibri"/>
               </a:rPr>
-              <a:t>▸  Murdada miya va yurak mushagida kamqonlik, taloq esa qonga to‘yingan; chap qorincha endokardi ostida Minakov dog‘lari bor. Savol: bu qaysi sabab, ko‘p qon yo‘qotishdan farqi nima?</a:t>
+              <a:t>▸  Murdada miya va yurak mushagida kamqonlik, taloq esa qonga to‘yingan; chap qorincha endokardi ostida Minakov dog‘lari bor.</a:t>
+            </a:r>
+          </a:p>
+          <a:p>
+            <a:pPr>
+              <a:spcAft>
+                <a:spcPts val="1200"/>
+              </a:spcAft>
+            </a:pPr>
+            <a:r>
+              <a:rPr sz="2000">
+                <a:solidFill>
+                  <a:srgbClr val="1F2937"/>
+                </a:solidFill>
+                <a:latin typeface="Calibri"/>
+              </a:rPr>
+              <a:t>▸  Savol: bu qaysi sabab? Minakov dog‘lari ko‘p qon yo‘qotishda faqat ayrim hollarda topiladi.</a:t>
             </a:r>
           </a:p>
         </p:txBody>
@@ -16476,7 +18027,7 @@
         <p:spPr>
           <a:xfrm>
             <a:off x="640080" y="1417320"/>
-            <a:ext cx="5394960" cy="4480560"/>
+            <a:ext cx="4572000" cy="4480560"/>
           </a:xfrm>
           <a:prstGeom prst="rect">
             <a:avLst/>
@@ -16538,303 +18089,366 @@
           </a:p>
         </p:txBody>
       </p:sp>
-      <p:graphicFrame>
-        <p:nvGraphicFramePr>
-          <p:cNvPr id="9" name="Table 8"/>
-          <p:cNvGraphicFramePr>
-            <a:graphicFrameLocks noGrp="1"/>
-          </p:cNvGraphicFramePr>
-          <p:nvPr/>
-        </p:nvGraphicFramePr>
-        <p:xfrm>
-          <a:off x="6263640" y="1463040"/>
-          <a:ext cx="5287974" cy="3072384"/>
-        </p:xfrm>
-        <a:graphic>
-          <a:graphicData uri="http://schemas.openxmlformats.org/drawingml/2006/table">
-            <a:tbl>
-              <a:tblPr firstRow="1" bandRow="1">
-                <a:tableStyleId>{5C22544A-7EE6-4342-B048-85BDC9FD1C3A}</a:tableStyleId>
-              </a:tblPr>
-              <a:tblGrid>
-                <a:gridCol w="1101090"/>
-                <a:gridCol w="1952011"/>
-                <a:gridCol w="2234873"/>
-              </a:tblGrid>
-              <a:tr h="768096">
-                <a:tc>
-                  <a:txBody>
-                    <a:bodyPr/>
-                    <a:lstStyle/>
-                    <a:p>
-                      <a:r>
-                        <a:rPr sz="1600" b="1">
-                          <a:solidFill>
-                            <a:srgbClr val="FFFFFF"/>
-                          </a:solidFill>
-                        </a:rPr>
-                        <a:t>Belgi</a:t>
-                      </a:r>
-                    </a:p>
-                  </a:txBody>
-                  <a:tcPr marL="73152" marR="73152" marT="36576" marB="36576">
-                    <a:solidFill>
-                      <a:srgbClr val="0B1F3A"/>
-                    </a:solidFill>
-                  </a:tcPr>
-                </a:tc>
-                <a:tc>
-                  <a:txBody>
-                    <a:bodyPr/>
-                    <a:lstStyle/>
-                    <a:p>
-                      <a:r>
-                        <a:rPr sz="1600" b="1">
-                          <a:solidFill>
-                            <a:srgbClr val="FFFFFF"/>
-                          </a:solidFill>
-                        </a:rPr>
-                        <a:t>Impression</a:t>
-                      </a:r>
-                    </a:p>
-                  </a:txBody>
-                  <a:tcPr marL="73152" marR="73152" marT="36576" marB="36576">
-                    <a:solidFill>
-                      <a:srgbClr val="0B1F3A"/>
-                    </a:solidFill>
-                  </a:tcPr>
-                </a:tc>
-                <a:tc>
-                  <a:txBody>
-                    <a:bodyPr/>
-                    <a:lstStyle/>
-                    <a:p>
-                      <a:r>
-                        <a:rPr sz="1600" b="1">
-                          <a:solidFill>
-                            <a:srgbClr val="FFFFFF"/>
-                          </a:solidFill>
-                        </a:rPr>
-                        <a:t>Inersion</a:t>
-                      </a:r>
-                    </a:p>
-                  </a:txBody>
-                  <a:tcPr marL="73152" marR="73152" marT="36576" marB="36576">
-                    <a:solidFill>
-                      <a:srgbClr val="0B1F3A"/>
-                    </a:solidFill>
-                  </a:tcPr>
-                </a:tc>
-              </a:tr>
-              <a:tr h="768096">
-                <a:tc>
-                  <a:txBody>
-                    <a:bodyPr/>
-                    <a:lstStyle/>
-                    <a:p>
-                      <a:r>
-                        <a:rPr sz="1500" b="0">
-                          <a:solidFill>
-                            <a:srgbClr val="1F2937"/>
-                          </a:solidFill>
-                        </a:rPr>
-                        <a:t>Massa va kuch</a:t>
-                      </a:r>
-                    </a:p>
-                  </a:txBody>
-                  <a:tcPr marL="73152" marR="73152" marT="36576" marB="36576">
-                    <a:solidFill>
-                      <a:srgbClr val="E8EEF6"/>
-                    </a:solidFill>
-                  </a:tcPr>
-                </a:tc>
-                <a:tc>
-                  <a:txBody>
-                    <a:bodyPr/>
-                    <a:lstStyle/>
-                    <a:p>
-                      <a:r>
-                        <a:rPr sz="1500" b="0">
-                          <a:solidFill>
-                            <a:srgbClr val="1F2937"/>
-                          </a:solidFill>
-                        </a:rPr>
-                        <a:t>Jism massasi soha massasidan kichik</a:t>
-                      </a:r>
-                    </a:p>
-                  </a:txBody>
-                  <a:tcPr marL="73152" marR="73152" marT="36576" marB="36576">
-                    <a:solidFill>
-                      <a:srgbClr val="E8EEF6"/>
-                    </a:solidFill>
-                  </a:tcPr>
-                </a:tc>
-                <a:tc>
-                  <a:txBody>
-                    <a:bodyPr/>
-                    <a:lstStyle/>
-                    <a:p>
-                      <a:r>
-                        <a:rPr sz="1500" b="0">
-                          <a:solidFill>
-                            <a:srgbClr val="1F2937"/>
-                          </a:solidFill>
-                        </a:rPr>
-                        <a:t>Kuch soha (ba’zan tana) massasidan katta</a:t>
-                      </a:r>
-                    </a:p>
-                  </a:txBody>
-                  <a:tcPr marL="73152" marR="73152" marT="36576" marB="36576">
-                    <a:solidFill>
-                      <a:srgbClr val="E8EEF6"/>
-                    </a:solidFill>
-                  </a:tcPr>
-                </a:tc>
-              </a:tr>
-              <a:tr h="768096">
-                <a:tc>
-                  <a:txBody>
-                    <a:bodyPr/>
-                    <a:lstStyle/>
-                    <a:p>
-                      <a:r>
-                        <a:rPr sz="1500" b="0">
-                          <a:solidFill>
-                            <a:srgbClr val="1F2937"/>
-                          </a:solidFill>
-                        </a:rPr>
-                        <a:t>Jarohat joyi</a:t>
-                      </a:r>
-                    </a:p>
-                  </a:txBody>
-                  <a:tcPr marL="73152" marR="73152" marT="36576" marB="36576">
-                    <a:solidFill>
-                      <a:srgbClr val="FFFFFF"/>
-                    </a:solidFill>
-                  </a:tcPr>
-                </a:tc>
-                <a:tc>
-                  <a:txBody>
-                    <a:bodyPr/>
-                    <a:lstStyle/>
-                    <a:p>
-                      <a:r>
-                        <a:rPr sz="1500" b="0">
-                          <a:solidFill>
-                            <a:srgbClr val="1F2937"/>
-                          </a:solidFill>
-                        </a:rPr>
-                        <a:t>Faqat ta’sir sohasida</a:t>
-                      </a:r>
-                    </a:p>
-                  </a:txBody>
-                  <a:tcPr marL="73152" marR="73152" marT="36576" marB="36576">
-                    <a:solidFill>
-                      <a:srgbClr val="FFFFFF"/>
-                    </a:solidFill>
-                  </a:tcPr>
-                </a:tc>
-                <a:tc>
-                  <a:txBody>
-                    <a:bodyPr/>
-                    <a:lstStyle/>
-                    <a:p>
-                      <a:r>
-                        <a:rPr sz="1500" b="0">
-                          <a:solidFill>
-                            <a:srgbClr val="1F2937"/>
-                          </a:solidFill>
-                        </a:rPr>
-                        <a:t>Bilvosita jarohatlar ham bo‘ladi</a:t>
-                      </a:r>
-                    </a:p>
-                  </a:txBody>
-                  <a:tcPr marL="73152" marR="73152" marT="36576" marB="36576">
-                    <a:solidFill>
-                      <a:srgbClr val="FFFFFF"/>
-                    </a:solidFill>
-                  </a:tcPr>
-                </a:tc>
-              </a:tr>
-              <a:tr h="768096">
-                <a:tc>
-                  <a:txBody>
-                    <a:bodyPr/>
-                    <a:lstStyle/>
-                    <a:p>
-                      <a:r>
-                        <a:rPr sz="1500" b="0">
-                          <a:solidFill>
-                            <a:srgbClr val="1F2937"/>
-                          </a:solidFill>
-                        </a:rPr>
-                        <a:t>Xos belgi</a:t>
-                      </a:r>
-                    </a:p>
-                  </a:txBody>
-                  <a:tcPr marL="73152" marR="73152" marT="36576" marB="36576">
-                    <a:solidFill>
-                      <a:srgbClr val="E8EEF6"/>
-                    </a:solidFill>
-                  </a:tcPr>
-                </a:tc>
-                <a:tc>
-                  <a:txBody>
-                    <a:bodyPr/>
-                    <a:lstStyle/>
-                    <a:p>
-                      <a:r>
-                        <a:rPr sz="1500" b="0">
-                          <a:solidFill>
-                            <a:srgbClr val="1F2937"/>
-                          </a:solidFill>
-                        </a:rPr>
-                        <a:t>Ta’sir sohasi bilan cheklanadi</a:t>
-                      </a:r>
-                    </a:p>
-                  </a:txBody>
-                  <a:tcPr marL="73152" marR="73152" marT="36576" marB="36576">
-                    <a:solidFill>
-                      <a:srgbClr val="E8EEF6"/>
-                    </a:solidFill>
-                  </a:tcPr>
-                </a:tc>
-                <a:tc>
-                  <a:txBody>
-                    <a:bodyPr/>
-                    <a:lstStyle/>
-                    <a:p>
-                      <a:r>
-                        <a:rPr sz="1500" b="0">
-                          <a:solidFill>
-                            <a:srgbClr val="1F2937"/>
-                          </a:solidFill>
-                        </a:rPr>
-                        <a:t>Tana chayqalishi, aks zarb</a:t>
-                      </a:r>
-                    </a:p>
-                  </a:txBody>
-                  <a:tcPr marL="73152" marR="73152" marT="36576" marB="36576">
-                    <a:solidFill>
-                      <a:srgbClr val="E8EEF6"/>
-                    </a:solidFill>
-                  </a:tcPr>
-                </a:tc>
-              </a:tr>
-            </a:tbl>
-          </a:graphicData>
-        </a:graphic>
-      </p:graphicFrame>
-      <p:sp>
-        <p:nvSpPr>
-          <p:cNvPr id="10" name="TextBox 9"/>
+      <p:sp>
+        <p:nvSpPr>
+          <p:cNvPr id="9" name="Rounded Rectangle 8"/>
+          <p:cNvSpPr/>
+          <p:nvPr/>
+        </p:nvSpPr>
+        <p:spPr>
+          <a:xfrm>
+            <a:off x="5440680" y="1417320"/>
+            <a:ext cx="2986887" cy="548640"/>
+          </a:xfrm>
+          <a:prstGeom prst="roundRect">
+            <a:avLst/>
+          </a:prstGeom>
+          <a:solidFill>
+            <a:srgbClr val="0B1F3A"/>
+          </a:solidFill>
+          <a:ln>
+            <a:noFill/>
+          </a:ln>
+          <a:effectLst/>
+        </p:spPr>
+        <p:style>
+          <a:lnRef idx="1">
+            <a:schemeClr val="accent1"/>
+          </a:lnRef>
+          <a:fillRef idx="3">
+            <a:schemeClr val="accent1"/>
+          </a:fillRef>
+          <a:effectRef idx="2">
+            <a:schemeClr val="accent1"/>
+          </a:effectRef>
+          <a:fontRef idx="minor">
+            <a:schemeClr val="lt1"/>
+          </a:fontRef>
+        </p:style>
+        <p:txBody>
+          <a:bodyPr rtlCol="0" anchor="ctr" wrap="square" tIns="36576" bIns="36576"/>
+          <a:lstStyle/>
+          <a:p>
+            <a:pPr algn="ctr">
+              <a:spcAft>
+                <a:spcPts val="200"/>
+              </a:spcAft>
+            </a:pPr>
+            <a:r>
+              <a:rPr sz="1600" b="1">
+                <a:solidFill>
+                  <a:srgbClr val="FFFFFF"/>
+                </a:solidFill>
+                <a:latin typeface="Calibri"/>
+              </a:rPr>
+              <a:t>Impression</a:t>
+            </a:r>
+          </a:p>
+        </p:txBody>
+      </p:sp>
+      <p:sp>
+        <p:nvSpPr>
+          <p:cNvPr id="10" name="Rectangle 9"/>
+          <p:cNvSpPr/>
+          <p:nvPr/>
+        </p:nvSpPr>
+        <p:spPr>
+          <a:xfrm>
+            <a:off x="5440680" y="2020824"/>
+            <a:ext cx="2986887" cy="3419856"/>
+          </a:xfrm>
+          <a:prstGeom prst="rect">
+            <a:avLst/>
+          </a:prstGeom>
+          <a:solidFill>
+            <a:srgbClr val="E8EEF6"/>
+          </a:solidFill>
+          <a:ln w="15875">
+            <a:solidFill>
+              <a:srgbClr val="E8EEF6"/>
+            </a:solidFill>
+          </a:ln>
+          <a:effectLst/>
+        </p:spPr>
+        <p:style>
+          <a:lnRef idx="1">
+            <a:schemeClr val="accent1"/>
+          </a:lnRef>
+          <a:fillRef idx="3">
+            <a:schemeClr val="accent1"/>
+          </a:fillRef>
+          <a:effectRef idx="2">
+            <a:schemeClr val="accent1"/>
+          </a:effectRef>
+          <a:fontRef idx="minor">
+            <a:schemeClr val="lt1"/>
+          </a:fontRef>
+        </p:style>
+        <p:txBody>
+          <a:bodyPr rtlCol="0" anchor="t" wrap="square" tIns="36576" bIns="36576"/>
+          <a:lstStyle/>
+          <a:p>
+            <a:pPr algn="l">
+              <a:spcAft>
+                <a:spcPts val="700"/>
+              </a:spcAft>
+            </a:pPr>
+            <a:r>
+              <a:rPr sz="1500" b="1">
+                <a:solidFill>
+                  <a:srgbClr val="C9A227"/>
+                </a:solidFill>
+                <a:latin typeface="Calibri"/>
+              </a:rPr>
+              <a:t>●  </a:t>
+            </a:r>
+            <a:r>
+              <a:rPr sz="1500" b="0">
+                <a:solidFill>
+                  <a:srgbClr val="1F2937"/>
+                </a:solidFill>
+                <a:latin typeface="Calibri"/>
+              </a:rPr>
+              <a:t>Jism massasi soha massasidan kichik</a:t>
+            </a:r>
+          </a:p>
+          <a:p>
+            <a:pPr algn="l">
+              <a:spcAft>
+                <a:spcPts val="700"/>
+              </a:spcAft>
+            </a:pPr>
+            <a:r>
+              <a:rPr sz="1500" b="1">
+                <a:solidFill>
+                  <a:srgbClr val="C9A227"/>
+                </a:solidFill>
+                <a:latin typeface="Calibri"/>
+              </a:rPr>
+              <a:t>●  </a:t>
+            </a:r>
+            <a:r>
+              <a:rPr sz="1500" b="0">
+                <a:solidFill>
+                  <a:srgbClr val="1F2937"/>
+                </a:solidFill>
+                <a:latin typeface="Calibri"/>
+              </a:rPr>
+              <a:t>Faqat ta’sir sohasida jarohat</a:t>
+            </a:r>
+          </a:p>
+          <a:p>
+            <a:pPr algn="l">
+              <a:spcAft>
+                <a:spcPts val="700"/>
+              </a:spcAft>
+            </a:pPr>
+            <a:r>
+              <a:rPr sz="1500" b="1">
+                <a:solidFill>
+                  <a:srgbClr val="C9A227"/>
+                </a:solidFill>
+                <a:latin typeface="Calibri"/>
+              </a:rPr>
+              <a:t>●  </a:t>
+            </a:r>
+            <a:r>
+              <a:rPr sz="1500" b="0">
+                <a:solidFill>
+                  <a:srgbClr val="1F2937"/>
+                </a:solidFill>
+                <a:latin typeface="Calibri"/>
+              </a:rPr>
+              <a:t>Ta’sir sohasi bilan cheklanadi</a:t>
+            </a:r>
+          </a:p>
+        </p:txBody>
+      </p:sp>
+      <p:sp>
+        <p:nvSpPr>
+          <p:cNvPr id="11" name="Rounded Rectangle 10"/>
+          <p:cNvSpPr/>
+          <p:nvPr/>
+        </p:nvSpPr>
+        <p:spPr>
+          <a:xfrm>
+            <a:off x="8564727" y="1417320"/>
+            <a:ext cx="2986887" cy="548640"/>
+          </a:xfrm>
+          <a:prstGeom prst="roundRect">
+            <a:avLst/>
+          </a:prstGeom>
+          <a:solidFill>
+            <a:srgbClr val="1F4E79"/>
+          </a:solidFill>
+          <a:ln>
+            <a:noFill/>
+          </a:ln>
+          <a:effectLst/>
+        </p:spPr>
+        <p:style>
+          <a:lnRef idx="1">
+            <a:schemeClr val="accent1"/>
+          </a:lnRef>
+          <a:fillRef idx="3">
+            <a:schemeClr val="accent1"/>
+          </a:fillRef>
+          <a:effectRef idx="2">
+            <a:schemeClr val="accent1"/>
+          </a:effectRef>
+          <a:fontRef idx="minor">
+            <a:schemeClr val="lt1"/>
+          </a:fontRef>
+        </p:style>
+        <p:txBody>
+          <a:bodyPr rtlCol="0" anchor="ctr" wrap="square" tIns="36576" bIns="36576"/>
+          <a:lstStyle/>
+          <a:p>
+            <a:pPr algn="ctr">
+              <a:spcAft>
+                <a:spcPts val="200"/>
+              </a:spcAft>
+            </a:pPr>
+            <a:r>
+              <a:rPr sz="1600" b="1">
+                <a:solidFill>
+                  <a:srgbClr val="FFFFFF"/>
+                </a:solidFill>
+                <a:latin typeface="Calibri"/>
+              </a:rPr>
+              <a:t>Inersion</a:t>
+            </a:r>
+          </a:p>
+        </p:txBody>
+      </p:sp>
+      <p:sp>
+        <p:nvSpPr>
+          <p:cNvPr id="12" name="Rectangle 11"/>
+          <p:cNvSpPr/>
+          <p:nvPr/>
+        </p:nvSpPr>
+        <p:spPr>
+          <a:xfrm>
+            <a:off x="8564727" y="2020824"/>
+            <a:ext cx="2986887" cy="3419856"/>
+          </a:xfrm>
+          <a:prstGeom prst="rect">
+            <a:avLst/>
+          </a:prstGeom>
+          <a:solidFill>
+            <a:srgbClr val="E8EEF6"/>
+          </a:solidFill>
+          <a:ln w="15875">
+            <a:solidFill>
+              <a:srgbClr val="E8EEF6"/>
+            </a:solidFill>
+          </a:ln>
+          <a:effectLst/>
+        </p:spPr>
+        <p:style>
+          <a:lnRef idx="1">
+            <a:schemeClr val="accent1"/>
+          </a:lnRef>
+          <a:fillRef idx="3">
+            <a:schemeClr val="accent1"/>
+          </a:fillRef>
+          <a:effectRef idx="2">
+            <a:schemeClr val="accent1"/>
+          </a:effectRef>
+          <a:fontRef idx="minor">
+            <a:schemeClr val="lt1"/>
+          </a:fontRef>
+        </p:style>
+        <p:txBody>
+          <a:bodyPr rtlCol="0" anchor="t" wrap="square" tIns="36576" bIns="36576"/>
+          <a:lstStyle/>
+          <a:p>
+            <a:pPr algn="l">
+              <a:spcAft>
+                <a:spcPts val="700"/>
+              </a:spcAft>
+            </a:pPr>
+            <a:r>
+              <a:rPr sz="1500" b="1">
+                <a:solidFill>
+                  <a:srgbClr val="C9A227"/>
+                </a:solidFill>
+                <a:latin typeface="Calibri"/>
+              </a:rPr>
+              <a:t>●  </a:t>
+            </a:r>
+            <a:r>
+              <a:rPr sz="1500" b="0">
+                <a:solidFill>
+                  <a:srgbClr val="1F2937"/>
+                </a:solidFill>
+                <a:latin typeface="Calibri"/>
+              </a:rPr>
+              <a:t>Kuch soha (tana) massasidan katta</a:t>
+            </a:r>
+          </a:p>
+          <a:p>
+            <a:pPr algn="l">
+              <a:spcAft>
+                <a:spcPts val="700"/>
+              </a:spcAft>
+            </a:pPr>
+            <a:r>
+              <a:rPr sz="1500" b="1">
+                <a:solidFill>
+                  <a:srgbClr val="C9A227"/>
+                </a:solidFill>
+                <a:latin typeface="Calibri"/>
+              </a:rPr>
+              <a:t>●  </a:t>
+            </a:r>
+            <a:r>
+              <a:rPr sz="1500" b="0">
+                <a:solidFill>
+                  <a:srgbClr val="1F2937"/>
+                </a:solidFill>
+                <a:latin typeface="Calibri"/>
+              </a:rPr>
+              <a:t>Bilvosita jarohatlar ham bo‘ladi</a:t>
+            </a:r>
+          </a:p>
+          <a:p>
+            <a:pPr algn="l">
+              <a:spcAft>
+                <a:spcPts val="700"/>
+              </a:spcAft>
+            </a:pPr>
+            <a:r>
+              <a:rPr sz="1500" b="1">
+                <a:solidFill>
+                  <a:srgbClr val="C9A227"/>
+                </a:solidFill>
+                <a:latin typeface="Calibri"/>
+              </a:rPr>
+              <a:t>●  </a:t>
+            </a:r>
+            <a:r>
+              <a:rPr sz="1500" b="0">
+                <a:solidFill>
+                  <a:srgbClr val="1F2937"/>
+                </a:solidFill>
+                <a:latin typeface="Calibri"/>
+              </a:rPr>
+              <a:t>Tana chayqalishi, aks zarb</a:t>
+            </a:r>
+          </a:p>
+        </p:txBody>
+      </p:sp>
+      <p:sp>
+        <p:nvSpPr>
+          <p:cNvPr id="13" name="TextBox 12"/>
           <p:cNvSpPr txBox="1"/>
           <p:nvPr/>
         </p:nvSpPr>
         <p:spPr>
           <a:xfrm>
-            <a:off x="6263640" y="5349240"/>
-            <a:ext cx="5287975" cy="365760"/>
+            <a:off x="5440680" y="5486400"/>
+            <a:ext cx="6110935" cy="365760"/>
           </a:xfrm>
           <a:prstGeom prst="rect">
             <a:avLst/>
@@ -16848,7 +18462,7 @@
           <a:lstStyle/>
           <a:p>
             <a:r>
-              <a:rPr sz="1100" b="0">
+              <a:rPr sz="1200" b="0">
                 <a:solidFill>
                   <a:srgbClr val="6B7280"/>
                 </a:solidFill>
@@ -16861,7 +18475,7 @@
       </p:sp>
       <p:sp>
         <p:nvSpPr>
-          <p:cNvPr id="11" name="TextBox 10"/>
+          <p:cNvPr id="14" name="TextBox 13"/>
           <p:cNvSpPr txBox="1"/>
           <p:nvPr/>
         </p:nvSpPr>
@@ -18273,7 +19887,7 @@
         <p:spPr>
           <a:xfrm>
             <a:off x="640080" y="1417320"/>
-            <a:ext cx="5394960" cy="4480560"/>
+            <a:ext cx="4572000" cy="4480560"/>
           </a:xfrm>
           <a:prstGeom prst="rect">
             <a:avLst/>
@@ -18343,17 +19957,21 @@
         </p:nvSpPr>
         <p:spPr>
           <a:xfrm>
-            <a:off x="6263640" y="1463040"/>
-            <a:ext cx="5287975" cy="740664"/>
+            <a:off x="5440680" y="1417320"/>
+            <a:ext cx="2973171" cy="1554480"/>
           </a:xfrm>
           <a:prstGeom prst="roundRect">
-            <a:avLst/>
+            <a:avLst>
+              <a:gd name="adj" fmla="val 8000"/>
+            </a:avLst>
           </a:prstGeom>
           <a:solidFill>
-            <a:srgbClr val="0B1F3A"/>
+            <a:srgbClr val="FFFFFF"/>
           </a:solidFill>
-          <a:ln>
-            <a:noFill/>
+          <a:ln w="15875">
+            <a:solidFill>
+              <a:srgbClr val="E8EEF6"/>
+            </a:solidFill>
           </a:ln>
           <a:effectLst/>
         </p:spPr>
@@ -18372,33 +19990,25 @@
           </a:fontRef>
         </p:style>
         <p:txBody>
-          <a:bodyPr rtlCol="0" anchor="ctr" wrap="square"/>
+          <a:bodyPr rtlCol="0" anchor="ctr"/>
           <a:lstStyle/>
           <a:p>
             <a:pPr algn="ctr"/>
-            <a:r>
-              <a:rPr sz="1600" b="1">
-                <a:solidFill>
-                  <a:srgbClr val="FFFFFF"/>
-                </a:solidFill>
-              </a:rPr>
-              <a:t>Yangi — 12 soatgacha</a:t>
-            </a:r>
-          </a:p>
-        </p:txBody>
-      </p:sp>
-      <p:sp>
-        <p:nvSpPr>
-          <p:cNvPr id="10" name="Down Arrow 9"/>
+          </a:p>
+        </p:txBody>
+      </p:sp>
+      <p:sp>
+        <p:nvSpPr>
+          <p:cNvPr id="10" name="Rectangle 9"/>
           <p:cNvSpPr/>
           <p:nvPr/>
         </p:nvSpPr>
         <p:spPr>
           <a:xfrm>
-            <a:off x="8770467" y="2221992"/>
-            <a:ext cx="274320" cy="256032"/>
-          </a:xfrm>
-          <a:prstGeom prst="downArrow">
+            <a:off x="5440680" y="1508760"/>
+            <a:ext cx="64008" cy="1371600"/>
+          </a:xfrm>
+          <a:prstGeom prst="rect">
             <a:avLst/>
           </a:prstGeom>
           <a:solidFill>
@@ -18433,23 +20043,91 @@
       </p:sp>
       <p:sp>
         <p:nvSpPr>
-          <p:cNvPr id="11" name="Rounded Rectangle 10"/>
+          <p:cNvPr id="11" name="TextBox 10"/>
+          <p:cNvSpPr txBox="1"/>
+          <p:nvPr/>
+        </p:nvSpPr>
+        <p:spPr>
+          <a:xfrm>
+            <a:off x="5550408" y="1417320"/>
+            <a:ext cx="2863443" cy="1554480"/>
+          </a:xfrm>
+          <a:prstGeom prst="rect">
+            <a:avLst/>
+          </a:prstGeom>
+          <a:noFill/>
+        </p:spPr>
+        <p:txBody>
+          <a:bodyPr wrap="square" anchor="ctr" tIns="36576" bIns="36576">
+            <a:spAutoFit/>
+          </a:bodyPr>
+          <a:lstStyle/>
+          <a:p>
+            <a:pPr algn="l">
+              <a:spcAft>
+                <a:spcPts val="100"/>
+              </a:spcAft>
+            </a:pPr>
+            <a:r>
+              <a:rPr sz="1300" b="0">
+                <a:solidFill>
+                  <a:srgbClr val="6B7280"/>
+                </a:solidFill>
+                <a:latin typeface="Calibri"/>
+              </a:rPr>
+              <a:t>Yangi</a:t>
+            </a:r>
+          </a:p>
+          <a:p>
+            <a:pPr algn="l">
+              <a:spcAft>
+                <a:spcPts val="100"/>
+              </a:spcAft>
+            </a:pPr>
+            <a:r>
+              <a:rPr sz="3000" b="1">
+                <a:solidFill>
+                  <a:srgbClr val="0B1F3A"/>
+                </a:solidFill>
+                <a:latin typeface="Calibri"/>
+              </a:rPr>
+              <a:t>≤ 12</a:t>
+            </a:r>
+            <a:r>
+              <a:rPr sz="1500" b="0">
+                <a:solidFill>
+                  <a:srgbClr val="6B7280"/>
+                </a:solidFill>
+                <a:latin typeface="Calibri"/>
+              </a:rPr>
+              <a:t>  soat</a:t>
+            </a:r>
+          </a:p>
+        </p:txBody>
+      </p:sp>
+      <p:sp>
+        <p:nvSpPr>
+          <p:cNvPr id="12" name="Rounded Rectangle 11"/>
           <p:cNvSpPr/>
           <p:nvPr/>
         </p:nvSpPr>
         <p:spPr>
           <a:xfrm>
-            <a:off x="6263640" y="2496312"/>
-            <a:ext cx="5287975" cy="740664"/>
+            <a:off x="8578443" y="1417320"/>
+            <a:ext cx="2973171" cy="1554480"/>
           </a:xfrm>
           <a:prstGeom prst="roundRect">
-            <a:avLst/>
+            <a:avLst>
+              <a:gd name="adj" fmla="val 8000"/>
+            </a:avLst>
           </a:prstGeom>
           <a:solidFill>
-            <a:srgbClr val="1F4E79"/>
+            <a:srgbClr val="FFFFFF"/>
           </a:solidFill>
-          <a:ln>
-            <a:noFill/>
+          <a:ln w="15875">
+            <a:solidFill>
+              <a:srgbClr val="E8EEF6"/>
+            </a:solidFill>
           </a:ln>
           <a:effectLst/>
         </p:spPr>
@@ -18468,33 +20146,25 @@
           </a:fontRef>
         </p:style>
         <p:txBody>
-          <a:bodyPr rtlCol="0" anchor="ctr" wrap="square"/>
+          <a:bodyPr rtlCol="0" anchor="ctr"/>
           <a:lstStyle/>
           <a:p>
             <a:pPr algn="ctr"/>
-            <a:r>
-              <a:rPr sz="1600" b="1">
-                <a:solidFill>
-                  <a:srgbClr val="FFFFFF"/>
-                </a:solidFill>
-              </a:rPr>
-              <a:t>Qoplama — 2-3 sutkagacha</a:t>
-            </a:r>
-          </a:p>
-        </p:txBody>
-      </p:sp>
-      <p:sp>
-        <p:nvSpPr>
-          <p:cNvPr id="12" name="Down Arrow 11"/>
+          </a:p>
+        </p:txBody>
+      </p:sp>
+      <p:sp>
+        <p:nvSpPr>
+          <p:cNvPr id="13" name="Rectangle 12"/>
           <p:cNvSpPr/>
           <p:nvPr/>
         </p:nvSpPr>
         <p:spPr>
           <a:xfrm>
-            <a:off x="8770467" y="3255264"/>
-            <a:ext cx="274320" cy="256032"/>
-          </a:xfrm>
-          <a:prstGeom prst="downArrow">
+            <a:off x="8578443" y="1508760"/>
+            <a:ext cx="64008" cy="1371600"/>
+          </a:xfrm>
+          <a:prstGeom prst="rect">
             <a:avLst/>
           </a:prstGeom>
           <a:solidFill>
@@ -18529,23 +20199,91 @@
       </p:sp>
       <p:sp>
         <p:nvSpPr>
-          <p:cNvPr id="13" name="Rounded Rectangle 12"/>
+          <p:cNvPr id="14" name="TextBox 13"/>
+          <p:cNvSpPr txBox="1"/>
+          <p:nvPr/>
+        </p:nvSpPr>
+        <p:spPr>
+          <a:xfrm>
+            <a:off x="8688171" y="1417320"/>
+            <a:ext cx="2863443" cy="1554480"/>
+          </a:xfrm>
+          <a:prstGeom prst="rect">
+            <a:avLst/>
+          </a:prstGeom>
+          <a:noFill/>
+        </p:spPr>
+        <p:txBody>
+          <a:bodyPr wrap="square" anchor="ctr" tIns="36576" bIns="36576">
+            <a:spAutoFit/>
+          </a:bodyPr>
+          <a:lstStyle/>
+          <a:p>
+            <a:pPr algn="l">
+              <a:spcAft>
+                <a:spcPts val="100"/>
+              </a:spcAft>
+            </a:pPr>
+            <a:r>
+              <a:rPr sz="1300" b="0">
+                <a:solidFill>
+                  <a:srgbClr val="6B7280"/>
+                </a:solidFill>
+                <a:latin typeface="Calibri"/>
+              </a:rPr>
+              <a:t>Qoplama</a:t>
+            </a:r>
+          </a:p>
+          <a:p>
+            <a:pPr algn="l">
+              <a:spcAft>
+                <a:spcPts val="100"/>
+              </a:spcAft>
+            </a:pPr>
+            <a:r>
+              <a:rPr sz="3000" b="1">
+                <a:solidFill>
+                  <a:srgbClr val="0B1F3A"/>
+                </a:solidFill>
+                <a:latin typeface="Calibri"/>
+              </a:rPr>
+              <a:t>2–3</a:t>
+            </a:r>
+            <a:r>
+              <a:rPr sz="1500" b="0">
+                <a:solidFill>
+                  <a:srgbClr val="6B7280"/>
+                </a:solidFill>
+                <a:latin typeface="Calibri"/>
+              </a:rPr>
+              <a:t>  sutka</a:t>
+            </a:r>
+          </a:p>
+        </p:txBody>
+      </p:sp>
+      <p:sp>
+        <p:nvSpPr>
+          <p:cNvPr id="15" name="Rounded Rectangle 14"/>
           <p:cNvSpPr/>
           <p:nvPr/>
         </p:nvSpPr>
         <p:spPr>
           <a:xfrm>
-            <a:off x="6263640" y="3529584"/>
-            <a:ext cx="5287975" cy="740664"/>
+            <a:off x="5440680" y="3118104"/>
+            <a:ext cx="2973171" cy="1554480"/>
           </a:xfrm>
           <a:prstGeom prst="roundRect">
-            <a:avLst/>
+            <a:avLst>
+              <a:gd name="adj" fmla="val 8000"/>
+            </a:avLst>
           </a:prstGeom>
           <a:solidFill>
-            <a:srgbClr val="0B1F3A"/>
+            <a:srgbClr val="FFFFFF"/>
           </a:solidFill>
-          <a:ln>
-            <a:noFill/>
+          <a:ln w="15875">
+            <a:solidFill>
+              <a:srgbClr val="E8EEF6"/>
+            </a:solidFill>
           </a:ln>
           <a:effectLst/>
         </p:spPr>
@@ -18564,33 +20302,25 @@
           </a:fontRef>
         </p:style>
         <p:txBody>
-          <a:bodyPr rtlCol="0" anchor="ctr" wrap="square"/>
+          <a:bodyPr rtlCol="0" anchor="ctr"/>
           <a:lstStyle/>
           <a:p>
             <a:pPr algn="ctr"/>
-            <a:r>
-              <a:rPr sz="1600" b="1">
-                <a:solidFill>
-                  <a:srgbClr val="FFFFFF"/>
-                </a:solidFill>
-              </a:rPr>
-              <a:t>Epitelizatsiya — 7-9 sutka</a:t>
-            </a:r>
-          </a:p>
-        </p:txBody>
-      </p:sp>
-      <p:sp>
-        <p:nvSpPr>
-          <p:cNvPr id="14" name="Down Arrow 13"/>
+          </a:p>
+        </p:txBody>
+      </p:sp>
+      <p:sp>
+        <p:nvSpPr>
+          <p:cNvPr id="16" name="Rectangle 15"/>
           <p:cNvSpPr/>
           <p:nvPr/>
         </p:nvSpPr>
         <p:spPr>
           <a:xfrm>
-            <a:off x="8770467" y="4288536"/>
-            <a:ext cx="274320" cy="256032"/>
-          </a:xfrm>
-          <a:prstGeom prst="downArrow">
+            <a:off x="5440680" y="3209544"/>
+            <a:ext cx="64008" cy="1371600"/>
+          </a:xfrm>
+          <a:prstGeom prst="rect">
             <a:avLst/>
           </a:prstGeom>
           <a:solidFill>
@@ -18625,20 +20355,132 @@
       </p:sp>
       <p:sp>
         <p:nvSpPr>
-          <p:cNvPr id="15" name="Rounded Rectangle 14"/>
+          <p:cNvPr id="17" name="TextBox 16"/>
+          <p:cNvSpPr txBox="1"/>
+          <p:nvPr/>
+        </p:nvSpPr>
+        <p:spPr>
+          <a:xfrm>
+            <a:off x="5550408" y="3118104"/>
+            <a:ext cx="2863443" cy="1554480"/>
+          </a:xfrm>
+          <a:prstGeom prst="rect">
+            <a:avLst/>
+          </a:prstGeom>
+          <a:noFill/>
+        </p:spPr>
+        <p:txBody>
+          <a:bodyPr wrap="square" anchor="ctr" tIns="36576" bIns="36576">
+            <a:spAutoFit/>
+          </a:bodyPr>
+          <a:lstStyle/>
+          <a:p>
+            <a:pPr algn="l">
+              <a:spcAft>
+                <a:spcPts val="100"/>
+              </a:spcAft>
+            </a:pPr>
+            <a:r>
+              <a:rPr sz="1300" b="0">
+                <a:solidFill>
+                  <a:srgbClr val="6B7280"/>
+                </a:solidFill>
+                <a:latin typeface="Calibri"/>
+              </a:rPr>
+              <a:t>Epitelizatsiya</a:t>
+            </a:r>
+          </a:p>
+          <a:p>
+            <a:pPr algn="l">
+              <a:spcAft>
+                <a:spcPts val="100"/>
+              </a:spcAft>
+            </a:pPr>
+            <a:r>
+              <a:rPr sz="3000" b="1">
+                <a:solidFill>
+                  <a:srgbClr val="0B1F3A"/>
+                </a:solidFill>
+                <a:latin typeface="Calibri"/>
+              </a:rPr>
+              <a:t>7–9</a:t>
+            </a:r>
+            <a:r>
+              <a:rPr sz="1500" b="0">
+                <a:solidFill>
+                  <a:srgbClr val="6B7280"/>
+                </a:solidFill>
+                <a:latin typeface="Calibri"/>
+              </a:rPr>
+              <a:t>  sutka</a:t>
+            </a:r>
+          </a:p>
+        </p:txBody>
+      </p:sp>
+      <p:sp>
+        <p:nvSpPr>
+          <p:cNvPr id="18" name="Rounded Rectangle 17"/>
           <p:cNvSpPr/>
           <p:nvPr/>
         </p:nvSpPr>
         <p:spPr>
           <a:xfrm>
-            <a:off x="6263640" y="4562856"/>
-            <a:ext cx="5287975" cy="740664"/>
+            <a:off x="8578443" y="3118104"/>
+            <a:ext cx="2973171" cy="1554480"/>
           </a:xfrm>
           <a:prstGeom prst="roundRect">
-            <a:avLst/>
+            <a:avLst>
+              <a:gd name="adj" fmla="val 8000"/>
+            </a:avLst>
           </a:prstGeom>
           <a:solidFill>
-            <a:srgbClr val="1F4E79"/>
+            <a:srgbClr val="FFFFFF"/>
+          </a:solidFill>
+          <a:ln w="15875">
+            <a:solidFill>
+              <a:srgbClr val="E8EEF6"/>
+            </a:solidFill>
+          </a:ln>
+          <a:effectLst/>
+        </p:spPr>
+        <p:style>
+          <a:lnRef idx="1">
+            <a:schemeClr val="accent1"/>
+          </a:lnRef>
+          <a:fillRef idx="3">
+            <a:schemeClr val="accent1"/>
+          </a:fillRef>
+          <a:effectRef idx="2">
+            <a:schemeClr val="accent1"/>
+          </a:effectRef>
+          <a:fontRef idx="minor">
+            <a:schemeClr val="lt1"/>
+          </a:fontRef>
+        </p:style>
+        <p:txBody>
+          <a:bodyPr rtlCol="0" anchor="ctr"/>
+          <a:lstStyle/>
+          <a:p>
+            <a:pPr algn="ctr"/>
+          </a:p>
+        </p:txBody>
+      </p:sp>
+      <p:sp>
+        <p:nvSpPr>
+          <p:cNvPr id="19" name="Rectangle 18"/>
+          <p:cNvSpPr/>
+          <p:nvPr/>
+        </p:nvSpPr>
+        <p:spPr>
+          <a:xfrm>
+            <a:off x="8578443" y="3209544"/>
+            <a:ext cx="64008" cy="1371600"/>
+          </a:xfrm>
+          <a:prstGeom prst="rect">
+            <a:avLst/>
+          </a:prstGeom>
+          <a:solidFill>
+            <a:srgbClr val="C9A227"/>
           </a:solidFill>
           <a:ln>
             <a:noFill/>
@@ -18660,31 +20502,87 @@
           </a:fontRef>
         </p:style>
         <p:txBody>
-          <a:bodyPr rtlCol="0" anchor="ctr" wrap="square"/>
+          <a:bodyPr rtlCol="0" anchor="ctr"/>
           <a:lstStyle/>
           <a:p>
             <a:pPr algn="ctr"/>
-            <a:r>
-              <a:rPr sz="1600" b="1">
-                <a:solidFill>
-                  <a:srgbClr val="FFFFFF"/>
-                </a:solidFill>
-              </a:rPr>
-              <a:t>Iz — 10-15 sutkada yo‘qoladi</a:t>
-            </a:r>
-          </a:p>
-        </p:txBody>
-      </p:sp>
-      <p:sp>
-        <p:nvSpPr>
-          <p:cNvPr id="16" name="TextBox 15"/>
+          </a:p>
+        </p:txBody>
+      </p:sp>
+      <p:sp>
+        <p:nvSpPr>
+          <p:cNvPr id="20" name="TextBox 19"/>
           <p:cNvSpPr txBox="1"/>
           <p:nvPr/>
         </p:nvSpPr>
         <p:spPr>
           <a:xfrm>
-            <a:off x="6263640" y="5349240"/>
-            <a:ext cx="5287975" cy="365760"/>
+            <a:off x="8688171" y="3118104"/>
+            <a:ext cx="2863443" cy="1554480"/>
+          </a:xfrm>
+          <a:prstGeom prst="rect">
+            <a:avLst/>
+          </a:prstGeom>
+          <a:noFill/>
+        </p:spPr>
+        <p:txBody>
+          <a:bodyPr wrap="square" anchor="ctr" tIns="36576" bIns="36576">
+            <a:spAutoFit/>
+          </a:bodyPr>
+          <a:lstStyle/>
+          <a:p>
+            <a:pPr algn="l">
+              <a:spcAft>
+                <a:spcPts val="100"/>
+              </a:spcAft>
+            </a:pPr>
+            <a:r>
+              <a:rPr sz="1300" b="0">
+                <a:solidFill>
+                  <a:srgbClr val="6B7280"/>
+                </a:solidFill>
+                <a:latin typeface="Calibri"/>
+              </a:rPr>
+              <a:t>Iz yo‘qoladi</a:t>
+            </a:r>
+          </a:p>
+          <a:p>
+            <a:pPr algn="l">
+              <a:spcAft>
+                <a:spcPts val="100"/>
+              </a:spcAft>
+            </a:pPr>
+            <a:r>
+              <a:rPr sz="3000" b="1">
+                <a:solidFill>
+                  <a:srgbClr val="0B1F3A"/>
+                </a:solidFill>
+                <a:latin typeface="Calibri"/>
+              </a:rPr>
+              <a:t>10–15</a:t>
+            </a:r>
+            <a:r>
+              <a:rPr sz="1500" b="0">
+                <a:solidFill>
+                  <a:srgbClr val="6B7280"/>
+                </a:solidFill>
+                <a:latin typeface="Calibri"/>
+              </a:rPr>
+              <a:t>  sutka</a:t>
+            </a:r>
+          </a:p>
+        </p:txBody>
+      </p:sp>
+      <p:sp>
+        <p:nvSpPr>
+          <p:cNvPr id="21" name="TextBox 20"/>
+          <p:cNvSpPr txBox="1"/>
+          <p:nvPr/>
+        </p:nvSpPr>
+        <p:spPr>
+          <a:xfrm>
+            <a:off x="5440680" y="5486400"/>
+            <a:ext cx="6110935" cy="365760"/>
           </a:xfrm>
           <a:prstGeom prst="rect">
             <a:avLst/>
@@ -18698,7 +20596,7 @@
           <a:lstStyle/>
           <a:p>
             <a:r>
-              <a:rPr sz="1100" b="0">
+              <a:rPr sz="1200" b="0">
                 <a:solidFill>
                   <a:srgbClr val="6B7280"/>
                 </a:solidFill>
@@ -18711,7 +20609,7 @@
       </p:sp>
       <p:sp>
         <p:nvSpPr>
-          <p:cNvPr id="17" name="TextBox 16"/>
+          <p:cNvPr id="22" name="TextBox 21"/>
           <p:cNvSpPr txBox="1"/>
           <p:nvPr/>
         </p:nvSpPr>
@@ -19030,7 +20928,7 @@
                 </a:solidFill>
                 <a:latin typeface="Calibri"/>
               </a:rPr>
-              <a:t>▸  Shilinma — terining yuza qavatlari (epidermis, dermaning so‘rg‘ichsimon qavati) butunligining buzilishi. Faqat epidermis zararlansa yuzaki, so‘rg‘ichsimon qavatga o‘tsa chuqur shilinma bo‘ladi.</a:t>
+              <a:t>▸  Shilinma — epidermis va so‘rg‘ichsimon qavat butunligining buzilishi: faqat epidermis zararlansa yuzaki, so‘rg‘ichsimon qavatga o‘tsa chuqur.</a:t>
             </a:r>
           </a:p>
           <a:p>
@@ -19062,7 +20960,7 @@
                 </a:solidFill>
                 <a:latin typeface="Calibri"/>
               </a:rPr>
-              <a:t>▸  Sud-tibbiy ahamiyati: mexanik ta’sirni tasdiqlaydi, mexanizm va muddatni aniqlashga yordam beradi, ba’zan hodisa tafsilotini va jarohat og‘irligini taxmin qilishga imkon beradi.</a:t>
+              <a:t>▸  Sud-tibbiy ahamiyati: mexanik ta’sirni tasdiqlaydi, mexanizm va muddatni aniqlashga yordam beradi, ba’zan hodisa tafsilotini taxmin qilishga imkon beradi.</a:t>
             </a:r>
           </a:p>
           <a:p>
@@ -19078,7 +20976,23 @@
                 </a:solidFill>
                 <a:latin typeface="Calibri"/>
               </a:rPr>
-              <a:t>▸  Diqqat: xato qilish xavfi! Shilinma ≠ pergament dog‘i. Pergament dog‘i o‘limdan keyingi qurish alomati: sariq, jigar rang, qoplama hosil bo‘lmaydi, hayotiy jarohat belgilari yo‘q. U atrofdagi teri bilan bir sathda yoki pastroq turadi.</a:t>
+              <a:t>▸  Diqqat: shilinma ≠ pergament dog‘i. Pergament dog‘i — o‘limdan keyingi qurish alomati: sariq-jigarrang, qoplama hosil bo‘lmaydi.</a:t>
+            </a:r>
+          </a:p>
+          <a:p>
+            <a:pPr>
+              <a:spcAft>
+                <a:spcPts val="1200"/>
+              </a:spcAft>
+            </a:pPr>
+            <a:r>
+              <a:rPr sz="2000">
+                <a:solidFill>
+                  <a:srgbClr val="1F2937"/>
+                </a:solidFill>
+                <a:latin typeface="Calibri"/>
+              </a:rPr>
+              <a:t>▸  Pergament dog‘ida hayotiy jarohat belgilari yo‘q; u atrofdagi teri bilan bir sathda yoki pastroq turadi.</a:t>
             </a:r>
           </a:p>
         </p:txBody>
@@ -20142,13 +22056,13 @@
               </a:spcAft>
             </a:pPr>
             <a:r>
-              <a:rPr sz="2000">
+              <a:rPr sz="2200">
                 <a:solidFill>
                   <a:srgbClr val="1F2937"/>
                 </a:solidFill>
                 <a:latin typeface="Calibri"/>
               </a:rPr>
-              <a:t>▸  Yara — terining barcha qavatlari va chuqur yumshoq to‘qimalar ajralishi. Yuzaki yarada faqat teri, chuqur yarada teri ostidagi yumshoq to‘qimalar ham zararlanadi.</a:t>
+              <a:t>▸  Yara — terining barcha qavatlari va chuqur yumshoq to‘qimalar ajralishi: yuzaki yarada faqat teri, chuqur yarada yumshoq to‘qimalar ham zararlanadi.</a:t>
             </a:r>
           </a:p>
           <a:p>
@@ -20158,13 +22072,13 @@
               </a:spcAft>
             </a:pPr>
             <a:r>
-              <a:rPr sz="2000">
+              <a:rPr sz="2200">
                 <a:solidFill>
                   <a:srgbClr val="1F2937"/>
                 </a:solidFill>
                 <a:latin typeface="Calibri"/>
               </a:rPr>
-              <a:t>▸  Mexanizmga qarab: zarb va siqilishdan lat yara; kuchli zarb va siqilishdan majaqlangan; zarb va cho‘zilishdan yirtma; o‘tkir burchakdagi zarb va cho‘zilishdan laxtaksimon yara.</a:t>
+              <a:t>▸  Mexanizmga qarab: lat (zarb, siqilish), majaqlangan (kuchli zarb, siqilish), yirtma (zarb, cho‘zilish), laxtaksimon (o‘tkir burchakli zarb, cho‘zilish) yara.</a:t>
             </a:r>
           </a:p>
           <a:p>
@@ -20174,13 +22088,13 @@
               </a:spcAft>
             </a:pPr>
             <a:r>
-              <a:rPr sz="2000">
+              <a:rPr sz="2200">
                 <a:solidFill>
                   <a:srgbClr val="1F2937"/>
                 </a:solidFill>
                 <a:latin typeface="Calibri"/>
               </a:rPr>
-              <a:t>▸  Chetlari notekis, shilingan, qon quyilgan, ba’zan majaqlangan; uchlari odatda o‘tmas. Devorlari notekis, orasida to‘qimali “ko‘prikchalar” bor; tubi ham notekis.</a:t>
+              <a:t>▸  Chetlari notekis, shilingan, qon quyilgan; uchlari odatda o‘tmas. Devorlari va tubi notekis, devorlar orasida to‘qimali “ko‘prikchalar” bor.</a:t>
             </a:r>
           </a:p>
           <a:p>
@@ -20190,7 +22104,7 @@
               </a:spcAft>
             </a:pPr>
             <a:r>
-              <a:rPr sz="2000">
+              <a:rPr sz="2200">
                 <a:solidFill>
                   <a:srgbClr val="1F2937"/>
                 </a:solidFill>
@@ -20497,7 +22411,7 @@
         <p:spPr>
           <a:xfrm>
             <a:off x="640080" y="1417320"/>
-            <a:ext cx="5394960" cy="4480560"/>
+            <a:ext cx="4572000" cy="4480560"/>
           </a:xfrm>
           <a:prstGeom prst="rect">
             <a:avLst/>
@@ -20559,262 +22473,695 @@
           </a:p>
         </p:txBody>
       </p:sp>
-      <p:graphicFrame>
-        <p:nvGraphicFramePr>
-          <p:cNvPr id="9" name="Table 8"/>
-          <p:cNvGraphicFramePr>
-            <a:graphicFrameLocks noGrp="1"/>
-          </p:cNvGraphicFramePr>
-          <p:nvPr/>
-        </p:nvGraphicFramePr>
-        <p:xfrm>
-          <a:off x="6263640" y="1463040"/>
-          <a:ext cx="5287974" cy="3072380"/>
-        </p:xfrm>
-        <a:graphic>
-          <a:graphicData uri="http://schemas.openxmlformats.org/drawingml/2006/table">
-            <a:tbl>
-              <a:tblPr firstRow="1" bandRow="1">
-                <a:tableStyleId>{5C22544A-7EE6-4342-B048-85BDC9FD1C3A}</a:tableStyleId>
-              </a:tblPr>
-              <a:tblGrid>
-                <a:gridCol w="1982990"/>
-                <a:gridCol w="3304984"/>
-              </a:tblGrid>
-              <a:tr h="614476">
-                <a:tc>
-                  <a:txBody>
-                    <a:bodyPr/>
-                    <a:lstStyle/>
-                    <a:p>
-                      <a:r>
-                        <a:rPr sz="1800" b="1">
-                          <a:solidFill>
-                            <a:srgbClr val="FFFFFF"/>
-                          </a:solidFill>
-                        </a:rPr>
-                        <a:t>Yuza</a:t>
-                      </a:r>
-                    </a:p>
-                  </a:txBody>
-                  <a:tcPr marL="73152" marR="73152" marT="36576" marB="36576">
-                    <a:solidFill>
-                      <a:srgbClr val="0B1F3A"/>
-                    </a:solidFill>
-                  </a:tcPr>
-                </a:tc>
-                <a:tc>
-                  <a:txBody>
-                    <a:bodyPr/>
-                    <a:lstStyle/>
-                    <a:p>
-                      <a:r>
-                        <a:rPr sz="1800" b="1">
-                          <a:solidFill>
-                            <a:srgbClr val="FFFFFF"/>
-                          </a:solidFill>
-                        </a:rPr>
-                        <a:t>Yara shakli</a:t>
-                      </a:r>
-                    </a:p>
-                  </a:txBody>
-                  <a:tcPr marL="73152" marR="73152" marT="36576" marB="36576">
-                    <a:solidFill>
-                      <a:srgbClr val="0B1F3A"/>
-                    </a:solidFill>
-                  </a:tcPr>
-                </a:tc>
-              </a:tr>
-              <a:tr h="614476">
-                <a:tc>
-                  <a:txBody>
-                    <a:bodyPr/>
-                    <a:lstStyle/>
-                    <a:p>
-                      <a:r>
-                        <a:rPr sz="1700" b="0">
-                          <a:solidFill>
-                            <a:srgbClr val="1F2937"/>
-                          </a:solidFill>
-                        </a:rPr>
-                        <a:t>Cheklanmagan yassi</a:t>
-                      </a:r>
-                    </a:p>
-                  </a:txBody>
-                  <a:tcPr marL="73152" marR="73152" marT="36576" marB="36576">
-                    <a:solidFill>
-                      <a:srgbClr val="E8EEF6"/>
-                    </a:solidFill>
-                  </a:tcPr>
-                </a:tc>
-                <a:tc>
-                  <a:txBody>
-                    <a:bodyPr/>
-                    <a:lstStyle/>
-                    <a:p>
-                      <a:r>
-                        <a:rPr sz="1700" b="0">
-                          <a:solidFill>
-                            <a:srgbClr val="1F2937"/>
-                          </a:solidFill>
-                        </a:rPr>
-                        <a:t>Shoxsimon, zigzagsimon, yulduzsimon</a:t>
-                      </a:r>
-                    </a:p>
-                  </a:txBody>
-                  <a:tcPr marL="73152" marR="73152" marT="36576" marB="36576">
-                    <a:solidFill>
-                      <a:srgbClr val="E8EEF6"/>
-                    </a:solidFill>
-                  </a:tcPr>
-                </a:tc>
-              </a:tr>
-              <a:tr h="614476">
-                <a:tc>
-                  <a:txBody>
-                    <a:bodyPr/>
-                    <a:lstStyle/>
-                    <a:p>
-                      <a:r>
-                        <a:rPr sz="1700" b="0">
-                          <a:solidFill>
-                            <a:srgbClr val="1F2937"/>
-                          </a:solidFill>
-                        </a:rPr>
-                        <a:t>Cheklangan yassi (tikka)</a:t>
-                      </a:r>
-                    </a:p>
-                  </a:txBody>
-                  <a:tcPr marL="73152" marR="73152" marT="36576" marB="36576">
-                    <a:solidFill>
-                      <a:srgbClr val="FFFFFF"/>
-                    </a:solidFill>
-                  </a:tcPr>
-                </a:tc>
-                <a:tc>
-                  <a:txBody>
-                    <a:bodyPr/>
-                    <a:lstStyle/>
-                    <a:p>
-                      <a:r>
-                        <a:rPr sz="1700" b="0">
-                          <a:solidFill>
-                            <a:srgbClr val="1F2937"/>
-                          </a:solidFill>
-                        </a:rPr>
-                        <a:t>Uch, to‘rt, ko‘p nurli yulduzsimon</a:t>
-                      </a:r>
-                    </a:p>
-                  </a:txBody>
-                  <a:tcPr marL="73152" marR="73152" marT="36576" marB="36576">
-                    <a:solidFill>
-                      <a:srgbClr val="FFFFFF"/>
-                    </a:solidFill>
-                  </a:tcPr>
-                </a:tc>
-              </a:tr>
-              <a:tr h="614476">
-                <a:tc>
-                  <a:txBody>
-                    <a:bodyPr/>
-                    <a:lstStyle/>
-                    <a:p>
-                      <a:r>
-                        <a:rPr sz="1700" b="0">
-                          <a:solidFill>
-                            <a:srgbClr val="1F2937"/>
-                          </a:solidFill>
-                        </a:rPr>
-                        <a:t>Sferik yuza</a:t>
-                      </a:r>
-                    </a:p>
-                  </a:txBody>
-                  <a:tcPr marL="73152" marR="73152" marT="36576" marB="36576">
-                    <a:solidFill>
-                      <a:srgbClr val="E8EEF6"/>
-                    </a:solidFill>
-                  </a:tcPr>
-                </a:tc>
-                <a:tc>
-                  <a:txBody>
-                    <a:bodyPr/>
-                    <a:lstStyle/>
-                    <a:p>
-                      <a:r>
-                        <a:rPr sz="1700" b="0">
-                          <a:solidFill>
-                            <a:srgbClr val="1F2937"/>
-                          </a:solidFill>
-                        </a:rPr>
-                        <a:t>Nurlari teng yulduzsimon, markazi botiq</a:t>
-                      </a:r>
-                    </a:p>
-                  </a:txBody>
-                  <a:tcPr marL="73152" marR="73152" marT="36576" marB="36576">
-                    <a:solidFill>
-                      <a:srgbClr val="E8EEF6"/>
-                    </a:solidFill>
-                  </a:tcPr>
-                </a:tc>
-              </a:tr>
-              <a:tr h="614476">
-                <a:tc>
-                  <a:txBody>
-                    <a:bodyPr/>
-                    <a:lstStyle/>
-                    <a:p>
-                      <a:r>
-                        <a:rPr sz="1700" b="0">
-                          <a:solidFill>
-                            <a:srgbClr val="1F2937"/>
-                          </a:solidFill>
-                        </a:rPr>
-                        <a:t>Silindr yuza</a:t>
-                      </a:r>
-                    </a:p>
-                  </a:txBody>
-                  <a:tcPr marL="73152" marR="73152" marT="36576" marB="36576">
-                    <a:solidFill>
-                      <a:srgbClr val="FFFFFF"/>
-                    </a:solidFill>
-                  </a:tcPr>
-                </a:tc>
-                <a:tc>
-                  <a:txBody>
-                    <a:bodyPr/>
-                    <a:lstStyle/>
-                    <a:p>
-                      <a:r>
-                        <a:rPr sz="1700" b="0">
-                          <a:solidFill>
-                            <a:srgbClr val="1F2937"/>
-                          </a:solidFill>
-                        </a:rPr>
-                        <a:t>Yoriqsimon, chiziqsimon, chetlari shilingan</a:t>
-                      </a:r>
-                    </a:p>
-                  </a:txBody>
-                  <a:tcPr marL="73152" marR="73152" marT="36576" marB="36576">
-                    <a:solidFill>
-                      <a:srgbClr val="FFFFFF"/>
-                    </a:solidFill>
-                  </a:tcPr>
-                </a:tc>
-              </a:tr>
-            </a:tbl>
-          </a:graphicData>
-        </a:graphic>
-      </p:graphicFrame>
-      <p:sp>
-        <p:nvSpPr>
-          <p:cNvPr id="10" name="TextBox 9"/>
+      <p:sp>
+        <p:nvSpPr>
+          <p:cNvPr id="9" name="Rounded Rectangle 8"/>
+          <p:cNvSpPr/>
+          <p:nvPr/>
+        </p:nvSpPr>
+        <p:spPr>
+          <a:xfrm>
+            <a:off x="5440680" y="2788920"/>
+            <a:ext cx="2011680" cy="1280160"/>
+          </a:xfrm>
+          <a:prstGeom prst="roundRect">
+            <a:avLst/>
+          </a:prstGeom>
+          <a:solidFill>
+            <a:srgbClr val="0B1F3A"/>
+          </a:solidFill>
+          <a:ln>
+            <a:noFill/>
+          </a:ln>
+          <a:effectLst/>
+        </p:spPr>
+        <p:style>
+          <a:lnRef idx="1">
+            <a:schemeClr val="accent1"/>
+          </a:lnRef>
+          <a:fillRef idx="3">
+            <a:schemeClr val="accent1"/>
+          </a:fillRef>
+          <a:effectRef idx="2">
+            <a:schemeClr val="accent1"/>
+          </a:effectRef>
+          <a:fontRef idx="minor">
+            <a:schemeClr val="lt1"/>
+          </a:fontRef>
+        </p:style>
+        <p:txBody>
+          <a:bodyPr rtlCol="0" anchor="ctr" wrap="square" tIns="36576" bIns="36576"/>
+          <a:lstStyle/>
+          <a:p>
+            <a:pPr algn="ctr">
+              <a:spcAft>
+                <a:spcPts val="200"/>
+              </a:spcAft>
+            </a:pPr>
+            <a:r>
+              <a:rPr sz="1800" b="1">
+                <a:solidFill>
+                  <a:srgbClr val="FFFFFF"/>
+                </a:solidFill>
+                <a:latin typeface="Calibri"/>
+              </a:rPr>
+              <a:t>Yuza turi va yara shakli</a:t>
+            </a:r>
+          </a:p>
+        </p:txBody>
+      </p:sp>
+      <p:cxnSp>
+        <p:nvCxnSpPr>
+          <p:cNvPr id="10" name="Connector 9"/>
+          <p:cNvCxnSpPr/>
+          <p:nvPr/>
+        </p:nvCxnSpPr>
+        <p:spPr>
+          <a:xfrm>
+            <a:off x="7452360" y="3429000"/>
+            <a:ext cx="160020" cy="0"/>
+          </a:xfrm>
+          <a:prstGeom prst="line">
+            <a:avLst/>
+          </a:prstGeom>
+          <a:ln w="25400">
+            <a:solidFill>
+              <a:srgbClr val="C9A227"/>
+            </a:solidFill>
+          </a:ln>
+        </p:spPr>
+        <p:style>
+          <a:lnRef idx="2">
+            <a:schemeClr val="accent1"/>
+          </a:lnRef>
+          <a:fillRef idx="0">
+            <a:schemeClr val="accent1"/>
+          </a:fillRef>
+          <a:effectRef idx="1">
+            <a:schemeClr val="accent1"/>
+          </a:effectRef>
+          <a:fontRef idx="minor">
+            <a:schemeClr val="tx1"/>
+          </a:fontRef>
+        </p:style>
+      </p:cxnSp>
+      <p:cxnSp>
+        <p:nvCxnSpPr>
+          <p:cNvPr id="11" name="Connector 10"/>
+          <p:cNvCxnSpPr/>
+          <p:nvPr/>
+        </p:nvCxnSpPr>
+        <p:spPr>
+          <a:xfrm>
+            <a:off x="7612380" y="1892808"/>
+            <a:ext cx="0" cy="3072384"/>
+          </a:xfrm>
+          <a:prstGeom prst="line">
+            <a:avLst/>
+          </a:prstGeom>
+          <a:ln w="25400">
+            <a:solidFill>
+              <a:srgbClr val="C9A227"/>
+            </a:solidFill>
+          </a:ln>
+        </p:spPr>
+        <p:style>
+          <a:lnRef idx="2">
+            <a:schemeClr val="accent1"/>
+          </a:lnRef>
+          <a:fillRef idx="0">
+            <a:schemeClr val="accent1"/>
+          </a:fillRef>
+          <a:effectRef idx="1">
+            <a:schemeClr val="accent1"/>
+          </a:effectRef>
+          <a:fontRef idx="minor">
+            <a:schemeClr val="tx1"/>
+          </a:fontRef>
+        </p:style>
+      </p:cxnSp>
+      <p:cxnSp>
+        <p:nvCxnSpPr>
+          <p:cNvPr id="12" name="Connector 11"/>
+          <p:cNvCxnSpPr/>
+          <p:nvPr/>
+        </p:nvCxnSpPr>
+        <p:spPr>
+          <a:xfrm>
+            <a:off x="7612380" y="1892808"/>
+            <a:ext cx="160020" cy="0"/>
+          </a:xfrm>
+          <a:prstGeom prst="line">
+            <a:avLst/>
+          </a:prstGeom>
+          <a:ln w="25400">
+            <a:solidFill>
+              <a:srgbClr val="C9A227"/>
+            </a:solidFill>
+          </a:ln>
+        </p:spPr>
+        <p:style>
+          <a:lnRef idx="2">
+            <a:schemeClr val="accent1"/>
+          </a:lnRef>
+          <a:fillRef idx="0">
+            <a:schemeClr val="accent1"/>
+          </a:fillRef>
+          <a:effectRef idx="1">
+            <a:schemeClr val="accent1"/>
+          </a:effectRef>
+          <a:fontRef idx="minor">
+            <a:schemeClr val="tx1"/>
+          </a:fontRef>
+        </p:style>
+      </p:cxnSp>
+      <p:sp>
+        <p:nvSpPr>
+          <p:cNvPr id="13" name="Rounded Rectangle 12"/>
+          <p:cNvSpPr/>
+          <p:nvPr/>
+        </p:nvSpPr>
+        <p:spPr>
+          <a:xfrm>
+            <a:off x="7772400" y="1417320"/>
+            <a:ext cx="3779215" cy="950976"/>
+          </a:xfrm>
+          <a:prstGeom prst="roundRect">
+            <a:avLst>
+              <a:gd name="adj" fmla="val 8000"/>
+            </a:avLst>
+          </a:prstGeom>
+          <a:solidFill>
+            <a:srgbClr val="FFFFFF"/>
+          </a:solidFill>
+          <a:ln w="15875">
+            <a:solidFill>
+              <a:srgbClr val="C9A227"/>
+            </a:solidFill>
+          </a:ln>
+          <a:effectLst/>
+        </p:spPr>
+        <p:style>
+          <a:lnRef idx="1">
+            <a:schemeClr val="accent1"/>
+          </a:lnRef>
+          <a:fillRef idx="3">
+            <a:schemeClr val="accent1"/>
+          </a:fillRef>
+          <a:effectRef idx="2">
+            <a:schemeClr val="accent1"/>
+          </a:effectRef>
+          <a:fontRef idx="minor">
+            <a:schemeClr val="lt1"/>
+          </a:fontRef>
+        </p:style>
+        <p:txBody>
+          <a:bodyPr rtlCol="0" anchor="ctr"/>
+          <a:lstStyle/>
+          <a:p>
+            <a:pPr algn="ctr"/>
+          </a:p>
+        </p:txBody>
+      </p:sp>
+      <p:sp>
+        <p:nvSpPr>
+          <p:cNvPr id="14" name="TextBox 13"/>
           <p:cNvSpPr txBox="1"/>
           <p:nvPr/>
         </p:nvSpPr>
         <p:spPr>
           <a:xfrm>
-            <a:off x="6263640" y="5349240"/>
-            <a:ext cx="5287975" cy="365760"/>
+            <a:off x="7772400" y="1417320"/>
+            <a:ext cx="3779215" cy="950976"/>
+          </a:xfrm>
+          <a:prstGeom prst="rect">
+            <a:avLst/>
+          </a:prstGeom>
+          <a:noFill/>
+        </p:spPr>
+        <p:txBody>
+          <a:bodyPr wrap="square" anchor="ctr" tIns="36576" bIns="36576">
+            <a:spAutoFit/>
+          </a:bodyPr>
+          <a:lstStyle/>
+          <a:p>
+            <a:pPr algn="l">
+              <a:spcAft>
+                <a:spcPts val="0"/>
+              </a:spcAft>
+            </a:pPr>
+            <a:r>
+              <a:rPr sz="1400" b="1">
+                <a:solidFill>
+                  <a:srgbClr val="0B1F3A"/>
+                </a:solidFill>
+                <a:latin typeface="Calibri"/>
+              </a:rPr>
+              <a:t>Cheklanmagan yassi</a:t>
+            </a:r>
+          </a:p>
+          <a:p>
+            <a:pPr algn="l">
+              <a:spcAft>
+                <a:spcPts val="0"/>
+              </a:spcAft>
+            </a:pPr>
+            <a:r>
+              <a:rPr sz="1200" b="0">
+                <a:solidFill>
+                  <a:srgbClr val="1F2937"/>
+                </a:solidFill>
+                <a:latin typeface="Calibri"/>
+              </a:rPr>
+              <a:t>Shoxsimon, zigzagsimon  ·  Yulduzsimon</a:t>
+            </a:r>
+          </a:p>
+        </p:txBody>
+      </p:sp>
+      <p:cxnSp>
+        <p:nvCxnSpPr>
+          <p:cNvPr id="15" name="Connector 14"/>
+          <p:cNvCxnSpPr/>
+          <p:nvPr/>
+        </p:nvCxnSpPr>
+        <p:spPr>
+          <a:xfrm>
+            <a:off x="7612380" y="2916936"/>
+            <a:ext cx="160020" cy="0"/>
+          </a:xfrm>
+          <a:prstGeom prst="line">
+            <a:avLst/>
+          </a:prstGeom>
+          <a:ln w="25400">
+            <a:solidFill>
+              <a:srgbClr val="C9A227"/>
+            </a:solidFill>
+          </a:ln>
+        </p:spPr>
+        <p:style>
+          <a:lnRef idx="2">
+            <a:schemeClr val="accent1"/>
+          </a:lnRef>
+          <a:fillRef idx="0">
+            <a:schemeClr val="accent1"/>
+          </a:fillRef>
+          <a:effectRef idx="1">
+            <a:schemeClr val="accent1"/>
+          </a:effectRef>
+          <a:fontRef idx="minor">
+            <a:schemeClr val="tx1"/>
+          </a:fontRef>
+        </p:style>
+      </p:cxnSp>
+      <p:sp>
+        <p:nvSpPr>
+          <p:cNvPr id="16" name="Rounded Rectangle 15"/>
+          <p:cNvSpPr/>
+          <p:nvPr/>
+        </p:nvSpPr>
+        <p:spPr>
+          <a:xfrm>
+            <a:off x="7772400" y="2441448"/>
+            <a:ext cx="3779215" cy="950976"/>
+          </a:xfrm>
+          <a:prstGeom prst="roundRect">
+            <a:avLst>
+              <a:gd name="adj" fmla="val 8000"/>
+            </a:avLst>
+          </a:prstGeom>
+          <a:solidFill>
+            <a:srgbClr val="FFFFFF"/>
+          </a:solidFill>
+          <a:ln w="15875">
+            <a:solidFill>
+              <a:srgbClr val="C9A227"/>
+            </a:solidFill>
+          </a:ln>
+          <a:effectLst/>
+        </p:spPr>
+        <p:style>
+          <a:lnRef idx="1">
+            <a:schemeClr val="accent1"/>
+          </a:lnRef>
+          <a:fillRef idx="3">
+            <a:schemeClr val="accent1"/>
+          </a:fillRef>
+          <a:effectRef idx="2">
+            <a:schemeClr val="accent1"/>
+          </a:effectRef>
+          <a:fontRef idx="minor">
+            <a:schemeClr val="lt1"/>
+          </a:fontRef>
+        </p:style>
+        <p:txBody>
+          <a:bodyPr rtlCol="0" anchor="ctr"/>
+          <a:lstStyle/>
+          <a:p>
+            <a:pPr algn="ctr"/>
+          </a:p>
+        </p:txBody>
+      </p:sp>
+      <p:sp>
+        <p:nvSpPr>
+          <p:cNvPr id="17" name="TextBox 16"/>
+          <p:cNvSpPr txBox="1"/>
+          <p:nvPr/>
+        </p:nvSpPr>
+        <p:spPr>
+          <a:xfrm>
+            <a:off x="7772400" y="2441448"/>
+            <a:ext cx="3779215" cy="950976"/>
+          </a:xfrm>
+          <a:prstGeom prst="rect">
+            <a:avLst/>
+          </a:prstGeom>
+          <a:noFill/>
+        </p:spPr>
+        <p:txBody>
+          <a:bodyPr wrap="square" anchor="ctr" tIns="36576" bIns="36576">
+            <a:spAutoFit/>
+          </a:bodyPr>
+          <a:lstStyle/>
+          <a:p>
+            <a:pPr algn="l">
+              <a:spcAft>
+                <a:spcPts val="0"/>
+              </a:spcAft>
+            </a:pPr>
+            <a:r>
+              <a:rPr sz="1400" b="1">
+                <a:solidFill>
+                  <a:srgbClr val="0B1F3A"/>
+                </a:solidFill>
+                <a:latin typeface="Calibri"/>
+              </a:rPr>
+              <a:t>Cheklangan yassi (tikka)</a:t>
+            </a:r>
+          </a:p>
+          <a:p>
+            <a:pPr algn="l">
+              <a:spcAft>
+                <a:spcPts val="0"/>
+              </a:spcAft>
+            </a:pPr>
+            <a:r>
+              <a:rPr sz="1200" b="0">
+                <a:solidFill>
+                  <a:srgbClr val="1F2937"/>
+                </a:solidFill>
+                <a:latin typeface="Calibri"/>
+              </a:rPr>
+              <a:t>Uch, to‘rt, ko‘p nurli yulduzsimon</a:t>
+            </a:r>
+          </a:p>
+        </p:txBody>
+      </p:sp>
+      <p:cxnSp>
+        <p:nvCxnSpPr>
+          <p:cNvPr id="18" name="Connector 17"/>
+          <p:cNvCxnSpPr/>
+          <p:nvPr/>
+        </p:nvCxnSpPr>
+        <p:spPr>
+          <a:xfrm>
+            <a:off x="7612380" y="3941064"/>
+            <a:ext cx="160020" cy="0"/>
+          </a:xfrm>
+          <a:prstGeom prst="line">
+            <a:avLst/>
+          </a:prstGeom>
+          <a:ln w="25400">
+            <a:solidFill>
+              <a:srgbClr val="C9A227"/>
+            </a:solidFill>
+          </a:ln>
+        </p:spPr>
+        <p:style>
+          <a:lnRef idx="2">
+            <a:schemeClr val="accent1"/>
+          </a:lnRef>
+          <a:fillRef idx="0">
+            <a:schemeClr val="accent1"/>
+          </a:fillRef>
+          <a:effectRef idx="1">
+            <a:schemeClr val="accent1"/>
+          </a:effectRef>
+          <a:fontRef idx="minor">
+            <a:schemeClr val="tx1"/>
+          </a:fontRef>
+        </p:style>
+      </p:cxnSp>
+      <p:sp>
+        <p:nvSpPr>
+          <p:cNvPr id="19" name="Rounded Rectangle 18"/>
+          <p:cNvSpPr/>
+          <p:nvPr/>
+        </p:nvSpPr>
+        <p:spPr>
+          <a:xfrm>
+            <a:off x="7772400" y="3465576"/>
+            <a:ext cx="3779215" cy="950976"/>
+          </a:xfrm>
+          <a:prstGeom prst="roundRect">
+            <a:avLst>
+              <a:gd name="adj" fmla="val 8000"/>
+            </a:avLst>
+          </a:prstGeom>
+          <a:solidFill>
+            <a:srgbClr val="FFFFFF"/>
+          </a:solidFill>
+          <a:ln w="15875">
+            <a:solidFill>
+              <a:srgbClr val="C9A227"/>
+            </a:solidFill>
+          </a:ln>
+          <a:effectLst/>
+        </p:spPr>
+        <p:style>
+          <a:lnRef idx="1">
+            <a:schemeClr val="accent1"/>
+          </a:lnRef>
+          <a:fillRef idx="3">
+            <a:schemeClr val="accent1"/>
+          </a:fillRef>
+          <a:effectRef idx="2">
+            <a:schemeClr val="accent1"/>
+          </a:effectRef>
+          <a:fontRef idx="minor">
+            <a:schemeClr val="lt1"/>
+          </a:fontRef>
+        </p:style>
+        <p:txBody>
+          <a:bodyPr rtlCol="0" anchor="ctr"/>
+          <a:lstStyle/>
+          <a:p>
+            <a:pPr algn="ctr"/>
+          </a:p>
+        </p:txBody>
+      </p:sp>
+      <p:sp>
+        <p:nvSpPr>
+          <p:cNvPr id="20" name="TextBox 19"/>
+          <p:cNvSpPr txBox="1"/>
+          <p:nvPr/>
+        </p:nvSpPr>
+        <p:spPr>
+          <a:xfrm>
+            <a:off x="7772400" y="3465576"/>
+            <a:ext cx="3779215" cy="950976"/>
+          </a:xfrm>
+          <a:prstGeom prst="rect">
+            <a:avLst/>
+          </a:prstGeom>
+          <a:noFill/>
+        </p:spPr>
+        <p:txBody>
+          <a:bodyPr wrap="square" anchor="ctr" tIns="36576" bIns="36576">
+            <a:spAutoFit/>
+          </a:bodyPr>
+          <a:lstStyle/>
+          <a:p>
+            <a:pPr algn="l">
+              <a:spcAft>
+                <a:spcPts val="0"/>
+              </a:spcAft>
+            </a:pPr>
+            <a:r>
+              <a:rPr sz="1400" b="1">
+                <a:solidFill>
+                  <a:srgbClr val="0B1F3A"/>
+                </a:solidFill>
+                <a:latin typeface="Calibri"/>
+              </a:rPr>
+              <a:t>Sferik yuza</a:t>
+            </a:r>
+          </a:p>
+          <a:p>
+            <a:pPr algn="l">
+              <a:spcAft>
+                <a:spcPts val="0"/>
+              </a:spcAft>
+            </a:pPr>
+            <a:r>
+              <a:rPr sz="1200" b="0">
+                <a:solidFill>
+                  <a:srgbClr val="1F2937"/>
+                </a:solidFill>
+                <a:latin typeface="Calibri"/>
+              </a:rPr>
+              <a:t>Nurlari teng yulduzsimon  ·  Markazi botiq</a:t>
+            </a:r>
+          </a:p>
+        </p:txBody>
+      </p:sp>
+      <p:cxnSp>
+        <p:nvCxnSpPr>
+          <p:cNvPr id="21" name="Connector 20"/>
+          <p:cNvCxnSpPr/>
+          <p:nvPr/>
+        </p:nvCxnSpPr>
+        <p:spPr>
+          <a:xfrm>
+            <a:off x="7612380" y="4965192"/>
+            <a:ext cx="160020" cy="0"/>
+          </a:xfrm>
+          <a:prstGeom prst="line">
+            <a:avLst/>
+          </a:prstGeom>
+          <a:ln w="25400">
+            <a:solidFill>
+              <a:srgbClr val="C9A227"/>
+            </a:solidFill>
+          </a:ln>
+        </p:spPr>
+        <p:style>
+          <a:lnRef idx="2">
+            <a:schemeClr val="accent1"/>
+          </a:lnRef>
+          <a:fillRef idx="0">
+            <a:schemeClr val="accent1"/>
+          </a:fillRef>
+          <a:effectRef idx="1">
+            <a:schemeClr val="accent1"/>
+          </a:effectRef>
+          <a:fontRef idx="minor">
+            <a:schemeClr val="tx1"/>
+          </a:fontRef>
+        </p:style>
+      </p:cxnSp>
+      <p:sp>
+        <p:nvSpPr>
+          <p:cNvPr id="22" name="Rounded Rectangle 21"/>
+          <p:cNvSpPr/>
+          <p:nvPr/>
+        </p:nvSpPr>
+        <p:spPr>
+          <a:xfrm>
+            <a:off x="7772400" y="4489704"/>
+            <a:ext cx="3779215" cy="950976"/>
+          </a:xfrm>
+          <a:prstGeom prst="roundRect">
+            <a:avLst>
+              <a:gd name="adj" fmla="val 8000"/>
+            </a:avLst>
+          </a:prstGeom>
+          <a:solidFill>
+            <a:srgbClr val="FFFFFF"/>
+          </a:solidFill>
+          <a:ln w="15875">
+            <a:solidFill>
+              <a:srgbClr val="C9A227"/>
+            </a:solidFill>
+          </a:ln>
+          <a:effectLst/>
+        </p:spPr>
+        <p:style>
+          <a:lnRef idx="1">
+            <a:schemeClr val="accent1"/>
+          </a:lnRef>
+          <a:fillRef idx="3">
+            <a:schemeClr val="accent1"/>
+          </a:fillRef>
+          <a:effectRef idx="2">
+            <a:schemeClr val="accent1"/>
+          </a:effectRef>
+          <a:fontRef idx="minor">
+            <a:schemeClr val="lt1"/>
+          </a:fontRef>
+        </p:style>
+        <p:txBody>
+          <a:bodyPr rtlCol="0" anchor="ctr"/>
+          <a:lstStyle/>
+          <a:p>
+            <a:pPr algn="ctr"/>
+          </a:p>
+        </p:txBody>
+      </p:sp>
+      <p:sp>
+        <p:nvSpPr>
+          <p:cNvPr id="23" name="TextBox 22"/>
+          <p:cNvSpPr txBox="1"/>
+          <p:nvPr/>
+        </p:nvSpPr>
+        <p:spPr>
+          <a:xfrm>
+            <a:off x="7772400" y="4489704"/>
+            <a:ext cx="3779215" cy="950976"/>
+          </a:xfrm>
+          <a:prstGeom prst="rect">
+            <a:avLst/>
+          </a:prstGeom>
+          <a:noFill/>
+        </p:spPr>
+        <p:txBody>
+          <a:bodyPr wrap="square" anchor="ctr" tIns="36576" bIns="36576">
+            <a:spAutoFit/>
+          </a:bodyPr>
+          <a:lstStyle/>
+          <a:p>
+            <a:pPr algn="l">
+              <a:spcAft>
+                <a:spcPts val="0"/>
+              </a:spcAft>
+            </a:pPr>
+            <a:r>
+              <a:rPr sz="1400" b="1">
+                <a:solidFill>
+                  <a:srgbClr val="0B1F3A"/>
+                </a:solidFill>
+                <a:latin typeface="Calibri"/>
+              </a:rPr>
+              <a:t>Silindr yuza</a:t>
+            </a:r>
+          </a:p>
+          <a:p>
+            <a:pPr algn="l">
+              <a:spcAft>
+                <a:spcPts val="0"/>
+              </a:spcAft>
+            </a:pPr>
+            <a:r>
+              <a:rPr sz="1200" b="0">
+                <a:solidFill>
+                  <a:srgbClr val="1F2937"/>
+                </a:solidFill>
+                <a:latin typeface="Calibri"/>
+              </a:rPr>
+              <a:t>Yoriqsimon, chiziqsimon  ·  Chetlari shilingan</a:t>
+            </a:r>
+          </a:p>
+        </p:txBody>
+      </p:sp>
+      <p:sp>
+        <p:nvSpPr>
+          <p:cNvPr id="24" name="TextBox 23"/>
+          <p:cNvSpPr txBox="1"/>
+          <p:nvPr/>
+        </p:nvSpPr>
+        <p:spPr>
+          <a:xfrm>
+            <a:off x="5440680" y="5486400"/>
+            <a:ext cx="6110935" cy="365760"/>
           </a:xfrm>
           <a:prstGeom prst="rect">
             <a:avLst/>
@@ -20828,7 +23175,7 @@
           <a:lstStyle/>
           <a:p>
             <a:r>
-              <a:rPr sz="1100" b="0">
+              <a:rPr sz="1200" b="0">
                 <a:solidFill>
                   <a:srgbClr val="6B7280"/>
                 </a:solidFill>
@@ -20841,7 +23188,7 @@
       </p:sp>
       <p:sp>
         <p:nvSpPr>
-          <p:cNvPr id="11" name="TextBox 10"/>
+          <p:cNvPr id="25" name="TextBox 24"/>
           <p:cNvSpPr txBox="1"/>
           <p:nvPr/>
         </p:nvSpPr>
@@ -22272,7 +24619,7 @@
               </a:spcAft>
             </a:pPr>
             <a:r>
-              <a:rPr sz="2000">
+              <a:rPr sz="2200">
                 <a:solidFill>
                   <a:srgbClr val="1F2937"/>
                 </a:solidFill>
@@ -22288,7 +24635,7 @@
               </a:spcAft>
             </a:pPr>
             <a:r>
-              <a:rPr sz="2000">
+              <a:rPr sz="2200">
                 <a:solidFill>
                   <a:srgbClr val="1F2937"/>
                 </a:solidFill>
@@ -22304,13 +24651,13 @@
               </a:spcAft>
             </a:pPr>
             <a:r>
-              <a:rPr sz="2000">
+              <a:rPr sz="2200">
                 <a:solidFill>
                   <a:srgbClr val="1F2937"/>
                 </a:solidFill>
                 <a:latin typeface="Calibri"/>
               </a:rPr>
-              <a:t>▸  Qobirg‘aning bevosita sinishida tashqi plastinkada siqilish, ichki plastinkada cho‘zilish belgilari bo‘ladi. Bilvosita sinishda teskarisi, tashqi jarohat odatda yo‘q.</a:t>
+              <a:t>▸  Qobirg‘aning bevosita sinishida tashqi plastinkada siqilish, ichki plastinkada cho‘zilish belgilari bo‘ladi.</a:t>
             </a:r>
           </a:p>
           <a:p>
@@ -22320,7 +24667,23 @@
               </a:spcAft>
             </a:pPr>
             <a:r>
-              <a:rPr sz="2000">
+              <a:rPr sz="2200">
+                <a:solidFill>
+                  <a:srgbClr val="1F2937"/>
+                </a:solidFill>
+                <a:latin typeface="Calibri"/>
+              </a:rPr>
+              <a:t>▸  Bilvosita sinishda teskarisi, tashqi jarohat odatda yo‘q.</a:t>
+            </a:r>
+          </a:p>
+          <a:p>
+            <a:pPr>
+              <a:spcAft>
+                <a:spcPts val="1200"/>
+              </a:spcAft>
+            </a:pPr>
+            <a:r>
+              <a:rPr sz="2200">
                 <a:solidFill>
                   <a:srgbClr val="1F2937"/>
                 </a:solidFill>
@@ -23455,7 +25818,7 @@
         <p:spPr>
           <a:xfrm>
             <a:off x="640080" y="1417320"/>
-            <a:ext cx="5394960" cy="4480560"/>
+            <a:ext cx="4572000" cy="4480560"/>
           </a:xfrm>
           <a:prstGeom prst="rect">
             <a:avLst/>
@@ -23517,262 +25880,695 @@
           </a:p>
         </p:txBody>
       </p:sp>
-      <p:graphicFrame>
-        <p:nvGraphicFramePr>
-          <p:cNvPr id="9" name="Table 8"/>
-          <p:cNvGraphicFramePr>
-            <a:graphicFrameLocks noGrp="1"/>
-          </p:cNvGraphicFramePr>
-          <p:nvPr/>
-        </p:nvGraphicFramePr>
-        <p:xfrm>
-          <a:off x="6263640" y="1463040"/>
-          <a:ext cx="5287975" cy="3072380"/>
-        </p:xfrm>
-        <a:graphic>
-          <a:graphicData uri="http://schemas.openxmlformats.org/drawingml/2006/table">
-            <a:tbl>
-              <a:tblPr firstRow="1" bandRow="1">
-                <a:tableStyleId>{5C22544A-7EE6-4342-B048-85BDC9FD1C3A}</a:tableStyleId>
-              </a:tblPr>
-              <a:tblGrid>
-                <a:gridCol w="1510850"/>
-                <a:gridCol w="3777125"/>
-              </a:tblGrid>
-              <a:tr h="614476">
-                <a:tc>
-                  <a:txBody>
-                    <a:bodyPr/>
-                    <a:lstStyle/>
-                    <a:p>
-                      <a:r>
-                        <a:rPr sz="1800" b="1">
-                          <a:solidFill>
-                            <a:srgbClr val="FFFFFF"/>
-                          </a:solidFill>
-                        </a:rPr>
-                        <a:t>Omil turi</a:t>
-                      </a:r>
-                    </a:p>
-                  </a:txBody>
-                  <a:tcPr marL="73152" marR="73152" marT="36576" marB="36576">
-                    <a:solidFill>
-                      <a:srgbClr val="0B1F3A"/>
-                    </a:solidFill>
-                  </a:tcPr>
-                </a:tc>
-                <a:tc>
-                  <a:txBody>
-                    <a:bodyPr/>
-                    <a:lstStyle/>
-                    <a:p>
-                      <a:r>
-                        <a:rPr sz="1800" b="1">
-                          <a:solidFill>
-                            <a:srgbClr val="FFFFFF"/>
-                          </a:solidFill>
-                        </a:rPr>
-                        <a:t>Ta’sir turlari</a:t>
-                      </a:r>
-                    </a:p>
-                  </a:txBody>
-                  <a:tcPr marL="73152" marR="73152" marT="36576" marB="36576">
-                    <a:solidFill>
-                      <a:srgbClr val="0B1F3A"/>
-                    </a:solidFill>
-                  </a:tcPr>
-                </a:tc>
-              </a:tr>
-              <a:tr h="614476">
-                <a:tc>
-                  <a:txBody>
-                    <a:bodyPr/>
-                    <a:lstStyle/>
-                    <a:p>
-                      <a:r>
-                        <a:rPr sz="1700" b="0">
-                          <a:solidFill>
-                            <a:srgbClr val="1F2937"/>
-                          </a:solidFill>
-                        </a:rPr>
-                        <a:t>Fizik</a:t>
-                      </a:r>
-                    </a:p>
-                  </a:txBody>
-                  <a:tcPr marL="73152" marR="73152" marT="36576" marB="36576">
-                    <a:solidFill>
-                      <a:srgbClr val="E8EEF6"/>
-                    </a:solidFill>
-                  </a:tcPr>
-                </a:tc>
-                <a:tc>
-                  <a:txBody>
-                    <a:bodyPr/>
-                    <a:lstStyle/>
-                    <a:p>
-                      <a:r>
-                        <a:rPr sz="1700" b="0">
-                          <a:solidFill>
-                            <a:srgbClr val="1F2937"/>
-                          </a:solidFill>
-                        </a:rPr>
-                        <a:t>mexanik, termik, elektr, barometrik, nur</a:t>
-                      </a:r>
-                    </a:p>
-                  </a:txBody>
-                  <a:tcPr marL="73152" marR="73152" marT="36576" marB="36576">
-                    <a:solidFill>
-                      <a:srgbClr val="E8EEF6"/>
-                    </a:solidFill>
-                  </a:tcPr>
-                </a:tc>
-              </a:tr>
-              <a:tr h="614476">
-                <a:tc>
-                  <a:txBody>
-                    <a:bodyPr/>
-                    <a:lstStyle/>
-                    <a:p>
-                      <a:r>
-                        <a:rPr sz="1700" b="0">
-                          <a:solidFill>
-                            <a:srgbClr val="1F2937"/>
-                          </a:solidFill>
-                        </a:rPr>
-                        <a:t>Kimyoviy</a:t>
-                      </a:r>
-                    </a:p>
-                  </a:txBody>
-                  <a:tcPr marL="73152" marR="73152" marT="36576" marB="36576">
-                    <a:solidFill>
-                      <a:srgbClr val="FFFFFF"/>
-                    </a:solidFill>
-                  </a:tcPr>
-                </a:tc>
-                <a:tc>
-                  <a:txBody>
-                    <a:bodyPr/>
-                    <a:lstStyle/>
-                    <a:p>
-                      <a:r>
-                        <a:rPr sz="1700" b="0">
-                          <a:solidFill>
-                            <a:srgbClr val="1F2937"/>
-                          </a:solidFill>
-                        </a:rPr>
-                        <a:t>zaharlar, kimikatlar, dori-darmonlar</a:t>
-                      </a:r>
-                    </a:p>
-                  </a:txBody>
-                  <a:tcPr marL="73152" marR="73152" marT="36576" marB="36576">
-                    <a:solidFill>
-                      <a:srgbClr val="FFFFFF"/>
-                    </a:solidFill>
-                  </a:tcPr>
-                </a:tc>
-              </a:tr>
-              <a:tr h="614476">
-                <a:tc>
-                  <a:txBody>
-                    <a:bodyPr/>
-                    <a:lstStyle/>
-                    <a:p>
-                      <a:r>
-                        <a:rPr sz="1700" b="0">
-                          <a:solidFill>
-                            <a:srgbClr val="1F2937"/>
-                          </a:solidFill>
-                        </a:rPr>
-                        <a:t>Biologik</a:t>
-                      </a:r>
-                    </a:p>
-                  </a:txBody>
-                  <a:tcPr marL="73152" marR="73152" marT="36576" marB="36576">
-                    <a:solidFill>
-                      <a:srgbClr val="E8EEF6"/>
-                    </a:solidFill>
-                  </a:tcPr>
-                </a:tc>
-                <a:tc>
-                  <a:txBody>
-                    <a:bodyPr/>
-                    <a:lstStyle/>
-                    <a:p>
-                      <a:r>
-                        <a:rPr sz="1700" b="0">
-                          <a:solidFill>
-                            <a:srgbClr val="1F2937"/>
-                          </a:solidFill>
-                        </a:rPr>
-                        <a:t>o‘simlik/hayvon toksinlari, mikroorganizmlar</a:t>
-                      </a:r>
-                    </a:p>
-                  </a:txBody>
-                  <a:tcPr marL="73152" marR="73152" marT="36576" marB="36576">
-                    <a:solidFill>
-                      <a:srgbClr val="E8EEF6"/>
-                    </a:solidFill>
-                  </a:tcPr>
-                </a:tc>
-              </a:tr>
-              <a:tr h="614476">
-                <a:tc>
-                  <a:txBody>
-                    <a:bodyPr/>
-                    <a:lstStyle/>
-                    <a:p>
-                      <a:r>
-                        <a:rPr sz="1700" b="0">
-                          <a:solidFill>
-                            <a:srgbClr val="1F2937"/>
-                          </a:solidFill>
-                        </a:rPr>
-                        <a:t>Ruhiy</a:t>
-                      </a:r>
-                    </a:p>
-                  </a:txBody>
-                  <a:tcPr marL="73152" marR="73152" marT="36576" marB="36576">
-                    <a:solidFill>
-                      <a:srgbClr val="FFFFFF"/>
-                    </a:solidFill>
-                  </a:tcPr>
-                </a:tc>
-                <a:tc>
-                  <a:txBody>
-                    <a:bodyPr/>
-                    <a:lstStyle/>
-                    <a:p>
-                      <a:r>
-                        <a:rPr sz="1700" b="0">
-                          <a:solidFill>
-                            <a:srgbClr val="1F2937"/>
-                          </a:solidFill>
-                        </a:rPr>
-                        <a:t>kuchli hayajon, qo‘rquv</a:t>
-                      </a:r>
-                    </a:p>
-                  </a:txBody>
-                  <a:tcPr marL="73152" marR="73152" marT="36576" marB="36576">
-                    <a:solidFill>
-                      <a:srgbClr val="FFFFFF"/>
-                    </a:solidFill>
-                  </a:tcPr>
-                </a:tc>
-              </a:tr>
-            </a:tbl>
-          </a:graphicData>
-        </a:graphic>
-      </p:graphicFrame>
-      <p:sp>
-        <p:nvSpPr>
-          <p:cNvPr id="10" name="TextBox 9"/>
+      <p:sp>
+        <p:nvSpPr>
+          <p:cNvPr id="9" name="Rounded Rectangle 8"/>
+          <p:cNvSpPr/>
+          <p:nvPr/>
+        </p:nvSpPr>
+        <p:spPr>
+          <a:xfrm>
+            <a:off x="5440680" y="2788920"/>
+            <a:ext cx="2011680" cy="1280160"/>
+          </a:xfrm>
+          <a:prstGeom prst="roundRect">
+            <a:avLst/>
+          </a:prstGeom>
+          <a:solidFill>
+            <a:srgbClr val="0B1F3A"/>
+          </a:solidFill>
+          <a:ln>
+            <a:noFill/>
+          </a:ln>
+          <a:effectLst/>
+        </p:spPr>
+        <p:style>
+          <a:lnRef idx="1">
+            <a:schemeClr val="accent1"/>
+          </a:lnRef>
+          <a:fillRef idx="3">
+            <a:schemeClr val="accent1"/>
+          </a:fillRef>
+          <a:effectRef idx="2">
+            <a:schemeClr val="accent1"/>
+          </a:effectRef>
+          <a:fontRef idx="minor">
+            <a:schemeClr val="lt1"/>
+          </a:fontRef>
+        </p:style>
+        <p:txBody>
+          <a:bodyPr rtlCol="0" anchor="ctr" wrap="square" tIns="36576" bIns="36576"/>
+          <a:lstStyle/>
+          <a:p>
+            <a:pPr algn="ctr">
+              <a:spcAft>
+                <a:spcPts val="200"/>
+              </a:spcAft>
+            </a:pPr>
+            <a:r>
+              <a:rPr sz="1800" b="1">
+                <a:solidFill>
+                  <a:srgbClr val="FFFFFF"/>
+                </a:solidFill>
+                <a:latin typeface="Calibri"/>
+              </a:rPr>
+              <a:t>Shikastlovchi omillar</a:t>
+            </a:r>
+          </a:p>
+        </p:txBody>
+      </p:sp>
+      <p:cxnSp>
+        <p:nvCxnSpPr>
+          <p:cNvPr id="10" name="Connector 9"/>
+          <p:cNvCxnSpPr/>
+          <p:nvPr/>
+        </p:nvCxnSpPr>
+        <p:spPr>
+          <a:xfrm>
+            <a:off x="7452360" y="3429000"/>
+            <a:ext cx="160020" cy="0"/>
+          </a:xfrm>
+          <a:prstGeom prst="line">
+            <a:avLst/>
+          </a:prstGeom>
+          <a:ln w="25400">
+            <a:solidFill>
+              <a:srgbClr val="C9A227"/>
+            </a:solidFill>
+          </a:ln>
+        </p:spPr>
+        <p:style>
+          <a:lnRef idx="2">
+            <a:schemeClr val="accent1"/>
+          </a:lnRef>
+          <a:fillRef idx="0">
+            <a:schemeClr val="accent1"/>
+          </a:fillRef>
+          <a:effectRef idx="1">
+            <a:schemeClr val="accent1"/>
+          </a:effectRef>
+          <a:fontRef idx="minor">
+            <a:schemeClr val="tx1"/>
+          </a:fontRef>
+        </p:style>
+      </p:cxnSp>
+      <p:cxnSp>
+        <p:nvCxnSpPr>
+          <p:cNvPr id="11" name="Connector 10"/>
+          <p:cNvCxnSpPr/>
+          <p:nvPr/>
+        </p:nvCxnSpPr>
+        <p:spPr>
+          <a:xfrm>
+            <a:off x="7612380" y="1892808"/>
+            <a:ext cx="0" cy="3072384"/>
+          </a:xfrm>
+          <a:prstGeom prst="line">
+            <a:avLst/>
+          </a:prstGeom>
+          <a:ln w="25400">
+            <a:solidFill>
+              <a:srgbClr val="C9A227"/>
+            </a:solidFill>
+          </a:ln>
+        </p:spPr>
+        <p:style>
+          <a:lnRef idx="2">
+            <a:schemeClr val="accent1"/>
+          </a:lnRef>
+          <a:fillRef idx="0">
+            <a:schemeClr val="accent1"/>
+          </a:fillRef>
+          <a:effectRef idx="1">
+            <a:schemeClr val="accent1"/>
+          </a:effectRef>
+          <a:fontRef idx="minor">
+            <a:schemeClr val="tx1"/>
+          </a:fontRef>
+        </p:style>
+      </p:cxnSp>
+      <p:cxnSp>
+        <p:nvCxnSpPr>
+          <p:cNvPr id="12" name="Connector 11"/>
+          <p:cNvCxnSpPr/>
+          <p:nvPr/>
+        </p:nvCxnSpPr>
+        <p:spPr>
+          <a:xfrm>
+            <a:off x="7612380" y="1892808"/>
+            <a:ext cx="160020" cy="0"/>
+          </a:xfrm>
+          <a:prstGeom prst="line">
+            <a:avLst/>
+          </a:prstGeom>
+          <a:ln w="25400">
+            <a:solidFill>
+              <a:srgbClr val="C9A227"/>
+            </a:solidFill>
+          </a:ln>
+        </p:spPr>
+        <p:style>
+          <a:lnRef idx="2">
+            <a:schemeClr val="accent1"/>
+          </a:lnRef>
+          <a:fillRef idx="0">
+            <a:schemeClr val="accent1"/>
+          </a:fillRef>
+          <a:effectRef idx="1">
+            <a:schemeClr val="accent1"/>
+          </a:effectRef>
+          <a:fontRef idx="minor">
+            <a:schemeClr val="tx1"/>
+          </a:fontRef>
+        </p:style>
+      </p:cxnSp>
+      <p:sp>
+        <p:nvSpPr>
+          <p:cNvPr id="13" name="Rounded Rectangle 12"/>
+          <p:cNvSpPr/>
+          <p:nvPr/>
+        </p:nvSpPr>
+        <p:spPr>
+          <a:xfrm>
+            <a:off x="7772400" y="1417320"/>
+            <a:ext cx="3779215" cy="950976"/>
+          </a:xfrm>
+          <a:prstGeom prst="roundRect">
+            <a:avLst>
+              <a:gd name="adj" fmla="val 8000"/>
+            </a:avLst>
+          </a:prstGeom>
+          <a:solidFill>
+            <a:srgbClr val="FFFFFF"/>
+          </a:solidFill>
+          <a:ln w="15875">
+            <a:solidFill>
+              <a:srgbClr val="C9A227"/>
+            </a:solidFill>
+          </a:ln>
+          <a:effectLst/>
+        </p:spPr>
+        <p:style>
+          <a:lnRef idx="1">
+            <a:schemeClr val="accent1"/>
+          </a:lnRef>
+          <a:fillRef idx="3">
+            <a:schemeClr val="accent1"/>
+          </a:fillRef>
+          <a:effectRef idx="2">
+            <a:schemeClr val="accent1"/>
+          </a:effectRef>
+          <a:fontRef idx="minor">
+            <a:schemeClr val="lt1"/>
+          </a:fontRef>
+        </p:style>
+        <p:txBody>
+          <a:bodyPr rtlCol="0" anchor="ctr"/>
+          <a:lstStyle/>
+          <a:p>
+            <a:pPr algn="ctr"/>
+          </a:p>
+        </p:txBody>
+      </p:sp>
+      <p:sp>
+        <p:nvSpPr>
+          <p:cNvPr id="14" name="TextBox 13"/>
           <p:cNvSpPr txBox="1"/>
           <p:nvPr/>
         </p:nvSpPr>
         <p:spPr>
           <a:xfrm>
-            <a:off x="6263640" y="5349240"/>
-            <a:ext cx="5287975" cy="365760"/>
+            <a:off x="7772400" y="1417320"/>
+            <a:ext cx="3779215" cy="950976"/>
+          </a:xfrm>
+          <a:prstGeom prst="rect">
+            <a:avLst/>
+          </a:prstGeom>
+          <a:noFill/>
+        </p:spPr>
+        <p:txBody>
+          <a:bodyPr wrap="square" anchor="ctr" tIns="36576" bIns="36576">
+            <a:spAutoFit/>
+          </a:bodyPr>
+          <a:lstStyle/>
+          <a:p>
+            <a:pPr algn="l">
+              <a:spcAft>
+                <a:spcPts val="0"/>
+              </a:spcAft>
+            </a:pPr>
+            <a:r>
+              <a:rPr sz="1400" b="1">
+                <a:solidFill>
+                  <a:srgbClr val="0B1F3A"/>
+                </a:solidFill>
+                <a:latin typeface="Calibri"/>
+              </a:rPr>
+              <a:t>Fizik</a:t>
+            </a:r>
+          </a:p>
+          <a:p>
+            <a:pPr algn="l">
+              <a:spcAft>
+                <a:spcPts val="0"/>
+              </a:spcAft>
+            </a:pPr>
+            <a:r>
+              <a:rPr sz="1200" b="0">
+                <a:solidFill>
+                  <a:srgbClr val="1F2937"/>
+                </a:solidFill>
+                <a:latin typeface="Calibri"/>
+              </a:rPr>
+              <a:t>Mexanik, termik, elektr  ·  Barometrik, nur</a:t>
+            </a:r>
+          </a:p>
+        </p:txBody>
+      </p:sp>
+      <p:cxnSp>
+        <p:nvCxnSpPr>
+          <p:cNvPr id="15" name="Connector 14"/>
+          <p:cNvCxnSpPr/>
+          <p:nvPr/>
+        </p:nvCxnSpPr>
+        <p:spPr>
+          <a:xfrm>
+            <a:off x="7612380" y="2916936"/>
+            <a:ext cx="160020" cy="0"/>
+          </a:xfrm>
+          <a:prstGeom prst="line">
+            <a:avLst/>
+          </a:prstGeom>
+          <a:ln w="25400">
+            <a:solidFill>
+              <a:srgbClr val="C9A227"/>
+            </a:solidFill>
+          </a:ln>
+        </p:spPr>
+        <p:style>
+          <a:lnRef idx="2">
+            <a:schemeClr val="accent1"/>
+          </a:lnRef>
+          <a:fillRef idx="0">
+            <a:schemeClr val="accent1"/>
+          </a:fillRef>
+          <a:effectRef idx="1">
+            <a:schemeClr val="accent1"/>
+          </a:effectRef>
+          <a:fontRef idx="minor">
+            <a:schemeClr val="tx1"/>
+          </a:fontRef>
+        </p:style>
+      </p:cxnSp>
+      <p:sp>
+        <p:nvSpPr>
+          <p:cNvPr id="16" name="Rounded Rectangle 15"/>
+          <p:cNvSpPr/>
+          <p:nvPr/>
+        </p:nvSpPr>
+        <p:spPr>
+          <a:xfrm>
+            <a:off x="7772400" y="2441448"/>
+            <a:ext cx="3779215" cy="950976"/>
+          </a:xfrm>
+          <a:prstGeom prst="roundRect">
+            <a:avLst>
+              <a:gd name="adj" fmla="val 8000"/>
+            </a:avLst>
+          </a:prstGeom>
+          <a:solidFill>
+            <a:srgbClr val="FFFFFF"/>
+          </a:solidFill>
+          <a:ln w="15875">
+            <a:solidFill>
+              <a:srgbClr val="C9A227"/>
+            </a:solidFill>
+          </a:ln>
+          <a:effectLst/>
+        </p:spPr>
+        <p:style>
+          <a:lnRef idx="1">
+            <a:schemeClr val="accent1"/>
+          </a:lnRef>
+          <a:fillRef idx="3">
+            <a:schemeClr val="accent1"/>
+          </a:fillRef>
+          <a:effectRef idx="2">
+            <a:schemeClr val="accent1"/>
+          </a:effectRef>
+          <a:fontRef idx="minor">
+            <a:schemeClr val="lt1"/>
+          </a:fontRef>
+        </p:style>
+        <p:txBody>
+          <a:bodyPr rtlCol="0" anchor="ctr"/>
+          <a:lstStyle/>
+          <a:p>
+            <a:pPr algn="ctr"/>
+          </a:p>
+        </p:txBody>
+      </p:sp>
+      <p:sp>
+        <p:nvSpPr>
+          <p:cNvPr id="17" name="TextBox 16"/>
+          <p:cNvSpPr txBox="1"/>
+          <p:nvPr/>
+        </p:nvSpPr>
+        <p:spPr>
+          <a:xfrm>
+            <a:off x="7772400" y="2441448"/>
+            <a:ext cx="3779215" cy="950976"/>
+          </a:xfrm>
+          <a:prstGeom prst="rect">
+            <a:avLst/>
+          </a:prstGeom>
+          <a:noFill/>
+        </p:spPr>
+        <p:txBody>
+          <a:bodyPr wrap="square" anchor="ctr" tIns="36576" bIns="36576">
+            <a:spAutoFit/>
+          </a:bodyPr>
+          <a:lstStyle/>
+          <a:p>
+            <a:pPr algn="l">
+              <a:spcAft>
+                <a:spcPts val="0"/>
+              </a:spcAft>
+            </a:pPr>
+            <a:r>
+              <a:rPr sz="1400" b="1">
+                <a:solidFill>
+                  <a:srgbClr val="0B1F3A"/>
+                </a:solidFill>
+                <a:latin typeface="Calibri"/>
+              </a:rPr>
+              <a:t>Kimyoviy</a:t>
+            </a:r>
+          </a:p>
+          <a:p>
+            <a:pPr algn="l">
+              <a:spcAft>
+                <a:spcPts val="0"/>
+              </a:spcAft>
+            </a:pPr>
+            <a:r>
+              <a:rPr sz="1200" b="0">
+                <a:solidFill>
+                  <a:srgbClr val="1F2937"/>
+                </a:solidFill>
+                <a:latin typeface="Calibri"/>
+              </a:rPr>
+              <a:t>Zaharlar, kimikatlar  ·  Dori-darmonlar</a:t>
+            </a:r>
+          </a:p>
+        </p:txBody>
+      </p:sp>
+      <p:cxnSp>
+        <p:nvCxnSpPr>
+          <p:cNvPr id="18" name="Connector 17"/>
+          <p:cNvCxnSpPr/>
+          <p:nvPr/>
+        </p:nvCxnSpPr>
+        <p:spPr>
+          <a:xfrm>
+            <a:off x="7612380" y="3941064"/>
+            <a:ext cx="160020" cy="0"/>
+          </a:xfrm>
+          <a:prstGeom prst="line">
+            <a:avLst/>
+          </a:prstGeom>
+          <a:ln w="25400">
+            <a:solidFill>
+              <a:srgbClr val="C9A227"/>
+            </a:solidFill>
+          </a:ln>
+        </p:spPr>
+        <p:style>
+          <a:lnRef idx="2">
+            <a:schemeClr val="accent1"/>
+          </a:lnRef>
+          <a:fillRef idx="0">
+            <a:schemeClr val="accent1"/>
+          </a:fillRef>
+          <a:effectRef idx="1">
+            <a:schemeClr val="accent1"/>
+          </a:effectRef>
+          <a:fontRef idx="minor">
+            <a:schemeClr val="tx1"/>
+          </a:fontRef>
+        </p:style>
+      </p:cxnSp>
+      <p:sp>
+        <p:nvSpPr>
+          <p:cNvPr id="19" name="Rounded Rectangle 18"/>
+          <p:cNvSpPr/>
+          <p:nvPr/>
+        </p:nvSpPr>
+        <p:spPr>
+          <a:xfrm>
+            <a:off x="7772400" y="3465576"/>
+            <a:ext cx="3779215" cy="950976"/>
+          </a:xfrm>
+          <a:prstGeom prst="roundRect">
+            <a:avLst>
+              <a:gd name="adj" fmla="val 8000"/>
+            </a:avLst>
+          </a:prstGeom>
+          <a:solidFill>
+            <a:srgbClr val="FFFFFF"/>
+          </a:solidFill>
+          <a:ln w="15875">
+            <a:solidFill>
+              <a:srgbClr val="C9A227"/>
+            </a:solidFill>
+          </a:ln>
+          <a:effectLst/>
+        </p:spPr>
+        <p:style>
+          <a:lnRef idx="1">
+            <a:schemeClr val="accent1"/>
+          </a:lnRef>
+          <a:fillRef idx="3">
+            <a:schemeClr val="accent1"/>
+          </a:fillRef>
+          <a:effectRef idx="2">
+            <a:schemeClr val="accent1"/>
+          </a:effectRef>
+          <a:fontRef idx="minor">
+            <a:schemeClr val="lt1"/>
+          </a:fontRef>
+        </p:style>
+        <p:txBody>
+          <a:bodyPr rtlCol="0" anchor="ctr"/>
+          <a:lstStyle/>
+          <a:p>
+            <a:pPr algn="ctr"/>
+          </a:p>
+        </p:txBody>
+      </p:sp>
+      <p:sp>
+        <p:nvSpPr>
+          <p:cNvPr id="20" name="TextBox 19"/>
+          <p:cNvSpPr txBox="1"/>
+          <p:nvPr/>
+        </p:nvSpPr>
+        <p:spPr>
+          <a:xfrm>
+            <a:off x="7772400" y="3465576"/>
+            <a:ext cx="3779215" cy="950976"/>
+          </a:xfrm>
+          <a:prstGeom prst="rect">
+            <a:avLst/>
+          </a:prstGeom>
+          <a:noFill/>
+        </p:spPr>
+        <p:txBody>
+          <a:bodyPr wrap="square" anchor="ctr" tIns="36576" bIns="36576">
+            <a:spAutoFit/>
+          </a:bodyPr>
+          <a:lstStyle/>
+          <a:p>
+            <a:pPr algn="l">
+              <a:spcAft>
+                <a:spcPts val="0"/>
+              </a:spcAft>
+            </a:pPr>
+            <a:r>
+              <a:rPr sz="1400" b="1">
+                <a:solidFill>
+                  <a:srgbClr val="0B1F3A"/>
+                </a:solidFill>
+                <a:latin typeface="Calibri"/>
+              </a:rPr>
+              <a:t>Biologik</a:t>
+            </a:r>
+          </a:p>
+          <a:p>
+            <a:pPr algn="l">
+              <a:spcAft>
+                <a:spcPts val="0"/>
+              </a:spcAft>
+            </a:pPr>
+            <a:r>
+              <a:rPr sz="1200" b="0">
+                <a:solidFill>
+                  <a:srgbClr val="1F2937"/>
+                </a:solidFill>
+                <a:latin typeface="Calibri"/>
+              </a:rPr>
+              <a:t>O‘simlik/hayvon toksinlari  ·  Mikroorganizmlar</a:t>
+            </a:r>
+          </a:p>
+        </p:txBody>
+      </p:sp>
+      <p:cxnSp>
+        <p:nvCxnSpPr>
+          <p:cNvPr id="21" name="Connector 20"/>
+          <p:cNvCxnSpPr/>
+          <p:nvPr/>
+        </p:nvCxnSpPr>
+        <p:spPr>
+          <a:xfrm>
+            <a:off x="7612380" y="4965192"/>
+            <a:ext cx="160020" cy="0"/>
+          </a:xfrm>
+          <a:prstGeom prst="line">
+            <a:avLst/>
+          </a:prstGeom>
+          <a:ln w="25400">
+            <a:solidFill>
+              <a:srgbClr val="C9A227"/>
+            </a:solidFill>
+          </a:ln>
+        </p:spPr>
+        <p:style>
+          <a:lnRef idx="2">
+            <a:schemeClr val="accent1"/>
+          </a:lnRef>
+          <a:fillRef idx="0">
+            <a:schemeClr val="accent1"/>
+          </a:fillRef>
+          <a:effectRef idx="1">
+            <a:schemeClr val="accent1"/>
+          </a:effectRef>
+          <a:fontRef idx="minor">
+            <a:schemeClr val="tx1"/>
+          </a:fontRef>
+        </p:style>
+      </p:cxnSp>
+      <p:sp>
+        <p:nvSpPr>
+          <p:cNvPr id="22" name="Rounded Rectangle 21"/>
+          <p:cNvSpPr/>
+          <p:nvPr/>
+        </p:nvSpPr>
+        <p:spPr>
+          <a:xfrm>
+            <a:off x="7772400" y="4489704"/>
+            <a:ext cx="3779215" cy="950976"/>
+          </a:xfrm>
+          <a:prstGeom prst="roundRect">
+            <a:avLst>
+              <a:gd name="adj" fmla="val 8000"/>
+            </a:avLst>
+          </a:prstGeom>
+          <a:solidFill>
+            <a:srgbClr val="FFFFFF"/>
+          </a:solidFill>
+          <a:ln w="15875">
+            <a:solidFill>
+              <a:srgbClr val="C9A227"/>
+            </a:solidFill>
+          </a:ln>
+          <a:effectLst/>
+        </p:spPr>
+        <p:style>
+          <a:lnRef idx="1">
+            <a:schemeClr val="accent1"/>
+          </a:lnRef>
+          <a:fillRef idx="3">
+            <a:schemeClr val="accent1"/>
+          </a:fillRef>
+          <a:effectRef idx="2">
+            <a:schemeClr val="accent1"/>
+          </a:effectRef>
+          <a:fontRef idx="minor">
+            <a:schemeClr val="lt1"/>
+          </a:fontRef>
+        </p:style>
+        <p:txBody>
+          <a:bodyPr rtlCol="0" anchor="ctr"/>
+          <a:lstStyle/>
+          <a:p>
+            <a:pPr algn="ctr"/>
+          </a:p>
+        </p:txBody>
+      </p:sp>
+      <p:sp>
+        <p:nvSpPr>
+          <p:cNvPr id="23" name="TextBox 22"/>
+          <p:cNvSpPr txBox="1"/>
+          <p:nvPr/>
+        </p:nvSpPr>
+        <p:spPr>
+          <a:xfrm>
+            <a:off x="7772400" y="4489704"/>
+            <a:ext cx="3779215" cy="950976"/>
+          </a:xfrm>
+          <a:prstGeom prst="rect">
+            <a:avLst/>
+          </a:prstGeom>
+          <a:noFill/>
+        </p:spPr>
+        <p:txBody>
+          <a:bodyPr wrap="square" anchor="ctr" tIns="36576" bIns="36576">
+            <a:spAutoFit/>
+          </a:bodyPr>
+          <a:lstStyle/>
+          <a:p>
+            <a:pPr algn="l">
+              <a:spcAft>
+                <a:spcPts val="0"/>
+              </a:spcAft>
+            </a:pPr>
+            <a:r>
+              <a:rPr sz="1400" b="1">
+                <a:solidFill>
+                  <a:srgbClr val="0B1F3A"/>
+                </a:solidFill>
+                <a:latin typeface="Calibri"/>
+              </a:rPr>
+              <a:t>Ruhiy</a:t>
+            </a:r>
+          </a:p>
+          <a:p>
+            <a:pPr algn="l">
+              <a:spcAft>
+                <a:spcPts val="0"/>
+              </a:spcAft>
+            </a:pPr>
+            <a:r>
+              <a:rPr sz="1200" b="0">
+                <a:solidFill>
+                  <a:srgbClr val="1F2937"/>
+                </a:solidFill>
+                <a:latin typeface="Calibri"/>
+              </a:rPr>
+              <a:t>Kuchli hayajon, qo‘rquv</a:t>
+            </a:r>
+          </a:p>
+        </p:txBody>
+      </p:sp>
+      <p:sp>
+        <p:nvSpPr>
+          <p:cNvPr id="24" name="TextBox 23"/>
+          <p:cNvSpPr txBox="1"/>
+          <p:nvPr/>
+        </p:nvSpPr>
+        <p:spPr>
+          <a:xfrm>
+            <a:off x="5440680" y="5486400"/>
+            <a:ext cx="6110935" cy="365760"/>
           </a:xfrm>
           <a:prstGeom prst="rect">
             <a:avLst/>
@@ -23786,7 +26582,7 @@
           <a:lstStyle/>
           <a:p>
             <a:r>
-              <a:rPr sz="1100" b="0">
+              <a:rPr sz="1200" b="0">
                 <a:solidFill>
                   <a:srgbClr val="6B7280"/>
                 </a:solidFill>
@@ -23799,7 +26595,7 @@
       </p:sp>
       <p:sp>
         <p:nvSpPr>
-          <p:cNvPr id="11" name="TextBox 10"/>
+          <p:cNvPr id="25" name="TextBox 24"/>
           <p:cNvSpPr txBox="1"/>
           <p:nvPr/>
         </p:nvSpPr>
@@ -27290,7 +30086,7 @@
         <p:spPr>
           <a:xfrm>
             <a:off x="640080" y="1417320"/>
-            <a:ext cx="5394960" cy="4480560"/>
+            <a:ext cx="4572000" cy="4480560"/>
           </a:xfrm>
           <a:prstGeom prst="rect">
             <a:avLst/>
@@ -27352,368 +30148,316 @@
           </a:p>
         </p:txBody>
       </p:sp>
-      <p:graphicFrame>
-        <p:nvGraphicFramePr>
-          <p:cNvPr id="9" name="Table 8"/>
-          <p:cNvGraphicFramePr>
-            <a:graphicFrameLocks noGrp="1"/>
-          </p:cNvGraphicFramePr>
-          <p:nvPr/>
-        </p:nvGraphicFramePr>
-        <p:xfrm>
-          <a:off x="6263640" y="1463040"/>
-          <a:ext cx="5287974" cy="3072380"/>
-        </p:xfrm>
-        <a:graphic>
-          <a:graphicData uri="http://schemas.openxmlformats.org/drawingml/2006/table">
-            <a:tbl>
-              <a:tblPr firstRow="1" bandRow="1">
-                <a:tableStyleId>{5C22544A-7EE6-4342-B048-85BDC9FD1C3A}</a:tableStyleId>
-              </a:tblPr>
-              <a:tblGrid>
-                <a:gridCol w="1286965"/>
-                <a:gridCol w="1455420"/>
-                <a:gridCol w="2545589"/>
-              </a:tblGrid>
-              <a:tr h="614476">
-                <a:tc>
-                  <a:txBody>
-                    <a:bodyPr/>
-                    <a:lstStyle/>
-                    <a:p>
-                      <a:r>
-                        <a:rPr sz="1600" b="1">
-                          <a:solidFill>
-                            <a:srgbClr val="FFFFFF"/>
-                          </a:solidFill>
-                        </a:rPr>
-                        <a:t>Mezon</a:t>
-                      </a:r>
-                    </a:p>
-                  </a:txBody>
-                  <a:tcPr marL="73152" marR="73152" marT="36576" marB="36576">
-                    <a:solidFill>
-                      <a:srgbClr val="0B1F3A"/>
-                    </a:solidFill>
-                  </a:tcPr>
-                </a:tc>
-                <a:tc>
-                  <a:txBody>
-                    <a:bodyPr/>
-                    <a:lstStyle/>
-                    <a:p>
-                      <a:r>
-                        <a:rPr sz="1600" b="1">
-                          <a:solidFill>
-                            <a:srgbClr val="FFFFFF"/>
-                          </a:solidFill>
-                        </a:rPr>
-                        <a:t>Turi</a:t>
-                      </a:r>
-                    </a:p>
-                  </a:txBody>
-                  <a:tcPr marL="73152" marR="73152" marT="36576" marB="36576">
-                    <a:solidFill>
-                      <a:srgbClr val="0B1F3A"/>
-                    </a:solidFill>
-                  </a:tcPr>
-                </a:tc>
-                <a:tc>
-                  <a:txBody>
-                    <a:bodyPr/>
-                    <a:lstStyle/>
-                    <a:p>
-                      <a:r>
-                        <a:rPr sz="1600" b="1">
-                          <a:solidFill>
-                            <a:srgbClr val="FFFFFF"/>
-                          </a:solidFill>
-                        </a:rPr>
-                        <a:t>Ma’nosi</a:t>
-                      </a:r>
-                    </a:p>
-                  </a:txBody>
-                  <a:tcPr marL="73152" marR="73152" marT="36576" marB="36576">
-                    <a:solidFill>
-                      <a:srgbClr val="0B1F3A"/>
-                    </a:solidFill>
-                  </a:tcPr>
-                </a:tc>
-              </a:tr>
-              <a:tr h="614476">
-                <a:tc>
-                  <a:txBody>
-                    <a:bodyPr/>
-                    <a:lstStyle/>
-                    <a:p>
-                      <a:r>
-                        <a:rPr sz="1500" b="0">
-                          <a:solidFill>
-                            <a:srgbClr val="1F2937"/>
-                          </a:solidFill>
-                        </a:rPr>
-                        <a:t>Ta’sir turi</a:t>
-                      </a:r>
-                    </a:p>
-                  </a:txBody>
-                  <a:tcPr marL="73152" marR="73152" marT="36576" marB="36576">
-                    <a:solidFill>
-                      <a:srgbClr val="E8EEF6"/>
-                    </a:solidFill>
-                  </a:tcPr>
-                </a:tc>
-                <a:tc>
-                  <a:txBody>
-                    <a:bodyPr/>
-                    <a:lstStyle/>
-                    <a:p>
-                      <a:r>
-                        <a:rPr sz="1500" b="0">
-                          <a:solidFill>
-                            <a:srgbClr val="1F2937"/>
-                          </a:solidFill>
-                        </a:rPr>
-                        <a:t>Oddiy</a:t>
-                      </a:r>
-                    </a:p>
-                  </a:txBody>
-                  <a:tcPr marL="73152" marR="73152" marT="36576" marB="36576">
-                    <a:solidFill>
-                      <a:srgbClr val="E8EEF6"/>
-                    </a:solidFill>
-                  </a:tcPr>
-                </a:tc>
-                <a:tc>
-                  <a:txBody>
-                    <a:bodyPr/>
-                    <a:lstStyle/>
-                    <a:p>
-                      <a:r>
-                        <a:rPr sz="1500" b="0">
-                          <a:solidFill>
-                            <a:srgbClr val="1F2937"/>
-                          </a:solidFill>
-                        </a:rPr>
-                        <a:t>Bitta omil ta’siri</a:t>
-                      </a:r>
-                    </a:p>
-                  </a:txBody>
-                  <a:tcPr marL="73152" marR="73152" marT="36576" marB="36576">
-                    <a:solidFill>
-                      <a:srgbClr val="E8EEF6"/>
-                    </a:solidFill>
-                  </a:tcPr>
-                </a:tc>
-              </a:tr>
-              <a:tr h="614476">
-                <a:tc>
-                  <a:txBody>
-                    <a:bodyPr/>
-                    <a:lstStyle/>
-                    <a:p>
-                      <a:r>
-                        <a:rPr sz="1500" b="0">
-                          <a:solidFill>
-                            <a:srgbClr val="1F2937"/>
-                          </a:solidFill>
-                        </a:rPr>
-                        <a:t>Ta’sir turi</a:t>
-                      </a:r>
-                    </a:p>
-                  </a:txBody>
-                  <a:tcPr marL="73152" marR="73152" marT="36576" marB="36576">
-                    <a:solidFill>
-                      <a:srgbClr val="FFFFFF"/>
-                    </a:solidFill>
-                  </a:tcPr>
-                </a:tc>
-                <a:tc>
-                  <a:txBody>
-                    <a:bodyPr/>
-                    <a:lstStyle/>
-                    <a:p>
-                      <a:r>
-                        <a:rPr sz="1500" b="0">
-                          <a:solidFill>
-                            <a:srgbClr val="1F2937"/>
-                          </a:solidFill>
-                        </a:rPr>
-                        <a:t>Murakkab</a:t>
-                      </a:r>
-                    </a:p>
-                  </a:txBody>
-                  <a:tcPr marL="73152" marR="73152" marT="36576" marB="36576">
-                    <a:solidFill>
-                      <a:srgbClr val="FFFFFF"/>
-                    </a:solidFill>
-                  </a:tcPr>
-                </a:tc>
-                <a:tc>
-                  <a:txBody>
-                    <a:bodyPr/>
-                    <a:lstStyle/>
-                    <a:p>
-                      <a:r>
-                        <a:rPr sz="1500" b="0">
-                          <a:solidFill>
-                            <a:srgbClr val="1F2937"/>
-                          </a:solidFill>
-                        </a:rPr>
-                        <a:t>Ikki va undan ortiq tur ta’siri</a:t>
-                      </a:r>
-                    </a:p>
-                  </a:txBody>
-                  <a:tcPr marL="73152" marR="73152" marT="36576" marB="36576">
-                    <a:solidFill>
-                      <a:srgbClr val="FFFFFF"/>
-                    </a:solidFill>
-                  </a:tcPr>
-                </a:tc>
-              </a:tr>
-              <a:tr h="614476">
-                <a:tc>
-                  <a:txBody>
-                    <a:bodyPr/>
-                    <a:lstStyle/>
-                    <a:p>
-                      <a:r>
-                        <a:rPr sz="1500" b="0">
-                          <a:solidFill>
-                            <a:srgbClr val="1F2937"/>
-                          </a:solidFill>
-                        </a:rPr>
-                        <a:t>Soha</a:t>
-                      </a:r>
-                    </a:p>
-                  </a:txBody>
-                  <a:tcPr marL="73152" marR="73152" marT="36576" marB="36576">
-                    <a:solidFill>
-                      <a:srgbClr val="E8EEF6"/>
-                    </a:solidFill>
-                  </a:tcPr>
-                </a:tc>
-                <a:tc>
-                  <a:txBody>
-                    <a:bodyPr/>
-                    <a:lstStyle/>
-                    <a:p>
-                      <a:r>
-                        <a:rPr sz="1500" b="0">
-                          <a:solidFill>
-                            <a:srgbClr val="1F2937"/>
-                          </a:solidFill>
-                        </a:rPr>
-                        <a:t>Cheklangan</a:t>
-                      </a:r>
-                    </a:p>
-                  </a:txBody>
-                  <a:tcPr marL="73152" marR="73152" marT="36576" marB="36576">
-                    <a:solidFill>
-                      <a:srgbClr val="E8EEF6"/>
-                    </a:solidFill>
-                  </a:tcPr>
-                </a:tc>
-                <a:tc>
-                  <a:txBody>
-                    <a:bodyPr/>
-                    <a:lstStyle/>
-                    <a:p>
-                      <a:r>
-                        <a:rPr sz="1500" b="0">
-                          <a:solidFill>
-                            <a:srgbClr val="1F2937"/>
-                          </a:solidFill>
-                        </a:rPr>
-                        <a:t>Bir soha yoki bir segment</a:t>
-                      </a:r>
-                    </a:p>
-                  </a:txBody>
-                  <a:tcPr marL="73152" marR="73152" marT="36576" marB="36576">
-                    <a:solidFill>
-                      <a:srgbClr val="E8EEF6"/>
-                    </a:solidFill>
-                  </a:tcPr>
-                </a:tc>
-              </a:tr>
-              <a:tr h="614476">
-                <a:tc>
-                  <a:txBody>
-                    <a:bodyPr/>
-                    <a:lstStyle/>
-                    <a:p>
-                      <a:r>
-                        <a:rPr sz="1500" b="0">
-                          <a:solidFill>
-                            <a:srgbClr val="1F2937"/>
-                          </a:solidFill>
-                        </a:rPr>
-                        <a:t>Soha</a:t>
-                      </a:r>
-                    </a:p>
-                  </a:txBody>
-                  <a:tcPr marL="73152" marR="73152" marT="36576" marB="36576">
-                    <a:solidFill>
-                      <a:srgbClr val="FFFFFF"/>
-                    </a:solidFill>
-                  </a:tcPr>
-                </a:tc>
-                <a:tc>
-                  <a:txBody>
-                    <a:bodyPr/>
-                    <a:lstStyle/>
-                    <a:p>
-                      <a:r>
-                        <a:rPr sz="1500" b="0">
-                          <a:solidFill>
-                            <a:srgbClr val="1F2937"/>
-                          </a:solidFill>
-                        </a:rPr>
-                        <a:t>Qo‘sh</a:t>
-                      </a:r>
-                    </a:p>
-                  </a:txBody>
-                  <a:tcPr marL="73152" marR="73152" marT="36576" marB="36576">
-                    <a:solidFill>
-                      <a:srgbClr val="FFFFFF"/>
-                    </a:solidFill>
-                  </a:tcPr>
-                </a:tc>
-                <a:tc>
-                  <a:txBody>
-                    <a:bodyPr/>
-                    <a:lstStyle/>
-                    <a:p>
-                      <a:r>
-                        <a:rPr sz="1500" b="0">
-                          <a:solidFill>
-                            <a:srgbClr val="1F2937"/>
-                          </a:solidFill>
-                        </a:rPr>
-                        <a:t>Ikki va undan ortiq soha/segment</a:t>
-                      </a:r>
-                    </a:p>
-                  </a:txBody>
-                  <a:tcPr marL="73152" marR="73152" marT="36576" marB="36576">
-                    <a:solidFill>
-                      <a:srgbClr val="FFFFFF"/>
-                    </a:solidFill>
-                  </a:tcPr>
-                </a:tc>
-              </a:tr>
-            </a:tbl>
-          </a:graphicData>
-        </a:graphic>
-      </p:graphicFrame>
-      <p:sp>
-        <p:nvSpPr>
-          <p:cNvPr id="10" name="TextBox 9"/>
+      <p:sp>
+        <p:nvSpPr>
+          <p:cNvPr id="9" name="Rounded Rectangle 8"/>
+          <p:cNvSpPr/>
+          <p:nvPr/>
+        </p:nvSpPr>
+        <p:spPr>
+          <a:xfrm>
+            <a:off x="5440680" y="1417320"/>
+            <a:ext cx="2986887" cy="548640"/>
+          </a:xfrm>
+          <a:prstGeom prst="roundRect">
+            <a:avLst/>
+          </a:prstGeom>
+          <a:solidFill>
+            <a:srgbClr val="0B1F3A"/>
+          </a:solidFill>
+          <a:ln>
+            <a:noFill/>
+          </a:ln>
+          <a:effectLst/>
+        </p:spPr>
+        <p:style>
+          <a:lnRef idx="1">
+            <a:schemeClr val="accent1"/>
+          </a:lnRef>
+          <a:fillRef idx="3">
+            <a:schemeClr val="accent1"/>
+          </a:fillRef>
+          <a:effectRef idx="2">
+            <a:schemeClr val="accent1"/>
+          </a:effectRef>
+          <a:fontRef idx="minor">
+            <a:schemeClr val="lt1"/>
+          </a:fontRef>
+        </p:style>
+        <p:txBody>
+          <a:bodyPr rtlCol="0" anchor="ctr" wrap="square" tIns="36576" bIns="36576"/>
+          <a:lstStyle/>
+          <a:p>
+            <a:pPr algn="ctr">
+              <a:spcAft>
+                <a:spcPts val="200"/>
+              </a:spcAft>
+            </a:pPr>
+            <a:r>
+              <a:rPr sz="1600" b="1">
+                <a:solidFill>
+                  <a:srgbClr val="FFFFFF"/>
+                </a:solidFill>
+                <a:latin typeface="Calibri"/>
+              </a:rPr>
+              <a:t>Ta’sir turi bo‘yicha</a:t>
+            </a:r>
+          </a:p>
+        </p:txBody>
+      </p:sp>
+      <p:sp>
+        <p:nvSpPr>
+          <p:cNvPr id="10" name="Rectangle 9"/>
+          <p:cNvSpPr/>
+          <p:nvPr/>
+        </p:nvSpPr>
+        <p:spPr>
+          <a:xfrm>
+            <a:off x="5440680" y="2020824"/>
+            <a:ext cx="2986887" cy="3419856"/>
+          </a:xfrm>
+          <a:prstGeom prst="rect">
+            <a:avLst/>
+          </a:prstGeom>
+          <a:solidFill>
+            <a:srgbClr val="E8EEF6"/>
+          </a:solidFill>
+          <a:ln w="15875">
+            <a:solidFill>
+              <a:srgbClr val="E8EEF6"/>
+            </a:solidFill>
+          </a:ln>
+          <a:effectLst/>
+        </p:spPr>
+        <p:style>
+          <a:lnRef idx="1">
+            <a:schemeClr val="accent1"/>
+          </a:lnRef>
+          <a:fillRef idx="3">
+            <a:schemeClr val="accent1"/>
+          </a:fillRef>
+          <a:effectRef idx="2">
+            <a:schemeClr val="accent1"/>
+          </a:effectRef>
+          <a:fontRef idx="minor">
+            <a:schemeClr val="lt1"/>
+          </a:fontRef>
+        </p:style>
+        <p:txBody>
+          <a:bodyPr rtlCol="0" anchor="t" wrap="square" tIns="36576" bIns="36576"/>
+          <a:lstStyle/>
+          <a:p>
+            <a:pPr algn="l">
+              <a:spcAft>
+                <a:spcPts val="700"/>
+              </a:spcAft>
+            </a:pPr>
+            <a:r>
+              <a:rPr sz="1500" b="1">
+                <a:solidFill>
+                  <a:srgbClr val="C9A227"/>
+                </a:solidFill>
+                <a:latin typeface="Calibri"/>
+              </a:rPr>
+              <a:t>●  </a:t>
+            </a:r>
+            <a:r>
+              <a:rPr sz="1500" b="0">
+                <a:solidFill>
+                  <a:srgbClr val="1F2937"/>
+                </a:solidFill>
+                <a:latin typeface="Calibri"/>
+              </a:rPr>
+              <a:t>Oddiy: bitta omil ta’siri</a:t>
+            </a:r>
+          </a:p>
+          <a:p>
+            <a:pPr algn="l">
+              <a:spcAft>
+                <a:spcPts val="700"/>
+              </a:spcAft>
+            </a:pPr>
+            <a:r>
+              <a:rPr sz="1500" b="1">
+                <a:solidFill>
+                  <a:srgbClr val="C9A227"/>
+                </a:solidFill>
+                <a:latin typeface="Calibri"/>
+              </a:rPr>
+              <a:t>●  </a:t>
+            </a:r>
+            <a:r>
+              <a:rPr sz="1500" b="0">
+                <a:solidFill>
+                  <a:srgbClr val="1F2937"/>
+                </a:solidFill>
+                <a:latin typeface="Calibri"/>
+              </a:rPr>
+              <a:t>Murakkab: ikki va undan ortiq tur</a:t>
+            </a:r>
+          </a:p>
+        </p:txBody>
+      </p:sp>
+      <p:sp>
+        <p:nvSpPr>
+          <p:cNvPr id="11" name="Rounded Rectangle 10"/>
+          <p:cNvSpPr/>
+          <p:nvPr/>
+        </p:nvSpPr>
+        <p:spPr>
+          <a:xfrm>
+            <a:off x="8564727" y="1417320"/>
+            <a:ext cx="2986887" cy="548640"/>
+          </a:xfrm>
+          <a:prstGeom prst="roundRect">
+            <a:avLst/>
+          </a:prstGeom>
+          <a:solidFill>
+            <a:srgbClr val="1F4E79"/>
+          </a:solidFill>
+          <a:ln>
+            <a:noFill/>
+          </a:ln>
+          <a:effectLst/>
+        </p:spPr>
+        <p:style>
+          <a:lnRef idx="1">
+            <a:schemeClr val="accent1"/>
+          </a:lnRef>
+          <a:fillRef idx="3">
+            <a:schemeClr val="accent1"/>
+          </a:fillRef>
+          <a:effectRef idx="2">
+            <a:schemeClr val="accent1"/>
+          </a:effectRef>
+          <a:fontRef idx="minor">
+            <a:schemeClr val="lt1"/>
+          </a:fontRef>
+        </p:style>
+        <p:txBody>
+          <a:bodyPr rtlCol="0" anchor="ctr" wrap="square" tIns="36576" bIns="36576"/>
+          <a:lstStyle/>
+          <a:p>
+            <a:pPr algn="ctr">
+              <a:spcAft>
+                <a:spcPts val="200"/>
+              </a:spcAft>
+            </a:pPr>
+            <a:r>
+              <a:rPr sz="1600" b="1">
+                <a:solidFill>
+                  <a:srgbClr val="FFFFFF"/>
+                </a:solidFill>
+                <a:latin typeface="Calibri"/>
+              </a:rPr>
+              <a:t>Soha bo‘yicha</a:t>
+            </a:r>
+          </a:p>
+        </p:txBody>
+      </p:sp>
+      <p:sp>
+        <p:nvSpPr>
+          <p:cNvPr id="12" name="Rectangle 11"/>
+          <p:cNvSpPr/>
+          <p:nvPr/>
+        </p:nvSpPr>
+        <p:spPr>
+          <a:xfrm>
+            <a:off x="8564727" y="2020824"/>
+            <a:ext cx="2986887" cy="3419856"/>
+          </a:xfrm>
+          <a:prstGeom prst="rect">
+            <a:avLst/>
+          </a:prstGeom>
+          <a:solidFill>
+            <a:srgbClr val="E8EEF6"/>
+          </a:solidFill>
+          <a:ln w="15875">
+            <a:solidFill>
+              <a:srgbClr val="E8EEF6"/>
+            </a:solidFill>
+          </a:ln>
+          <a:effectLst/>
+        </p:spPr>
+        <p:style>
+          <a:lnRef idx="1">
+            <a:schemeClr val="accent1"/>
+          </a:lnRef>
+          <a:fillRef idx="3">
+            <a:schemeClr val="accent1"/>
+          </a:fillRef>
+          <a:effectRef idx="2">
+            <a:schemeClr val="accent1"/>
+          </a:effectRef>
+          <a:fontRef idx="minor">
+            <a:schemeClr val="lt1"/>
+          </a:fontRef>
+        </p:style>
+        <p:txBody>
+          <a:bodyPr rtlCol="0" anchor="t" wrap="square" tIns="36576" bIns="36576"/>
+          <a:lstStyle/>
+          <a:p>
+            <a:pPr algn="l">
+              <a:spcAft>
+                <a:spcPts val="700"/>
+              </a:spcAft>
+            </a:pPr>
+            <a:r>
+              <a:rPr sz="1500" b="1">
+                <a:solidFill>
+                  <a:srgbClr val="C9A227"/>
+                </a:solidFill>
+                <a:latin typeface="Calibri"/>
+              </a:rPr>
+              <a:t>●  </a:t>
+            </a:r>
+            <a:r>
+              <a:rPr sz="1500" b="0">
+                <a:solidFill>
+                  <a:srgbClr val="1F2937"/>
+                </a:solidFill>
+                <a:latin typeface="Calibri"/>
+              </a:rPr>
+              <a:t>Cheklangan: bir soha yoki segment</a:t>
+            </a:r>
+          </a:p>
+          <a:p>
+            <a:pPr algn="l">
+              <a:spcAft>
+                <a:spcPts val="700"/>
+              </a:spcAft>
+            </a:pPr>
+            <a:r>
+              <a:rPr sz="1500" b="1">
+                <a:solidFill>
+                  <a:srgbClr val="C9A227"/>
+                </a:solidFill>
+                <a:latin typeface="Calibri"/>
+              </a:rPr>
+              <a:t>●  </a:t>
+            </a:r>
+            <a:r>
+              <a:rPr sz="1500" b="0">
+                <a:solidFill>
+                  <a:srgbClr val="1F2937"/>
+                </a:solidFill>
+                <a:latin typeface="Calibri"/>
+              </a:rPr>
+              <a:t>Qo‘sh: ikki va undan ortiq soha</a:t>
+            </a:r>
+          </a:p>
+        </p:txBody>
+      </p:sp>
+      <p:sp>
+        <p:nvSpPr>
+          <p:cNvPr id="13" name="TextBox 12"/>
           <p:cNvSpPr txBox="1"/>
           <p:nvPr/>
         </p:nvSpPr>
         <p:spPr>
           <a:xfrm>
-            <a:off x="6263640" y="5349240"/>
-            <a:ext cx="5287975" cy="365760"/>
+            <a:off x="5440680" y="5486400"/>
+            <a:ext cx="6110935" cy="365760"/>
           </a:xfrm>
           <a:prstGeom prst="rect">
             <a:avLst/>
@@ -27727,7 +30471,7 @@
           <a:lstStyle/>
           <a:p>
             <a:r>
-              <a:rPr sz="1100" b="0">
+              <a:rPr sz="1200" b="0">
                 <a:solidFill>
                   <a:srgbClr val="6B7280"/>
                 </a:solidFill>
@@ -27740,7 +30484,7 @@
       </p:sp>
       <p:sp>
         <p:nvSpPr>
-          <p:cNvPr id="11" name="TextBox 10"/>
+          <p:cNvPr id="14" name="TextBox 13"/>
           <p:cNvSpPr txBox="1"/>
           <p:nvPr/>
         </p:nvSpPr>
